--- a/puzzle-realty/out/puzzle-realty-zero-budget.pptx
+++ b/puzzle-realty/out/puzzle-realty-zero-budget.pptx
@@ -5,28 +5,28 @@
     <p:sldMasterId id="2147483648" r:id="rId1"/>
   </p:sldMasterIdLst>
   <p:sldIdLst>
-    <p:sldId id="256" r:id="rId7"/>
-    <p:sldId id="257" r:id="rId9"/>
-    <p:sldId id="258" r:id="rId10"/>
-    <p:sldId id="259" r:id="rId11"/>
-    <p:sldId id="260" r:id="rId12"/>
-    <p:sldId id="261" r:id="rId13"/>
-    <p:sldId id="262" r:id="rId14"/>
-    <p:sldId id="263" r:id="rId15"/>
-    <p:sldId id="264" r:id="rId16"/>
-    <p:sldId id="265" r:id="rId17"/>
-    <p:sldId id="266" r:id="rId18"/>
-    <p:sldId id="267" r:id="rId19"/>
-    <p:sldId id="268" r:id="rId20"/>
-    <p:sldId id="269" r:id="rId21"/>
+    <p:sldId id="256" r:id="rId2"/>
+    <p:sldId id="257" r:id="rId8"/>
+    <p:sldId id="258" r:id="rId9"/>
+    <p:sldId id="259" r:id="rId10"/>
+    <p:sldId id="260" r:id="rId11"/>
+    <p:sldId id="261" r:id="rId12"/>
+    <p:sldId id="262" r:id="rId13"/>
+    <p:sldId id="263" r:id="rId14"/>
+    <p:sldId id="264" r:id="rId15"/>
+    <p:sldId id="265" r:id="rId16"/>
+    <p:sldId id="266" r:id="rId17"/>
+    <p:sldId id="267" r:id="rId18"/>
+    <p:sldId id="268" r:id="rId19"/>
+    <p:sldId id="269" r:id="rId20"/>
   </p:sldIdLst>
-  <p:sldSz cx="12191695" cy="6858000" type="screen4x3"/>
+  <p:sldSz cx="12192000" cy="6858000"/>
   <p:notesSz cx="6858000" cy="9144000"/>
   <p:defaultTextStyle>
     <a:defPPr>
-      <a:defRPr lang="en-US"/>
+      <a:defRPr lang="ru-RU"/>
     </a:defPPr>
-    <a:lvl1pPr marL="0" algn="l" defTabSz="457200" rtl="0" eaLnBrk="1" latinLnBrk="0" hangingPunct="1">
+    <a:lvl1pPr marL="0" algn="l" defTabSz="914400" rtl="0" eaLnBrk="1" latinLnBrk="0" hangingPunct="1">
       <a:defRPr sz="1800" kern="1200">
         <a:solidFill>
           <a:schemeClr val="tx1"/>
@@ -36,7 +36,7 @@
         <a:cs typeface="+mn-cs"/>
       </a:defRPr>
     </a:lvl1pPr>
-    <a:lvl2pPr marL="457200" algn="l" defTabSz="457200" rtl="0" eaLnBrk="1" latinLnBrk="0" hangingPunct="1">
+    <a:lvl2pPr marL="457200" algn="l" defTabSz="914400" rtl="0" eaLnBrk="1" latinLnBrk="0" hangingPunct="1">
       <a:defRPr sz="1800" kern="1200">
         <a:solidFill>
           <a:schemeClr val="tx1"/>
@@ -46,7 +46,7 @@
         <a:cs typeface="+mn-cs"/>
       </a:defRPr>
     </a:lvl2pPr>
-    <a:lvl3pPr marL="914400" algn="l" defTabSz="457200" rtl="0" eaLnBrk="1" latinLnBrk="0" hangingPunct="1">
+    <a:lvl3pPr marL="914400" algn="l" defTabSz="914400" rtl="0" eaLnBrk="1" latinLnBrk="0" hangingPunct="1">
       <a:defRPr sz="1800" kern="1200">
         <a:solidFill>
           <a:schemeClr val="tx1"/>
@@ -56,7 +56,7 @@
         <a:cs typeface="+mn-cs"/>
       </a:defRPr>
     </a:lvl3pPr>
-    <a:lvl4pPr marL="1371600" algn="l" defTabSz="457200" rtl="0" eaLnBrk="1" latinLnBrk="0" hangingPunct="1">
+    <a:lvl4pPr marL="1371600" algn="l" defTabSz="914400" rtl="0" eaLnBrk="1" latinLnBrk="0" hangingPunct="1">
       <a:defRPr sz="1800" kern="1200">
         <a:solidFill>
           <a:schemeClr val="tx1"/>
@@ -66,7 +66,7 @@
         <a:cs typeface="+mn-cs"/>
       </a:defRPr>
     </a:lvl4pPr>
-    <a:lvl5pPr marL="1828800" algn="l" defTabSz="457200" rtl="0" eaLnBrk="1" latinLnBrk="0" hangingPunct="1">
+    <a:lvl5pPr marL="1828800" algn="l" defTabSz="914400" rtl="0" eaLnBrk="1" latinLnBrk="0" hangingPunct="1">
       <a:defRPr sz="1800" kern="1200">
         <a:solidFill>
           <a:schemeClr val="tx1"/>
@@ -76,7 +76,7 @@
         <a:cs typeface="+mn-cs"/>
       </a:defRPr>
     </a:lvl5pPr>
-    <a:lvl6pPr marL="2286000" algn="l" defTabSz="457200" rtl="0" eaLnBrk="1" latinLnBrk="0" hangingPunct="1">
+    <a:lvl6pPr marL="2286000" algn="l" defTabSz="914400" rtl="0" eaLnBrk="1" latinLnBrk="0" hangingPunct="1">
       <a:defRPr sz="1800" kern="1200">
         <a:solidFill>
           <a:schemeClr val="tx1"/>
@@ -86,7 +86,7 @@
         <a:cs typeface="+mn-cs"/>
       </a:defRPr>
     </a:lvl6pPr>
-    <a:lvl7pPr marL="2743200" algn="l" defTabSz="457200" rtl="0" eaLnBrk="1" latinLnBrk="0" hangingPunct="1">
+    <a:lvl7pPr marL="2743200" algn="l" defTabSz="914400" rtl="0" eaLnBrk="1" latinLnBrk="0" hangingPunct="1">
       <a:defRPr sz="1800" kern="1200">
         <a:solidFill>
           <a:schemeClr val="tx1"/>
@@ -96,7 +96,7 @@
         <a:cs typeface="+mn-cs"/>
       </a:defRPr>
     </a:lvl7pPr>
-    <a:lvl8pPr marL="3200400" algn="l" defTabSz="457200" rtl="0" eaLnBrk="1" latinLnBrk="0" hangingPunct="1">
+    <a:lvl8pPr marL="3200400" algn="l" defTabSz="914400" rtl="0" eaLnBrk="1" latinLnBrk="0" hangingPunct="1">
       <a:defRPr sz="1800" kern="1200">
         <a:solidFill>
           <a:schemeClr val="tx1"/>
@@ -106,7 +106,7 @@
         <a:cs typeface="+mn-cs"/>
       </a:defRPr>
     </a:lvl8pPr>
-    <a:lvl9pPr marL="3657600" algn="l" defTabSz="457200" rtl="0" eaLnBrk="1" latinLnBrk="0" hangingPunct="1">
+    <a:lvl9pPr marL="3657600" algn="l" defTabSz="914400" rtl="0" eaLnBrk="1" latinLnBrk="0" hangingPunct="1">
       <a:defRPr sz="1800" kern="1200">
         <a:solidFill>
           <a:schemeClr val="tx1"/>
@@ -865,7 +865,7 @@
           <a:lstStyle/>
           <a:p>
             <a:r>
-              <a:t>СЛАЙД 14. Два QR-кода крупно. Справа — QR на t.me/puzzlerealty (взято из контактов вашей прошлой презентации; проверьте, что это нужный канал). Слева — заглушка: вставить QR на материалы к выступлению.</a:t>
+              <a:t>СЛАЙД 14. Два QR-кода крупно. Справа — QR на t.me/puzzlerealty (взято из контактов вашей прошлой презентации; проверьте, что это нужный канал). Слева — заглушка: вставить QR на материалы.</a:t>
             </a:r>
           </a:p>
         </p:txBody>
@@ -1452,7 +1452,7 @@
 
 <file path=ppt/slideLayouts/slideLayout1.xml><?xml version="1.0" encoding="utf-8"?>
 <p:sldLayout xmlns:a="http://schemas.openxmlformats.org/drawingml/2006/main" xmlns:r="http://schemas.openxmlformats.org/officeDocument/2006/relationships" xmlns:p="http://schemas.openxmlformats.org/presentationml/2006/main" type="title" preserve="1">
-  <p:cSld name="Title Slide">
+  <p:cSld name="Титульный слайд">
     <p:spTree>
       <p:nvGrpSpPr>
         <p:cNvPr id="1" name=""/>
@@ -1469,7 +1469,13 @@
       </p:grpSpPr>
       <p:sp>
         <p:nvSpPr>
-          <p:cNvPr id="2" name="Title 1"/>
+          <p:cNvPr id="2" name="Заголовок 1">
+            <a:extLst>
+              <a:ext uri="{FF2B5EF4-FFF2-40B4-BE49-F238E27FC236}">
+                <a16:creationId xmlns:a16="http://schemas.microsoft.com/office/drawing/2014/main" id="{7D3212B4-828C-29FD-C87D-6855C29912A4}"/>
+              </a:ext>
+            </a:extLst>
+          </p:cNvPr>
           <p:cNvSpPr>
             <a:spLocks noGrp="1"/>
           </p:cNvSpPr>
@@ -1479,25 +1485,34 @@
         </p:nvSpPr>
         <p:spPr>
           <a:xfrm>
-            <a:off x="685800" y="2130425"/>
-            <a:ext cx="7772400" cy="1470025"/>
-          </a:xfrm>
-        </p:spPr>
-        <p:txBody>
-          <a:bodyPr/>
-          <a:lstStyle/>
-          <a:p>
-            <a:r>
-              <a:rPr lang="en-US" smtClean="0"/>
-              <a:t>Click to edit Master title style</a:t>
-            </a:r>
-            <a:endParaRPr lang="en-US"/>
-          </a:p>
-        </p:txBody>
-      </p:sp>
-      <p:sp>
-        <p:nvSpPr>
-          <p:cNvPr id="3" name="Subtitle 2"/>
+            <a:off x="1524000" y="1122363"/>
+            <a:ext cx="9144000" cy="2387600"/>
+          </a:xfrm>
+        </p:spPr>
+        <p:txBody>
+          <a:bodyPr anchor="b"/>
+          <a:lstStyle>
+            <a:lvl1pPr algn="ctr">
+              <a:defRPr sz="6000"/>
+            </a:lvl1pPr>
+          </a:lstStyle>
+          <a:p>
+            <a:r>
+              <a:rPr lang="ru-RU"/>
+              <a:t>Образец заголовка</a:t>
+            </a:r>
+          </a:p>
+        </p:txBody>
+      </p:sp>
+      <p:sp>
+        <p:nvSpPr>
+          <p:cNvPr id="3" name="Подзаголовок 2">
+            <a:extLst>
+              <a:ext uri="{FF2B5EF4-FFF2-40B4-BE49-F238E27FC236}">
+                <a16:creationId xmlns:a16="http://schemas.microsoft.com/office/drawing/2014/main" id="{562637E1-9054-8084-F269-416E9AC6AE08}"/>
+              </a:ext>
+            </a:extLst>
+          </p:cNvPr>
           <p:cNvSpPr>
             <a:spLocks noGrp="1"/>
           </p:cNvSpPr>
@@ -1507,8 +1522,8 @@
         </p:nvSpPr>
         <p:spPr>
           <a:xfrm>
-            <a:off x="1371600" y="3886200"/>
-            <a:ext cx="6400800" cy="1752600"/>
+            <a:off x="1524000" y="3602038"/>
+            <a:ext cx="9144000" cy="1655762"/>
           </a:xfrm>
         </p:spPr>
         <p:txBody>
@@ -1516,107 +1531,58 @@
           <a:lstStyle>
             <a:lvl1pPr marL="0" indent="0" algn="ctr">
               <a:buNone/>
-              <a:defRPr>
-                <a:solidFill>
-                  <a:schemeClr val="tx1">
-                    <a:tint val="75000"/>
-                  </a:schemeClr>
-                </a:solidFill>
-              </a:defRPr>
+              <a:defRPr sz="2400"/>
             </a:lvl1pPr>
             <a:lvl2pPr marL="457200" indent="0" algn="ctr">
               <a:buNone/>
-              <a:defRPr>
-                <a:solidFill>
-                  <a:schemeClr val="tx1">
-                    <a:tint val="75000"/>
-                  </a:schemeClr>
-                </a:solidFill>
-              </a:defRPr>
+              <a:defRPr sz="2000"/>
             </a:lvl2pPr>
             <a:lvl3pPr marL="914400" indent="0" algn="ctr">
               <a:buNone/>
-              <a:defRPr>
-                <a:solidFill>
-                  <a:schemeClr val="tx1">
-                    <a:tint val="75000"/>
-                  </a:schemeClr>
-                </a:solidFill>
-              </a:defRPr>
+              <a:defRPr sz="1800"/>
             </a:lvl3pPr>
             <a:lvl4pPr marL="1371600" indent="0" algn="ctr">
               <a:buNone/>
-              <a:defRPr>
-                <a:solidFill>
-                  <a:schemeClr val="tx1">
-                    <a:tint val="75000"/>
-                  </a:schemeClr>
-                </a:solidFill>
-              </a:defRPr>
+              <a:defRPr sz="1600"/>
             </a:lvl4pPr>
             <a:lvl5pPr marL="1828800" indent="0" algn="ctr">
               <a:buNone/>
-              <a:defRPr>
-                <a:solidFill>
-                  <a:schemeClr val="tx1">
-                    <a:tint val="75000"/>
-                  </a:schemeClr>
-                </a:solidFill>
-              </a:defRPr>
+              <a:defRPr sz="1600"/>
             </a:lvl5pPr>
             <a:lvl6pPr marL="2286000" indent="0" algn="ctr">
               <a:buNone/>
-              <a:defRPr>
-                <a:solidFill>
-                  <a:schemeClr val="tx1">
-                    <a:tint val="75000"/>
-                  </a:schemeClr>
-                </a:solidFill>
-              </a:defRPr>
+              <a:defRPr sz="1600"/>
             </a:lvl6pPr>
             <a:lvl7pPr marL="2743200" indent="0" algn="ctr">
               <a:buNone/>
-              <a:defRPr>
-                <a:solidFill>
-                  <a:schemeClr val="tx1">
-                    <a:tint val="75000"/>
-                  </a:schemeClr>
-                </a:solidFill>
-              </a:defRPr>
+              <a:defRPr sz="1600"/>
             </a:lvl7pPr>
             <a:lvl8pPr marL="3200400" indent="0" algn="ctr">
               <a:buNone/>
-              <a:defRPr>
-                <a:solidFill>
-                  <a:schemeClr val="tx1">
-                    <a:tint val="75000"/>
-                  </a:schemeClr>
-                </a:solidFill>
-              </a:defRPr>
+              <a:defRPr sz="1600"/>
             </a:lvl8pPr>
             <a:lvl9pPr marL="3657600" indent="0" algn="ctr">
               <a:buNone/>
-              <a:defRPr>
-                <a:solidFill>
-                  <a:schemeClr val="tx1">
-                    <a:tint val="75000"/>
-                  </a:schemeClr>
-                </a:solidFill>
-              </a:defRPr>
+              <a:defRPr sz="1600"/>
             </a:lvl9pPr>
           </a:lstStyle>
           <a:p>
             <a:r>
-              <a:rPr lang="en-US" smtClean="0"/>
-              <a:t>Click to edit Master subtitle style</a:t>
-            </a:r>
-            <a:endParaRPr lang="en-US"/>
-          </a:p>
-        </p:txBody>
-      </p:sp>
-      <p:sp>
-        <p:nvSpPr>
-          <p:cNvPr id="4" name="Date Placeholder 3"/>
+              <a:rPr lang="ru-RU"/>
+              <a:t>Образец подзаголовка</a:t>
+            </a:r>
+          </a:p>
+        </p:txBody>
+      </p:sp>
+      <p:sp>
+        <p:nvSpPr>
+          <p:cNvPr id="4" name="Дата 3">
+            <a:extLst>
+              <a:ext uri="{FF2B5EF4-FFF2-40B4-BE49-F238E27FC236}">
+                <a16:creationId xmlns:a16="http://schemas.microsoft.com/office/drawing/2014/main" id="{9836C1BB-CCF7-E042-5AFD-612F1C55A327}"/>
+              </a:ext>
+            </a:extLst>
+          </p:cNvPr>
           <p:cNvSpPr>
             <a:spLocks noGrp="1"/>
           </p:cNvSpPr>
@@ -1629,17 +1595,23 @@
           <a:bodyPr/>
           <a:lstStyle/>
           <a:p>
-            <a:fld id="{5BCAD085-E8A6-8845-BD4E-CB4CCA059FC4}" type="datetimeFigureOut">
-              <a:rPr lang="en-US" smtClean="0"/>
-              <a:t>1/27/13</a:t>
+            <a:fld id="{207A8441-1D27-874E-A0C6-3CD416A85B54}" type="datetimeFigureOut">
+              <a:rPr lang="ru-RU" smtClean="0"/>
+              <a:t>21.08.2026</a:t>
             </a:fld>
-            <a:endParaRPr lang="en-US"/>
-          </a:p>
-        </p:txBody>
-      </p:sp>
-      <p:sp>
-        <p:nvSpPr>
-          <p:cNvPr id="5" name="Footer Placeholder 4"/>
+            <a:endParaRPr lang="ru-RU"/>
+          </a:p>
+        </p:txBody>
+      </p:sp>
+      <p:sp>
+        <p:nvSpPr>
+          <p:cNvPr id="5" name="Нижний колонтитул 4">
+            <a:extLst>
+              <a:ext uri="{FF2B5EF4-FFF2-40B4-BE49-F238E27FC236}">
+                <a16:creationId xmlns:a16="http://schemas.microsoft.com/office/drawing/2014/main" id="{6D16D074-8BAC-4D89-882D-CE66B1E8E961}"/>
+              </a:ext>
+            </a:extLst>
+          </p:cNvPr>
           <p:cNvSpPr>
             <a:spLocks noGrp="1"/>
           </p:cNvSpPr>
@@ -1652,13 +1624,19 @@
           <a:bodyPr/>
           <a:lstStyle/>
           <a:p>
-            <a:endParaRPr lang="en-US"/>
-          </a:p>
-        </p:txBody>
-      </p:sp>
-      <p:sp>
-        <p:nvSpPr>
-          <p:cNvPr id="6" name="Slide Number Placeholder 5"/>
+            <a:endParaRPr lang="ru-RU"/>
+          </a:p>
+        </p:txBody>
+      </p:sp>
+      <p:sp>
+        <p:nvSpPr>
+          <p:cNvPr id="6" name="Номер слайда 5">
+            <a:extLst>
+              <a:ext uri="{FF2B5EF4-FFF2-40B4-BE49-F238E27FC236}">
+                <a16:creationId xmlns:a16="http://schemas.microsoft.com/office/drawing/2014/main" id="{1DD035FE-AFFA-2FDD-C256-44889036BB72}"/>
+              </a:ext>
+            </a:extLst>
+          </p:cNvPr>
           <p:cNvSpPr>
             <a:spLocks noGrp="1"/>
           </p:cNvSpPr>
@@ -1671,18 +1649,18 @@
           <a:bodyPr/>
           <a:lstStyle/>
           <a:p>
-            <a:fld id="{C1FF6DA9-008F-8B48-92A6-B652298478BF}" type="slidenum">
-              <a:rPr lang="en-US" smtClean="0"/>
+            <a:fld id="{91757437-5F8E-3041-A851-F94714F6C6A0}" type="slidenum">
+              <a:rPr lang="ru-RU" smtClean="0"/>
               <a:t>‹#›</a:t>
             </a:fld>
-            <a:endParaRPr lang="en-US"/>
+            <a:endParaRPr lang="ru-RU"/>
           </a:p>
         </p:txBody>
       </p:sp>
     </p:spTree>
     <p:extLst>
       <p:ext uri="{BB962C8B-B14F-4D97-AF65-F5344CB8AC3E}">
-        <p14:creationId xmlns:p14="http://schemas.microsoft.com/office/powerpoint/2010/main" val="3168075583"/>
+        <p14:creationId xmlns:p14="http://schemas.microsoft.com/office/powerpoint/2010/main" val="597361859"/>
       </p:ext>
     </p:extLst>
   </p:cSld>
@@ -1694,7 +1672,7 @@
 
 <file path=ppt/slideLayouts/slideLayout10.xml><?xml version="1.0" encoding="utf-8"?>
 <p:sldLayout xmlns:a="http://schemas.openxmlformats.org/drawingml/2006/main" xmlns:r="http://schemas.openxmlformats.org/officeDocument/2006/relationships" xmlns:p="http://schemas.openxmlformats.org/presentationml/2006/main" type="vertTx" preserve="1">
-  <p:cSld name="Title and Vertical Text">
+  <p:cSld name="Заголовок и вертикальный текст">
     <p:spTree>
       <p:nvGrpSpPr>
         <p:cNvPr id="1" name=""/>
@@ -1711,7 +1689,13 @@
       </p:grpSpPr>
       <p:sp>
         <p:nvSpPr>
-          <p:cNvPr id="2" name="Title 1"/>
+          <p:cNvPr id="2" name="Заголовок 1">
+            <a:extLst>
+              <a:ext uri="{FF2B5EF4-FFF2-40B4-BE49-F238E27FC236}">
+                <a16:creationId xmlns:a16="http://schemas.microsoft.com/office/drawing/2014/main" id="{3AF8FC4E-9715-0C46-57AF-23F970E24CF8}"/>
+              </a:ext>
+            </a:extLst>
+          </p:cNvPr>
           <p:cNvSpPr>
             <a:spLocks noGrp="1"/>
           </p:cNvSpPr>
@@ -1725,16 +1709,21 @@
           <a:lstStyle/>
           <a:p>
             <a:r>
-              <a:rPr lang="en-US" smtClean="0"/>
-              <a:t>Click to edit Master title style</a:t>
-            </a:r>
-            <a:endParaRPr lang="en-US"/>
-          </a:p>
-        </p:txBody>
-      </p:sp>
-      <p:sp>
-        <p:nvSpPr>
-          <p:cNvPr id="3" name="Vertical Text Placeholder 2"/>
+              <a:rPr lang="ru-RU"/>
+              <a:t>Образец заголовка</a:t>
+            </a:r>
+          </a:p>
+        </p:txBody>
+      </p:sp>
+      <p:sp>
+        <p:nvSpPr>
+          <p:cNvPr id="3" name="Вертикальный текст 2">
+            <a:extLst>
+              <a:ext uri="{FF2B5EF4-FFF2-40B4-BE49-F238E27FC236}">
+                <a16:creationId xmlns:a16="http://schemas.microsoft.com/office/drawing/2014/main" id="{5741EE42-EE15-F6A7-45BE-24A45FE2A9D6}"/>
+              </a:ext>
+            </a:extLst>
+          </p:cNvPr>
           <p:cNvSpPr>
             <a:spLocks noGrp="1"/>
           </p:cNvSpPr>
@@ -1749,44 +1738,49 @@
           <a:p>
             <a:pPr lvl="0"/>
             <a:r>
-              <a:rPr lang="en-US" smtClean="0"/>
-              <a:t>Click to edit Master text styles</a:t>
+              <a:rPr lang="ru-RU"/>
+              <a:t>Образец текста</a:t>
             </a:r>
           </a:p>
           <a:p>
             <a:pPr lvl="1"/>
             <a:r>
-              <a:rPr lang="en-US" smtClean="0"/>
-              <a:t>Second level</a:t>
+              <a:rPr lang="ru-RU"/>
+              <a:t>Второй уровень</a:t>
             </a:r>
           </a:p>
           <a:p>
             <a:pPr lvl="2"/>
             <a:r>
-              <a:rPr lang="en-US" smtClean="0"/>
-              <a:t>Third level</a:t>
+              <a:rPr lang="ru-RU"/>
+              <a:t>Третий уровень</a:t>
             </a:r>
           </a:p>
           <a:p>
             <a:pPr lvl="3"/>
             <a:r>
-              <a:rPr lang="en-US" smtClean="0"/>
-              <a:t>Fourth level</a:t>
+              <a:rPr lang="ru-RU"/>
+              <a:t>Четвертый уровень</a:t>
             </a:r>
           </a:p>
           <a:p>
             <a:pPr lvl="4"/>
             <a:r>
-              <a:rPr lang="en-US" smtClean="0"/>
-              <a:t>Fifth level</a:t>
-            </a:r>
-            <a:endParaRPr lang="en-US"/>
-          </a:p>
-        </p:txBody>
-      </p:sp>
-      <p:sp>
-        <p:nvSpPr>
-          <p:cNvPr id="4" name="Date Placeholder 3"/>
+              <a:rPr lang="ru-RU"/>
+              <a:t>Пятый уровень</a:t>
+            </a:r>
+          </a:p>
+        </p:txBody>
+      </p:sp>
+      <p:sp>
+        <p:nvSpPr>
+          <p:cNvPr id="4" name="Дата 3">
+            <a:extLst>
+              <a:ext uri="{FF2B5EF4-FFF2-40B4-BE49-F238E27FC236}">
+                <a16:creationId xmlns:a16="http://schemas.microsoft.com/office/drawing/2014/main" id="{61BCFF4F-65DB-17F0-12DD-6D3D13EB4F35}"/>
+              </a:ext>
+            </a:extLst>
+          </p:cNvPr>
           <p:cNvSpPr>
             <a:spLocks noGrp="1"/>
           </p:cNvSpPr>
@@ -1799,17 +1793,23 @@
           <a:bodyPr/>
           <a:lstStyle/>
           <a:p>
-            <a:fld id="{5BCAD085-E8A6-8845-BD4E-CB4CCA059FC4}" type="datetimeFigureOut">
-              <a:rPr lang="en-US" smtClean="0"/>
-              <a:t>1/27/13</a:t>
+            <a:fld id="{207A8441-1D27-874E-A0C6-3CD416A85B54}" type="datetimeFigureOut">
+              <a:rPr lang="ru-RU" smtClean="0"/>
+              <a:t>21.08.2026</a:t>
             </a:fld>
-            <a:endParaRPr lang="en-US"/>
-          </a:p>
-        </p:txBody>
-      </p:sp>
-      <p:sp>
-        <p:nvSpPr>
-          <p:cNvPr id="5" name="Footer Placeholder 4"/>
+            <a:endParaRPr lang="ru-RU"/>
+          </a:p>
+        </p:txBody>
+      </p:sp>
+      <p:sp>
+        <p:nvSpPr>
+          <p:cNvPr id="5" name="Нижний колонтитул 4">
+            <a:extLst>
+              <a:ext uri="{FF2B5EF4-FFF2-40B4-BE49-F238E27FC236}">
+                <a16:creationId xmlns:a16="http://schemas.microsoft.com/office/drawing/2014/main" id="{778FEDAB-16A7-FCD3-409D-B4D336A37090}"/>
+              </a:ext>
+            </a:extLst>
+          </p:cNvPr>
           <p:cNvSpPr>
             <a:spLocks noGrp="1"/>
           </p:cNvSpPr>
@@ -1822,13 +1822,19 @@
           <a:bodyPr/>
           <a:lstStyle/>
           <a:p>
-            <a:endParaRPr lang="en-US"/>
-          </a:p>
-        </p:txBody>
-      </p:sp>
-      <p:sp>
-        <p:nvSpPr>
-          <p:cNvPr id="6" name="Slide Number Placeholder 5"/>
+            <a:endParaRPr lang="ru-RU"/>
+          </a:p>
+        </p:txBody>
+      </p:sp>
+      <p:sp>
+        <p:nvSpPr>
+          <p:cNvPr id="6" name="Номер слайда 5">
+            <a:extLst>
+              <a:ext uri="{FF2B5EF4-FFF2-40B4-BE49-F238E27FC236}">
+                <a16:creationId xmlns:a16="http://schemas.microsoft.com/office/drawing/2014/main" id="{C4650844-04FA-D290-5387-8B24A79BAC56}"/>
+              </a:ext>
+            </a:extLst>
+          </p:cNvPr>
           <p:cNvSpPr>
             <a:spLocks noGrp="1"/>
           </p:cNvSpPr>
@@ -1841,18 +1847,18 @@
           <a:bodyPr/>
           <a:lstStyle/>
           <a:p>
-            <a:fld id="{C1FF6DA9-008F-8B48-92A6-B652298478BF}" type="slidenum">
-              <a:rPr lang="en-US" smtClean="0"/>
+            <a:fld id="{91757437-5F8E-3041-A851-F94714F6C6A0}" type="slidenum">
+              <a:rPr lang="ru-RU" smtClean="0"/>
               <a:t>‹#›</a:t>
             </a:fld>
-            <a:endParaRPr lang="en-US"/>
+            <a:endParaRPr lang="ru-RU"/>
           </a:p>
         </p:txBody>
       </p:sp>
     </p:spTree>
     <p:extLst>
       <p:ext uri="{BB962C8B-B14F-4D97-AF65-F5344CB8AC3E}">
-        <p14:creationId xmlns:p14="http://schemas.microsoft.com/office/powerpoint/2010/main" val="2910927964"/>
+        <p14:creationId xmlns:p14="http://schemas.microsoft.com/office/powerpoint/2010/main" val="2733405218"/>
       </p:ext>
     </p:extLst>
   </p:cSld>
@@ -1864,7 +1870,7 @@
 
 <file path=ppt/slideLayouts/slideLayout11.xml><?xml version="1.0" encoding="utf-8"?>
 <p:sldLayout xmlns:a="http://schemas.openxmlformats.org/drawingml/2006/main" xmlns:r="http://schemas.openxmlformats.org/officeDocument/2006/relationships" xmlns:p="http://schemas.openxmlformats.org/presentationml/2006/main" type="vertTitleAndTx" preserve="1">
-  <p:cSld name="Vertical Title and Text">
+  <p:cSld name="Вертикальный заголовок и текст">
     <p:spTree>
       <p:nvGrpSpPr>
         <p:cNvPr id="1" name=""/>
@@ -1881,7 +1887,13 @@
       </p:grpSpPr>
       <p:sp>
         <p:nvSpPr>
-          <p:cNvPr id="2" name="Vertical Title 1"/>
+          <p:cNvPr id="2" name="Вертикальный заголовок 1">
+            <a:extLst>
+              <a:ext uri="{FF2B5EF4-FFF2-40B4-BE49-F238E27FC236}">
+                <a16:creationId xmlns:a16="http://schemas.microsoft.com/office/drawing/2014/main" id="{4474B310-5219-9358-4A8D-0D090D610CC0}"/>
+              </a:ext>
+            </a:extLst>
+          </p:cNvPr>
           <p:cNvSpPr>
             <a:spLocks noGrp="1"/>
           </p:cNvSpPr>
@@ -1891,8 +1903,8 @@
         </p:nvSpPr>
         <p:spPr>
           <a:xfrm>
-            <a:off x="6629400" y="274638"/>
-            <a:ext cx="2057400" cy="5851525"/>
+            <a:off x="8724900" y="1139685"/>
+            <a:ext cx="2628900" cy="5037277"/>
           </a:xfrm>
         </p:spPr>
         <p:txBody>
@@ -1900,16 +1912,21 @@
           <a:lstStyle/>
           <a:p>
             <a:r>
-              <a:rPr lang="en-US" smtClean="0"/>
-              <a:t>Click to edit Master title style</a:t>
-            </a:r>
-            <a:endParaRPr lang="en-US"/>
-          </a:p>
-        </p:txBody>
-      </p:sp>
-      <p:sp>
-        <p:nvSpPr>
-          <p:cNvPr id="3" name="Vertical Text Placeholder 2"/>
+              <a:rPr lang="ru-RU" dirty="0"/>
+              <a:t>Образец заголовка</a:t>
+            </a:r>
+          </a:p>
+        </p:txBody>
+      </p:sp>
+      <p:sp>
+        <p:nvSpPr>
+          <p:cNvPr id="3" name="Вертикальный текст 2">
+            <a:extLst>
+              <a:ext uri="{FF2B5EF4-FFF2-40B4-BE49-F238E27FC236}">
+                <a16:creationId xmlns:a16="http://schemas.microsoft.com/office/drawing/2014/main" id="{C1C3054F-F9F0-E039-4555-27E6DF8BECD9}"/>
+              </a:ext>
+            </a:extLst>
+          </p:cNvPr>
           <p:cNvSpPr>
             <a:spLocks noGrp="1"/>
           </p:cNvSpPr>
@@ -1919,8 +1936,8 @@
         </p:nvSpPr>
         <p:spPr>
           <a:xfrm>
-            <a:off x="457200" y="274638"/>
-            <a:ext cx="6019800" cy="5851525"/>
+            <a:off x="838200" y="1139687"/>
+            <a:ext cx="7734300" cy="5037276"/>
           </a:xfrm>
         </p:spPr>
         <p:txBody>
@@ -1929,44 +1946,49 @@
           <a:p>
             <a:pPr lvl="0"/>
             <a:r>
-              <a:rPr lang="en-US" smtClean="0"/>
-              <a:t>Click to edit Master text styles</a:t>
+              <a:rPr lang="ru-RU"/>
+              <a:t>Образец текста</a:t>
             </a:r>
           </a:p>
           <a:p>
             <a:pPr lvl="1"/>
             <a:r>
-              <a:rPr lang="en-US" smtClean="0"/>
-              <a:t>Second level</a:t>
+              <a:rPr lang="ru-RU"/>
+              <a:t>Второй уровень</a:t>
             </a:r>
           </a:p>
           <a:p>
             <a:pPr lvl="2"/>
             <a:r>
-              <a:rPr lang="en-US" smtClean="0"/>
-              <a:t>Third level</a:t>
+              <a:rPr lang="ru-RU"/>
+              <a:t>Третий уровень</a:t>
             </a:r>
           </a:p>
           <a:p>
             <a:pPr lvl="3"/>
             <a:r>
-              <a:rPr lang="en-US" smtClean="0"/>
-              <a:t>Fourth level</a:t>
+              <a:rPr lang="ru-RU"/>
+              <a:t>Четвертый уровень</a:t>
             </a:r>
           </a:p>
           <a:p>
             <a:pPr lvl="4"/>
             <a:r>
-              <a:rPr lang="en-US" smtClean="0"/>
-              <a:t>Fifth level</a:t>
-            </a:r>
-            <a:endParaRPr lang="en-US"/>
-          </a:p>
-        </p:txBody>
-      </p:sp>
-      <p:sp>
-        <p:nvSpPr>
-          <p:cNvPr id="4" name="Date Placeholder 3"/>
+              <a:rPr lang="ru-RU"/>
+              <a:t>Пятый уровень</a:t>
+            </a:r>
+          </a:p>
+        </p:txBody>
+      </p:sp>
+      <p:sp>
+        <p:nvSpPr>
+          <p:cNvPr id="4" name="Дата 3">
+            <a:extLst>
+              <a:ext uri="{FF2B5EF4-FFF2-40B4-BE49-F238E27FC236}">
+                <a16:creationId xmlns:a16="http://schemas.microsoft.com/office/drawing/2014/main" id="{60BA0323-57BA-885D-3D2E-D71CFC9CAB56}"/>
+              </a:ext>
+            </a:extLst>
+          </p:cNvPr>
           <p:cNvSpPr>
             <a:spLocks noGrp="1"/>
           </p:cNvSpPr>
@@ -1979,17 +2001,23 @@
           <a:bodyPr/>
           <a:lstStyle/>
           <a:p>
-            <a:fld id="{5BCAD085-E8A6-8845-BD4E-CB4CCA059FC4}" type="datetimeFigureOut">
-              <a:rPr lang="en-US" smtClean="0"/>
-              <a:t>1/27/13</a:t>
+            <a:fld id="{207A8441-1D27-874E-A0C6-3CD416A85B54}" type="datetimeFigureOut">
+              <a:rPr lang="ru-RU" smtClean="0"/>
+              <a:t>21.08.2026</a:t>
             </a:fld>
-            <a:endParaRPr lang="en-US"/>
-          </a:p>
-        </p:txBody>
-      </p:sp>
-      <p:sp>
-        <p:nvSpPr>
-          <p:cNvPr id="5" name="Footer Placeholder 4"/>
+            <a:endParaRPr lang="ru-RU"/>
+          </a:p>
+        </p:txBody>
+      </p:sp>
+      <p:sp>
+        <p:nvSpPr>
+          <p:cNvPr id="5" name="Нижний колонтитул 4">
+            <a:extLst>
+              <a:ext uri="{FF2B5EF4-FFF2-40B4-BE49-F238E27FC236}">
+                <a16:creationId xmlns:a16="http://schemas.microsoft.com/office/drawing/2014/main" id="{132B4792-FA15-CF09-5DE1-C809410AAE80}"/>
+              </a:ext>
+            </a:extLst>
+          </p:cNvPr>
           <p:cNvSpPr>
             <a:spLocks noGrp="1"/>
           </p:cNvSpPr>
@@ -2002,13 +2030,19 @@
           <a:bodyPr/>
           <a:lstStyle/>
           <a:p>
-            <a:endParaRPr lang="en-US"/>
-          </a:p>
-        </p:txBody>
-      </p:sp>
-      <p:sp>
-        <p:nvSpPr>
-          <p:cNvPr id="6" name="Slide Number Placeholder 5"/>
+            <a:endParaRPr lang="ru-RU"/>
+          </a:p>
+        </p:txBody>
+      </p:sp>
+      <p:sp>
+        <p:nvSpPr>
+          <p:cNvPr id="6" name="Номер слайда 5">
+            <a:extLst>
+              <a:ext uri="{FF2B5EF4-FFF2-40B4-BE49-F238E27FC236}">
+                <a16:creationId xmlns:a16="http://schemas.microsoft.com/office/drawing/2014/main" id="{699262D8-E239-DA56-BFFA-291EB999C5D4}"/>
+              </a:ext>
+            </a:extLst>
+          </p:cNvPr>
           <p:cNvSpPr>
             <a:spLocks noGrp="1"/>
           </p:cNvSpPr>
@@ -2021,18 +2055,18 @@
           <a:bodyPr/>
           <a:lstStyle/>
           <a:p>
-            <a:fld id="{C1FF6DA9-008F-8B48-92A6-B652298478BF}" type="slidenum">
-              <a:rPr lang="en-US" smtClean="0"/>
+            <a:fld id="{91757437-5F8E-3041-A851-F94714F6C6A0}" type="slidenum">
+              <a:rPr lang="ru-RU" smtClean="0"/>
               <a:t>‹#›</a:t>
             </a:fld>
-            <a:endParaRPr lang="en-US"/>
+            <a:endParaRPr lang="ru-RU"/>
           </a:p>
         </p:txBody>
       </p:sp>
     </p:spTree>
     <p:extLst>
       <p:ext uri="{BB962C8B-B14F-4D97-AF65-F5344CB8AC3E}">
-        <p14:creationId xmlns:p14="http://schemas.microsoft.com/office/powerpoint/2010/main" val="3612223792"/>
+        <p14:creationId xmlns:p14="http://schemas.microsoft.com/office/powerpoint/2010/main" val="667552279"/>
       </p:ext>
     </p:extLst>
   </p:cSld>
@@ -2044,7 +2078,7 @@
 
 <file path=ppt/slideLayouts/slideLayout2.xml><?xml version="1.0" encoding="utf-8"?>
 <p:sldLayout xmlns:a="http://schemas.openxmlformats.org/drawingml/2006/main" xmlns:r="http://schemas.openxmlformats.org/officeDocument/2006/relationships" xmlns:p="http://schemas.openxmlformats.org/presentationml/2006/main" type="obj" preserve="1">
-  <p:cSld name="Title and Content">
+  <p:cSld name="Заголовок и объект">
     <p:spTree>
       <p:nvGrpSpPr>
         <p:cNvPr id="1" name=""/>
@@ -2061,7 +2095,13 @@
       </p:grpSpPr>
       <p:sp>
         <p:nvSpPr>
-          <p:cNvPr id="2" name="Title 1"/>
+          <p:cNvPr id="2" name="Заголовок 1">
+            <a:extLst>
+              <a:ext uri="{FF2B5EF4-FFF2-40B4-BE49-F238E27FC236}">
+                <a16:creationId xmlns:a16="http://schemas.microsoft.com/office/drawing/2014/main" id="{7629A522-A824-AB1C-D306-050C0CC8FC0E}"/>
+              </a:ext>
+            </a:extLst>
+          </p:cNvPr>
           <p:cNvSpPr>
             <a:spLocks noGrp="1"/>
           </p:cNvSpPr>
@@ -2075,16 +2115,21 @@
           <a:lstStyle/>
           <a:p>
             <a:r>
-              <a:rPr lang="en-US" smtClean="0"/>
-              <a:t>Click to edit Master title style</a:t>
-            </a:r>
-            <a:endParaRPr lang="en-US"/>
-          </a:p>
-        </p:txBody>
-      </p:sp>
-      <p:sp>
-        <p:nvSpPr>
-          <p:cNvPr id="3" name="Content Placeholder 2"/>
+              <a:rPr lang="ru-RU"/>
+              <a:t>Образец заголовка</a:t>
+            </a:r>
+          </a:p>
+        </p:txBody>
+      </p:sp>
+      <p:sp>
+        <p:nvSpPr>
+          <p:cNvPr id="3" name="Объект 2">
+            <a:extLst>
+              <a:ext uri="{FF2B5EF4-FFF2-40B4-BE49-F238E27FC236}">
+                <a16:creationId xmlns:a16="http://schemas.microsoft.com/office/drawing/2014/main" id="{C86EC4DA-A8BE-D44C-B5CB-695FE7CF068C}"/>
+              </a:ext>
+            </a:extLst>
+          </p:cNvPr>
           <p:cNvSpPr>
             <a:spLocks noGrp="1"/>
           </p:cNvSpPr>
@@ -2099,44 +2144,49 @@
           <a:p>
             <a:pPr lvl="0"/>
             <a:r>
-              <a:rPr lang="en-US" smtClean="0"/>
-              <a:t>Click to edit Master text styles</a:t>
+              <a:rPr lang="ru-RU"/>
+              <a:t>Образец текста</a:t>
             </a:r>
           </a:p>
           <a:p>
             <a:pPr lvl="1"/>
             <a:r>
-              <a:rPr lang="en-US" smtClean="0"/>
-              <a:t>Second level</a:t>
+              <a:rPr lang="ru-RU"/>
+              <a:t>Второй уровень</a:t>
             </a:r>
           </a:p>
           <a:p>
             <a:pPr lvl="2"/>
             <a:r>
-              <a:rPr lang="en-US" smtClean="0"/>
-              <a:t>Third level</a:t>
+              <a:rPr lang="ru-RU"/>
+              <a:t>Третий уровень</a:t>
             </a:r>
           </a:p>
           <a:p>
             <a:pPr lvl="3"/>
             <a:r>
-              <a:rPr lang="en-US" smtClean="0"/>
-              <a:t>Fourth level</a:t>
+              <a:rPr lang="ru-RU"/>
+              <a:t>Четвертый уровень</a:t>
             </a:r>
           </a:p>
           <a:p>
             <a:pPr lvl="4"/>
             <a:r>
-              <a:rPr lang="en-US" smtClean="0"/>
-              <a:t>Fifth level</a:t>
-            </a:r>
-            <a:endParaRPr lang="en-US"/>
-          </a:p>
-        </p:txBody>
-      </p:sp>
-      <p:sp>
-        <p:nvSpPr>
-          <p:cNvPr id="4" name="Date Placeholder 3"/>
+              <a:rPr lang="ru-RU"/>
+              <a:t>Пятый уровень</a:t>
+            </a:r>
+          </a:p>
+        </p:txBody>
+      </p:sp>
+      <p:sp>
+        <p:nvSpPr>
+          <p:cNvPr id="4" name="Дата 3">
+            <a:extLst>
+              <a:ext uri="{FF2B5EF4-FFF2-40B4-BE49-F238E27FC236}">
+                <a16:creationId xmlns:a16="http://schemas.microsoft.com/office/drawing/2014/main" id="{B6CC0B9F-C661-C123-1896-DB3264531087}"/>
+              </a:ext>
+            </a:extLst>
+          </p:cNvPr>
           <p:cNvSpPr>
             <a:spLocks noGrp="1"/>
           </p:cNvSpPr>
@@ -2149,17 +2199,23 @@
           <a:bodyPr/>
           <a:lstStyle/>
           <a:p>
-            <a:fld id="{5BCAD085-E8A6-8845-BD4E-CB4CCA059FC4}" type="datetimeFigureOut">
-              <a:rPr lang="en-US" smtClean="0"/>
-              <a:t>1/27/13</a:t>
+            <a:fld id="{207A8441-1D27-874E-A0C6-3CD416A85B54}" type="datetimeFigureOut">
+              <a:rPr lang="ru-RU" smtClean="0"/>
+              <a:t>21.08.2026</a:t>
             </a:fld>
-            <a:endParaRPr lang="en-US"/>
-          </a:p>
-        </p:txBody>
-      </p:sp>
-      <p:sp>
-        <p:nvSpPr>
-          <p:cNvPr id="5" name="Footer Placeholder 4"/>
+            <a:endParaRPr lang="ru-RU"/>
+          </a:p>
+        </p:txBody>
+      </p:sp>
+      <p:sp>
+        <p:nvSpPr>
+          <p:cNvPr id="5" name="Нижний колонтитул 4">
+            <a:extLst>
+              <a:ext uri="{FF2B5EF4-FFF2-40B4-BE49-F238E27FC236}">
+                <a16:creationId xmlns:a16="http://schemas.microsoft.com/office/drawing/2014/main" id="{840328C0-20E4-94C4-D629-3B12EE46C796}"/>
+              </a:ext>
+            </a:extLst>
+          </p:cNvPr>
           <p:cNvSpPr>
             <a:spLocks noGrp="1"/>
           </p:cNvSpPr>
@@ -2172,13 +2228,19 @@
           <a:bodyPr/>
           <a:lstStyle/>
           <a:p>
-            <a:endParaRPr lang="en-US"/>
-          </a:p>
-        </p:txBody>
-      </p:sp>
-      <p:sp>
-        <p:nvSpPr>
-          <p:cNvPr id="6" name="Slide Number Placeholder 5"/>
+            <a:endParaRPr lang="ru-RU"/>
+          </a:p>
+        </p:txBody>
+      </p:sp>
+      <p:sp>
+        <p:nvSpPr>
+          <p:cNvPr id="6" name="Номер слайда 5">
+            <a:extLst>
+              <a:ext uri="{FF2B5EF4-FFF2-40B4-BE49-F238E27FC236}">
+                <a16:creationId xmlns:a16="http://schemas.microsoft.com/office/drawing/2014/main" id="{05F0BCD5-876D-203E-60FC-B6BA749903D6}"/>
+              </a:ext>
+            </a:extLst>
+          </p:cNvPr>
           <p:cNvSpPr>
             <a:spLocks noGrp="1"/>
           </p:cNvSpPr>
@@ -2191,18 +2253,18 @@
           <a:bodyPr/>
           <a:lstStyle/>
           <a:p>
-            <a:fld id="{C1FF6DA9-008F-8B48-92A6-B652298478BF}" type="slidenum">
-              <a:rPr lang="en-US" smtClean="0"/>
+            <a:fld id="{91757437-5F8E-3041-A851-F94714F6C6A0}" type="slidenum">
+              <a:rPr lang="ru-RU" smtClean="0"/>
               <a:t>‹#›</a:t>
             </a:fld>
-            <a:endParaRPr lang="en-US"/>
+            <a:endParaRPr lang="ru-RU"/>
           </a:p>
         </p:txBody>
       </p:sp>
     </p:spTree>
     <p:extLst>
       <p:ext uri="{BB962C8B-B14F-4D97-AF65-F5344CB8AC3E}">
-        <p14:creationId xmlns:p14="http://schemas.microsoft.com/office/powerpoint/2010/main" val="2614314258"/>
+        <p14:creationId xmlns:p14="http://schemas.microsoft.com/office/powerpoint/2010/main" val="2707171122"/>
       </p:ext>
     </p:extLst>
   </p:cSld>
@@ -2214,7 +2276,7 @@
 
 <file path=ppt/slideLayouts/slideLayout3.xml><?xml version="1.0" encoding="utf-8"?>
 <p:sldLayout xmlns:a="http://schemas.openxmlformats.org/drawingml/2006/main" xmlns:r="http://schemas.openxmlformats.org/officeDocument/2006/relationships" xmlns:p="http://schemas.openxmlformats.org/presentationml/2006/main" type="secHead" preserve="1">
-  <p:cSld name="Section Header">
+  <p:cSld name="Заголовок раздела">
     <p:spTree>
       <p:nvGrpSpPr>
         <p:cNvPr id="1" name=""/>
@@ -2231,7 +2293,13 @@
       </p:grpSpPr>
       <p:sp>
         <p:nvSpPr>
-          <p:cNvPr id="2" name="Title 1"/>
+          <p:cNvPr id="2" name="Заголовок 1">
+            <a:extLst>
+              <a:ext uri="{FF2B5EF4-FFF2-40B4-BE49-F238E27FC236}">
+                <a16:creationId xmlns:a16="http://schemas.microsoft.com/office/drawing/2014/main" id="{60BC60B3-7243-4DC3-16D9-F5BDCC6945EA}"/>
+              </a:ext>
+            </a:extLst>
+          </p:cNvPr>
           <p:cNvSpPr>
             <a:spLocks noGrp="1"/>
           </p:cNvSpPr>
@@ -2241,29 +2309,34 @@
         </p:nvSpPr>
         <p:spPr>
           <a:xfrm>
-            <a:off x="722313" y="4406900"/>
-            <a:ext cx="7772400" cy="1362075"/>
-          </a:xfrm>
-        </p:spPr>
-        <p:txBody>
-          <a:bodyPr anchor="t"/>
+            <a:off x="831850" y="1709738"/>
+            <a:ext cx="10515600" cy="2852737"/>
+          </a:xfrm>
+        </p:spPr>
+        <p:txBody>
+          <a:bodyPr anchor="b"/>
           <a:lstStyle>
-            <a:lvl1pPr algn="l">
-              <a:defRPr sz="4000" b="1" cap="all"/>
+            <a:lvl1pPr>
+              <a:defRPr sz="6000"/>
             </a:lvl1pPr>
           </a:lstStyle>
           <a:p>
             <a:r>
-              <a:rPr lang="en-US" smtClean="0"/>
-              <a:t>Click to edit Master title style</a:t>
-            </a:r>
-            <a:endParaRPr lang="en-US"/>
-          </a:p>
-        </p:txBody>
-      </p:sp>
-      <p:sp>
-        <p:nvSpPr>
-          <p:cNvPr id="3" name="Text Placeholder 2"/>
+              <a:rPr lang="ru-RU"/>
+              <a:t>Образец заголовка</a:t>
+            </a:r>
+          </a:p>
+        </p:txBody>
+      </p:sp>
+      <p:sp>
+        <p:nvSpPr>
+          <p:cNvPr id="3" name="Текст 2">
+            <a:extLst>
+              <a:ext uri="{FF2B5EF4-FFF2-40B4-BE49-F238E27FC236}">
+                <a16:creationId xmlns:a16="http://schemas.microsoft.com/office/drawing/2014/main" id="{FF47A63C-046E-E1EF-AA1C-8E17A281AD53}"/>
+              </a:ext>
+            </a:extLst>
+          </p:cNvPr>
           <p:cNvSpPr>
             <a:spLocks noGrp="1"/>
           </p:cNvSpPr>
@@ -2273,16 +2346,16 @@
         </p:nvSpPr>
         <p:spPr>
           <a:xfrm>
-            <a:off x="722313" y="2906713"/>
-            <a:ext cx="7772400" cy="1500187"/>
-          </a:xfrm>
-        </p:spPr>
-        <p:txBody>
-          <a:bodyPr anchor="b"/>
+            <a:off x="831850" y="4589463"/>
+            <a:ext cx="10515600" cy="1500187"/>
+          </a:xfrm>
+        </p:spPr>
+        <p:txBody>
+          <a:bodyPr/>
           <a:lstStyle>
             <a:lvl1pPr marL="0" indent="0">
               <a:buNone/>
-              <a:defRPr sz="2000">
+              <a:defRPr sz="2400">
                 <a:solidFill>
                   <a:schemeClr val="tx1">
                     <a:tint val="75000"/>
@@ -2292,7 +2365,7 @@
             </a:lvl1pPr>
             <a:lvl2pPr marL="457200" indent="0">
               <a:buNone/>
-              <a:defRPr sz="1800">
+              <a:defRPr sz="2000">
                 <a:solidFill>
                   <a:schemeClr val="tx1">
                     <a:tint val="75000"/>
@@ -2302,7 +2375,7 @@
             </a:lvl2pPr>
             <a:lvl3pPr marL="914400" indent="0">
               <a:buNone/>
-              <a:defRPr sz="1600">
+              <a:defRPr sz="1800">
                 <a:solidFill>
                   <a:schemeClr val="tx1">
                     <a:tint val="75000"/>
@@ -2312,7 +2385,7 @@
             </a:lvl3pPr>
             <a:lvl4pPr marL="1371600" indent="0">
               <a:buNone/>
-              <a:defRPr sz="1400">
+              <a:defRPr sz="1600">
                 <a:solidFill>
                   <a:schemeClr val="tx1">
                     <a:tint val="75000"/>
@@ -2322,7 +2395,7 @@
             </a:lvl4pPr>
             <a:lvl5pPr marL="1828800" indent="0">
               <a:buNone/>
-              <a:defRPr sz="1400">
+              <a:defRPr sz="1600">
                 <a:solidFill>
                   <a:schemeClr val="tx1">
                     <a:tint val="75000"/>
@@ -2332,7 +2405,7 @@
             </a:lvl5pPr>
             <a:lvl6pPr marL="2286000" indent="0">
               <a:buNone/>
-              <a:defRPr sz="1400">
+              <a:defRPr sz="1600">
                 <a:solidFill>
                   <a:schemeClr val="tx1">
                     <a:tint val="75000"/>
@@ -2342,7 +2415,7 @@
             </a:lvl6pPr>
             <a:lvl7pPr marL="2743200" indent="0">
               <a:buNone/>
-              <a:defRPr sz="1400">
+              <a:defRPr sz="1600">
                 <a:solidFill>
                   <a:schemeClr val="tx1">
                     <a:tint val="75000"/>
@@ -2352,7 +2425,7 @@
             </a:lvl7pPr>
             <a:lvl8pPr marL="3200400" indent="0">
               <a:buNone/>
-              <a:defRPr sz="1400">
+              <a:defRPr sz="1600">
                 <a:solidFill>
                   <a:schemeClr val="tx1">
                     <a:tint val="75000"/>
@@ -2362,7 +2435,7 @@
             </a:lvl8pPr>
             <a:lvl9pPr marL="3657600" indent="0">
               <a:buNone/>
-              <a:defRPr sz="1400">
+              <a:defRPr sz="1600">
                 <a:solidFill>
                   <a:schemeClr val="tx1">
                     <a:tint val="75000"/>
@@ -2374,15 +2447,21 @@
           <a:p>
             <a:pPr lvl="0"/>
             <a:r>
-              <a:rPr lang="en-US" smtClean="0"/>
-              <a:t>Click to edit Master text styles</a:t>
-            </a:r>
-          </a:p>
-        </p:txBody>
-      </p:sp>
-      <p:sp>
-        <p:nvSpPr>
-          <p:cNvPr id="4" name="Date Placeholder 3"/>
+              <a:rPr lang="ru-RU"/>
+              <a:t>Образец текста</a:t>
+            </a:r>
+          </a:p>
+        </p:txBody>
+      </p:sp>
+      <p:sp>
+        <p:nvSpPr>
+          <p:cNvPr id="4" name="Дата 3">
+            <a:extLst>
+              <a:ext uri="{FF2B5EF4-FFF2-40B4-BE49-F238E27FC236}">
+                <a16:creationId xmlns:a16="http://schemas.microsoft.com/office/drawing/2014/main" id="{FAA64610-5787-6F84-3676-3730EF2C6BD2}"/>
+              </a:ext>
+            </a:extLst>
+          </p:cNvPr>
           <p:cNvSpPr>
             <a:spLocks noGrp="1"/>
           </p:cNvSpPr>
@@ -2395,17 +2474,23 @@
           <a:bodyPr/>
           <a:lstStyle/>
           <a:p>
-            <a:fld id="{5BCAD085-E8A6-8845-BD4E-CB4CCA059FC4}" type="datetimeFigureOut">
-              <a:rPr lang="en-US" smtClean="0"/>
-              <a:t>1/27/13</a:t>
+            <a:fld id="{207A8441-1D27-874E-A0C6-3CD416A85B54}" type="datetimeFigureOut">
+              <a:rPr lang="ru-RU" smtClean="0"/>
+              <a:t>21.08.2026</a:t>
             </a:fld>
-            <a:endParaRPr lang="en-US"/>
-          </a:p>
-        </p:txBody>
-      </p:sp>
-      <p:sp>
-        <p:nvSpPr>
-          <p:cNvPr id="5" name="Footer Placeholder 4"/>
+            <a:endParaRPr lang="ru-RU"/>
+          </a:p>
+        </p:txBody>
+      </p:sp>
+      <p:sp>
+        <p:nvSpPr>
+          <p:cNvPr id="5" name="Нижний колонтитул 4">
+            <a:extLst>
+              <a:ext uri="{FF2B5EF4-FFF2-40B4-BE49-F238E27FC236}">
+                <a16:creationId xmlns:a16="http://schemas.microsoft.com/office/drawing/2014/main" id="{C4D0DFDF-878B-FDE9-4807-70FC18B2B9BF}"/>
+              </a:ext>
+            </a:extLst>
+          </p:cNvPr>
           <p:cNvSpPr>
             <a:spLocks noGrp="1"/>
           </p:cNvSpPr>
@@ -2418,13 +2503,19 @@
           <a:bodyPr/>
           <a:lstStyle/>
           <a:p>
-            <a:endParaRPr lang="en-US"/>
-          </a:p>
-        </p:txBody>
-      </p:sp>
-      <p:sp>
-        <p:nvSpPr>
-          <p:cNvPr id="6" name="Slide Number Placeholder 5"/>
+            <a:endParaRPr lang="ru-RU"/>
+          </a:p>
+        </p:txBody>
+      </p:sp>
+      <p:sp>
+        <p:nvSpPr>
+          <p:cNvPr id="6" name="Номер слайда 5">
+            <a:extLst>
+              <a:ext uri="{FF2B5EF4-FFF2-40B4-BE49-F238E27FC236}">
+                <a16:creationId xmlns:a16="http://schemas.microsoft.com/office/drawing/2014/main" id="{6C4DFA9C-F237-1A6F-2C7E-8CEC42C9E9EE}"/>
+              </a:ext>
+            </a:extLst>
+          </p:cNvPr>
           <p:cNvSpPr>
             <a:spLocks noGrp="1"/>
           </p:cNvSpPr>
@@ -2437,18 +2528,18 @@
           <a:bodyPr/>
           <a:lstStyle/>
           <a:p>
-            <a:fld id="{C1FF6DA9-008F-8B48-92A6-B652298478BF}" type="slidenum">
-              <a:rPr lang="en-US" smtClean="0"/>
+            <a:fld id="{91757437-5F8E-3041-A851-F94714F6C6A0}" type="slidenum">
+              <a:rPr lang="ru-RU" smtClean="0"/>
               <a:t>‹#›</a:t>
             </a:fld>
-            <a:endParaRPr lang="en-US"/>
+            <a:endParaRPr lang="ru-RU"/>
           </a:p>
         </p:txBody>
       </p:sp>
     </p:spTree>
     <p:extLst>
       <p:ext uri="{BB962C8B-B14F-4D97-AF65-F5344CB8AC3E}">
-        <p14:creationId xmlns:p14="http://schemas.microsoft.com/office/powerpoint/2010/main" val="960648375"/>
+        <p14:creationId xmlns:p14="http://schemas.microsoft.com/office/powerpoint/2010/main" val="4074150325"/>
       </p:ext>
     </p:extLst>
   </p:cSld>
@@ -2460,7 +2551,7 @@
 
 <file path=ppt/slideLayouts/slideLayout4.xml><?xml version="1.0" encoding="utf-8"?>
 <p:sldLayout xmlns:a="http://schemas.openxmlformats.org/drawingml/2006/main" xmlns:r="http://schemas.openxmlformats.org/officeDocument/2006/relationships" xmlns:p="http://schemas.openxmlformats.org/presentationml/2006/main" type="twoObj" preserve="1">
-  <p:cSld name="Two Content">
+  <p:cSld name="Два объекта">
     <p:spTree>
       <p:nvGrpSpPr>
         <p:cNvPr id="1" name=""/>
@@ -2477,7 +2568,13 @@
       </p:grpSpPr>
       <p:sp>
         <p:nvSpPr>
-          <p:cNvPr id="2" name="Title 1"/>
+          <p:cNvPr id="2" name="Заголовок 1">
+            <a:extLst>
+              <a:ext uri="{FF2B5EF4-FFF2-40B4-BE49-F238E27FC236}">
+                <a16:creationId xmlns:a16="http://schemas.microsoft.com/office/drawing/2014/main" id="{F2C99E07-6416-CF83-BFF2-DA2D6956C2FF}"/>
+              </a:ext>
+            </a:extLst>
+          </p:cNvPr>
           <p:cNvSpPr>
             <a:spLocks noGrp="1"/>
           </p:cNvSpPr>
@@ -2491,16 +2588,21 @@
           <a:lstStyle/>
           <a:p>
             <a:r>
-              <a:rPr lang="en-US" smtClean="0"/>
-              <a:t>Click to edit Master title style</a:t>
-            </a:r>
-            <a:endParaRPr lang="en-US"/>
-          </a:p>
-        </p:txBody>
-      </p:sp>
-      <p:sp>
-        <p:nvSpPr>
-          <p:cNvPr id="3" name="Content Placeholder 2"/>
+              <a:rPr lang="ru-RU"/>
+              <a:t>Образец заголовка</a:t>
+            </a:r>
+          </a:p>
+        </p:txBody>
+      </p:sp>
+      <p:sp>
+        <p:nvSpPr>
+          <p:cNvPr id="3" name="Объект 2">
+            <a:extLst>
+              <a:ext uri="{FF2B5EF4-FFF2-40B4-BE49-F238E27FC236}">
+                <a16:creationId xmlns:a16="http://schemas.microsoft.com/office/drawing/2014/main" id="{6EED1F32-DF57-1EE4-5347-A3935A6A9078}"/>
+              </a:ext>
+            </a:extLst>
+          </p:cNvPr>
           <p:cNvSpPr>
             <a:spLocks noGrp="1"/>
           </p:cNvSpPr>
@@ -2510,82 +2612,59 @@
         </p:nvSpPr>
         <p:spPr>
           <a:xfrm>
-            <a:off x="457200" y="1600200"/>
-            <a:ext cx="4038600" cy="4525963"/>
+            <a:off x="838200" y="1825625"/>
+            <a:ext cx="5181600" cy="4351338"/>
           </a:xfrm>
         </p:spPr>
         <p:txBody>
           <a:bodyPr/>
-          <a:lstStyle>
-            <a:lvl1pPr>
-              <a:defRPr sz="2800"/>
-            </a:lvl1pPr>
-            <a:lvl2pPr>
-              <a:defRPr sz="2400"/>
-            </a:lvl2pPr>
-            <a:lvl3pPr>
-              <a:defRPr sz="2000"/>
-            </a:lvl3pPr>
-            <a:lvl4pPr>
-              <a:defRPr sz="1800"/>
-            </a:lvl4pPr>
-            <a:lvl5pPr>
-              <a:defRPr sz="1800"/>
-            </a:lvl5pPr>
-            <a:lvl6pPr>
-              <a:defRPr sz="1800"/>
-            </a:lvl6pPr>
-            <a:lvl7pPr>
-              <a:defRPr sz="1800"/>
-            </a:lvl7pPr>
-            <a:lvl8pPr>
-              <a:defRPr sz="1800"/>
-            </a:lvl8pPr>
-            <a:lvl9pPr>
-              <a:defRPr sz="1800"/>
-            </a:lvl9pPr>
-          </a:lstStyle>
+          <a:lstStyle/>
           <a:p>
             <a:pPr lvl="0"/>
             <a:r>
-              <a:rPr lang="en-US" smtClean="0"/>
-              <a:t>Click to edit Master text styles</a:t>
+              <a:rPr lang="ru-RU"/>
+              <a:t>Образец текста</a:t>
             </a:r>
           </a:p>
           <a:p>
             <a:pPr lvl="1"/>
             <a:r>
-              <a:rPr lang="en-US" smtClean="0"/>
-              <a:t>Second level</a:t>
+              <a:rPr lang="ru-RU"/>
+              <a:t>Второй уровень</a:t>
             </a:r>
           </a:p>
           <a:p>
             <a:pPr lvl="2"/>
             <a:r>
-              <a:rPr lang="en-US" smtClean="0"/>
-              <a:t>Third level</a:t>
+              <a:rPr lang="ru-RU"/>
+              <a:t>Третий уровень</a:t>
             </a:r>
           </a:p>
           <a:p>
             <a:pPr lvl="3"/>
             <a:r>
-              <a:rPr lang="en-US" smtClean="0"/>
-              <a:t>Fourth level</a:t>
+              <a:rPr lang="ru-RU"/>
+              <a:t>Четвертый уровень</a:t>
             </a:r>
           </a:p>
           <a:p>
             <a:pPr lvl="4"/>
             <a:r>
-              <a:rPr lang="en-US" smtClean="0"/>
-              <a:t>Fifth level</a:t>
-            </a:r>
-            <a:endParaRPr lang="en-US"/>
-          </a:p>
-        </p:txBody>
-      </p:sp>
-      <p:sp>
-        <p:nvSpPr>
-          <p:cNvPr id="4" name="Content Placeholder 3"/>
+              <a:rPr lang="ru-RU"/>
+              <a:t>Пятый уровень</a:t>
+            </a:r>
+          </a:p>
+        </p:txBody>
+      </p:sp>
+      <p:sp>
+        <p:nvSpPr>
+          <p:cNvPr id="4" name="Объект 3">
+            <a:extLst>
+              <a:ext uri="{FF2B5EF4-FFF2-40B4-BE49-F238E27FC236}">
+                <a16:creationId xmlns:a16="http://schemas.microsoft.com/office/drawing/2014/main" id="{A21C1E5F-66B2-DDD1-ED34-C88F68422BFA}"/>
+              </a:ext>
+            </a:extLst>
+          </p:cNvPr>
           <p:cNvSpPr>
             <a:spLocks noGrp="1"/>
           </p:cNvSpPr>
@@ -2595,82 +2674,59 @@
         </p:nvSpPr>
         <p:spPr>
           <a:xfrm>
-            <a:off x="4648200" y="1600200"/>
-            <a:ext cx="4038600" cy="4525963"/>
+            <a:off x="6172200" y="1825625"/>
+            <a:ext cx="5181600" cy="4351338"/>
           </a:xfrm>
         </p:spPr>
         <p:txBody>
           <a:bodyPr/>
-          <a:lstStyle>
-            <a:lvl1pPr>
-              <a:defRPr sz="2800"/>
-            </a:lvl1pPr>
-            <a:lvl2pPr>
-              <a:defRPr sz="2400"/>
-            </a:lvl2pPr>
-            <a:lvl3pPr>
-              <a:defRPr sz="2000"/>
-            </a:lvl3pPr>
-            <a:lvl4pPr>
-              <a:defRPr sz="1800"/>
-            </a:lvl4pPr>
-            <a:lvl5pPr>
-              <a:defRPr sz="1800"/>
-            </a:lvl5pPr>
-            <a:lvl6pPr>
-              <a:defRPr sz="1800"/>
-            </a:lvl6pPr>
-            <a:lvl7pPr>
-              <a:defRPr sz="1800"/>
-            </a:lvl7pPr>
-            <a:lvl8pPr>
-              <a:defRPr sz="1800"/>
-            </a:lvl8pPr>
-            <a:lvl9pPr>
-              <a:defRPr sz="1800"/>
-            </a:lvl9pPr>
-          </a:lstStyle>
+          <a:lstStyle/>
           <a:p>
             <a:pPr lvl="0"/>
             <a:r>
-              <a:rPr lang="en-US" smtClean="0"/>
-              <a:t>Click to edit Master text styles</a:t>
+              <a:rPr lang="ru-RU"/>
+              <a:t>Образец текста</a:t>
             </a:r>
           </a:p>
           <a:p>
             <a:pPr lvl="1"/>
             <a:r>
-              <a:rPr lang="en-US" smtClean="0"/>
-              <a:t>Second level</a:t>
+              <a:rPr lang="ru-RU"/>
+              <a:t>Второй уровень</a:t>
             </a:r>
           </a:p>
           <a:p>
             <a:pPr lvl="2"/>
             <a:r>
-              <a:rPr lang="en-US" smtClean="0"/>
-              <a:t>Third level</a:t>
+              <a:rPr lang="ru-RU"/>
+              <a:t>Третий уровень</a:t>
             </a:r>
           </a:p>
           <a:p>
             <a:pPr lvl="3"/>
             <a:r>
-              <a:rPr lang="en-US" smtClean="0"/>
-              <a:t>Fourth level</a:t>
+              <a:rPr lang="ru-RU"/>
+              <a:t>Четвертый уровень</a:t>
             </a:r>
           </a:p>
           <a:p>
             <a:pPr lvl="4"/>
             <a:r>
-              <a:rPr lang="en-US" smtClean="0"/>
-              <a:t>Fifth level</a:t>
-            </a:r>
-            <a:endParaRPr lang="en-US"/>
-          </a:p>
-        </p:txBody>
-      </p:sp>
-      <p:sp>
-        <p:nvSpPr>
-          <p:cNvPr id="5" name="Date Placeholder 4"/>
+              <a:rPr lang="ru-RU"/>
+              <a:t>Пятый уровень</a:t>
+            </a:r>
+          </a:p>
+        </p:txBody>
+      </p:sp>
+      <p:sp>
+        <p:nvSpPr>
+          <p:cNvPr id="5" name="Дата 4">
+            <a:extLst>
+              <a:ext uri="{FF2B5EF4-FFF2-40B4-BE49-F238E27FC236}">
+                <a16:creationId xmlns:a16="http://schemas.microsoft.com/office/drawing/2014/main" id="{827B0607-5C7B-C97C-A0AA-84E6EC57941E}"/>
+              </a:ext>
+            </a:extLst>
+          </p:cNvPr>
           <p:cNvSpPr>
             <a:spLocks noGrp="1"/>
           </p:cNvSpPr>
@@ -2683,17 +2739,23 @@
           <a:bodyPr/>
           <a:lstStyle/>
           <a:p>
-            <a:fld id="{5BCAD085-E8A6-8845-BD4E-CB4CCA059FC4}" type="datetimeFigureOut">
-              <a:rPr lang="en-US" smtClean="0"/>
-              <a:t>1/27/13</a:t>
+            <a:fld id="{207A8441-1D27-874E-A0C6-3CD416A85B54}" type="datetimeFigureOut">
+              <a:rPr lang="ru-RU" smtClean="0"/>
+              <a:t>21.08.2026</a:t>
             </a:fld>
-            <a:endParaRPr lang="en-US"/>
-          </a:p>
-        </p:txBody>
-      </p:sp>
-      <p:sp>
-        <p:nvSpPr>
-          <p:cNvPr id="6" name="Footer Placeholder 5"/>
+            <a:endParaRPr lang="ru-RU"/>
+          </a:p>
+        </p:txBody>
+      </p:sp>
+      <p:sp>
+        <p:nvSpPr>
+          <p:cNvPr id="6" name="Нижний колонтитул 5">
+            <a:extLst>
+              <a:ext uri="{FF2B5EF4-FFF2-40B4-BE49-F238E27FC236}">
+                <a16:creationId xmlns:a16="http://schemas.microsoft.com/office/drawing/2014/main" id="{F02953A2-D58E-9A10-546F-FB534E9C2AE5}"/>
+              </a:ext>
+            </a:extLst>
+          </p:cNvPr>
           <p:cNvSpPr>
             <a:spLocks noGrp="1"/>
           </p:cNvSpPr>
@@ -2706,13 +2768,19 @@
           <a:bodyPr/>
           <a:lstStyle/>
           <a:p>
-            <a:endParaRPr lang="en-US"/>
-          </a:p>
-        </p:txBody>
-      </p:sp>
-      <p:sp>
-        <p:nvSpPr>
-          <p:cNvPr id="7" name="Slide Number Placeholder 6"/>
+            <a:endParaRPr lang="ru-RU"/>
+          </a:p>
+        </p:txBody>
+      </p:sp>
+      <p:sp>
+        <p:nvSpPr>
+          <p:cNvPr id="7" name="Номер слайда 6">
+            <a:extLst>
+              <a:ext uri="{FF2B5EF4-FFF2-40B4-BE49-F238E27FC236}">
+                <a16:creationId xmlns:a16="http://schemas.microsoft.com/office/drawing/2014/main" id="{B5D46A70-DCE4-5AEC-8B0E-A9BACE921A56}"/>
+              </a:ext>
+            </a:extLst>
+          </p:cNvPr>
           <p:cNvSpPr>
             <a:spLocks noGrp="1"/>
           </p:cNvSpPr>
@@ -2725,18 +2793,18 @@
           <a:bodyPr/>
           <a:lstStyle/>
           <a:p>
-            <a:fld id="{C1FF6DA9-008F-8B48-92A6-B652298478BF}" type="slidenum">
-              <a:rPr lang="en-US" smtClean="0"/>
+            <a:fld id="{91757437-5F8E-3041-A851-F94714F6C6A0}" type="slidenum">
+              <a:rPr lang="ru-RU" smtClean="0"/>
               <a:t>‹#›</a:t>
             </a:fld>
-            <a:endParaRPr lang="en-US"/>
+            <a:endParaRPr lang="ru-RU"/>
           </a:p>
         </p:txBody>
       </p:sp>
     </p:spTree>
     <p:extLst>
       <p:ext uri="{BB962C8B-B14F-4D97-AF65-F5344CB8AC3E}">
-        <p14:creationId xmlns:p14="http://schemas.microsoft.com/office/powerpoint/2010/main" val="2782244947"/>
+        <p14:creationId xmlns:p14="http://schemas.microsoft.com/office/powerpoint/2010/main" val="2662358121"/>
       </p:ext>
     </p:extLst>
   </p:cSld>
@@ -2748,7 +2816,7 @@
 
 <file path=ppt/slideLayouts/slideLayout5.xml><?xml version="1.0" encoding="utf-8"?>
 <p:sldLayout xmlns:a="http://schemas.openxmlformats.org/drawingml/2006/main" xmlns:r="http://schemas.openxmlformats.org/officeDocument/2006/relationships" xmlns:p="http://schemas.openxmlformats.org/presentationml/2006/main" type="twoTxTwoObj" preserve="1">
-  <p:cSld name="Comparison">
+  <p:cSld name="Сравнение">
     <p:spTree>
       <p:nvGrpSpPr>
         <p:cNvPr id="1" name=""/>
@@ -2765,7 +2833,13 @@
       </p:grpSpPr>
       <p:sp>
         <p:nvSpPr>
-          <p:cNvPr id="2" name="Title 1"/>
+          <p:cNvPr id="2" name="Заголовок 1">
+            <a:extLst>
+              <a:ext uri="{FF2B5EF4-FFF2-40B4-BE49-F238E27FC236}">
+                <a16:creationId xmlns:a16="http://schemas.microsoft.com/office/drawing/2014/main" id="{F12C725B-EDAE-971F-6B56-0B60F89C9321}"/>
+              </a:ext>
+            </a:extLst>
+          </p:cNvPr>
           <p:cNvSpPr>
             <a:spLocks noGrp="1"/>
           </p:cNvSpPr>
@@ -2773,26 +2847,32 @@
             <p:ph type="title"/>
           </p:nvPr>
         </p:nvSpPr>
-        <p:spPr/>
+        <p:spPr>
+          <a:xfrm>
+            <a:off x="839788" y="1013791"/>
+            <a:ext cx="10515600" cy="676897"/>
+          </a:xfrm>
+        </p:spPr>
         <p:txBody>
           <a:bodyPr/>
-          <a:lstStyle>
-            <a:lvl1pPr>
-              <a:defRPr/>
-            </a:lvl1pPr>
-          </a:lstStyle>
-          <a:p>
-            <a:r>
-              <a:rPr lang="en-US" smtClean="0"/>
-              <a:t>Click to edit Master title style</a:t>
-            </a:r>
-            <a:endParaRPr lang="en-US"/>
-          </a:p>
-        </p:txBody>
-      </p:sp>
-      <p:sp>
-        <p:nvSpPr>
-          <p:cNvPr id="3" name="Text Placeholder 2"/>
+          <a:lstStyle/>
+          <a:p>
+            <a:r>
+              <a:rPr lang="ru-RU" dirty="0"/>
+              <a:t>Образец заголовка</a:t>
+            </a:r>
+          </a:p>
+        </p:txBody>
+      </p:sp>
+      <p:sp>
+        <p:nvSpPr>
+          <p:cNvPr id="3" name="Текст 2">
+            <a:extLst>
+              <a:ext uri="{FF2B5EF4-FFF2-40B4-BE49-F238E27FC236}">
+                <a16:creationId xmlns:a16="http://schemas.microsoft.com/office/drawing/2014/main" id="{D5E01A06-4ED7-C975-8688-F395CBF8021C}"/>
+              </a:ext>
+            </a:extLst>
+          </p:cNvPr>
           <p:cNvSpPr>
             <a:spLocks noGrp="1"/>
           </p:cNvSpPr>
@@ -2802,8 +2882,8 @@
         </p:nvSpPr>
         <p:spPr>
           <a:xfrm>
-            <a:off x="457200" y="1535113"/>
-            <a:ext cx="4040188" cy="639762"/>
+            <a:off x="839788" y="1681163"/>
+            <a:ext cx="5157787" cy="823912"/>
           </a:xfrm>
         </p:spPr>
         <p:txBody>
@@ -2849,15 +2929,21 @@
           <a:p>
             <a:pPr lvl="0"/>
             <a:r>
-              <a:rPr lang="en-US" smtClean="0"/>
-              <a:t>Click to edit Master text styles</a:t>
-            </a:r>
-          </a:p>
-        </p:txBody>
-      </p:sp>
-      <p:sp>
-        <p:nvSpPr>
-          <p:cNvPr id="4" name="Content Placeholder 3"/>
+              <a:rPr lang="ru-RU"/>
+              <a:t>Образец текста</a:t>
+            </a:r>
+          </a:p>
+        </p:txBody>
+      </p:sp>
+      <p:sp>
+        <p:nvSpPr>
+          <p:cNvPr id="4" name="Объект 3">
+            <a:extLst>
+              <a:ext uri="{FF2B5EF4-FFF2-40B4-BE49-F238E27FC236}">
+                <a16:creationId xmlns:a16="http://schemas.microsoft.com/office/drawing/2014/main" id="{EC9C6B5F-BD94-F957-F98C-A6404376D964}"/>
+              </a:ext>
+            </a:extLst>
+          </p:cNvPr>
           <p:cNvSpPr>
             <a:spLocks noGrp="1"/>
           </p:cNvSpPr>
@@ -2867,82 +2953,59 @@
         </p:nvSpPr>
         <p:spPr>
           <a:xfrm>
-            <a:off x="457200" y="2174875"/>
-            <a:ext cx="4040188" cy="3951288"/>
+            <a:off x="839788" y="2505075"/>
+            <a:ext cx="5157787" cy="3684588"/>
           </a:xfrm>
         </p:spPr>
         <p:txBody>
           <a:bodyPr/>
-          <a:lstStyle>
-            <a:lvl1pPr>
-              <a:defRPr sz="2400"/>
-            </a:lvl1pPr>
-            <a:lvl2pPr>
-              <a:defRPr sz="2000"/>
-            </a:lvl2pPr>
-            <a:lvl3pPr>
-              <a:defRPr sz="1800"/>
-            </a:lvl3pPr>
-            <a:lvl4pPr>
-              <a:defRPr sz="1600"/>
-            </a:lvl4pPr>
-            <a:lvl5pPr>
-              <a:defRPr sz="1600"/>
-            </a:lvl5pPr>
-            <a:lvl6pPr>
-              <a:defRPr sz="1600"/>
-            </a:lvl6pPr>
-            <a:lvl7pPr>
-              <a:defRPr sz="1600"/>
-            </a:lvl7pPr>
-            <a:lvl8pPr>
-              <a:defRPr sz="1600"/>
-            </a:lvl8pPr>
-            <a:lvl9pPr>
-              <a:defRPr sz="1600"/>
-            </a:lvl9pPr>
-          </a:lstStyle>
+          <a:lstStyle/>
           <a:p>
             <a:pPr lvl="0"/>
             <a:r>
-              <a:rPr lang="en-US" smtClean="0"/>
-              <a:t>Click to edit Master text styles</a:t>
+              <a:rPr lang="ru-RU"/>
+              <a:t>Образец текста</a:t>
             </a:r>
           </a:p>
           <a:p>
             <a:pPr lvl="1"/>
             <a:r>
-              <a:rPr lang="en-US" smtClean="0"/>
-              <a:t>Second level</a:t>
+              <a:rPr lang="ru-RU"/>
+              <a:t>Второй уровень</a:t>
             </a:r>
           </a:p>
           <a:p>
             <a:pPr lvl="2"/>
             <a:r>
-              <a:rPr lang="en-US" smtClean="0"/>
-              <a:t>Third level</a:t>
+              <a:rPr lang="ru-RU"/>
+              <a:t>Третий уровень</a:t>
             </a:r>
           </a:p>
           <a:p>
             <a:pPr lvl="3"/>
             <a:r>
-              <a:rPr lang="en-US" smtClean="0"/>
-              <a:t>Fourth level</a:t>
+              <a:rPr lang="ru-RU"/>
+              <a:t>Четвертый уровень</a:t>
             </a:r>
           </a:p>
           <a:p>
             <a:pPr lvl="4"/>
             <a:r>
-              <a:rPr lang="en-US" smtClean="0"/>
-              <a:t>Fifth level</a:t>
-            </a:r>
-            <a:endParaRPr lang="en-US"/>
-          </a:p>
-        </p:txBody>
-      </p:sp>
-      <p:sp>
-        <p:nvSpPr>
-          <p:cNvPr id="5" name="Text Placeholder 4"/>
+              <a:rPr lang="ru-RU"/>
+              <a:t>Пятый уровень</a:t>
+            </a:r>
+          </a:p>
+        </p:txBody>
+      </p:sp>
+      <p:sp>
+        <p:nvSpPr>
+          <p:cNvPr id="5" name="Текст 4">
+            <a:extLst>
+              <a:ext uri="{FF2B5EF4-FFF2-40B4-BE49-F238E27FC236}">
+                <a16:creationId xmlns:a16="http://schemas.microsoft.com/office/drawing/2014/main" id="{ECB52FF1-C137-BF43-C228-33B1B21028A1}"/>
+              </a:ext>
+            </a:extLst>
+          </p:cNvPr>
           <p:cNvSpPr>
             <a:spLocks noGrp="1"/>
           </p:cNvSpPr>
@@ -2952,8 +3015,8 @@
         </p:nvSpPr>
         <p:spPr>
           <a:xfrm>
-            <a:off x="4645025" y="1535113"/>
-            <a:ext cx="4041775" cy="639762"/>
+            <a:off x="6172200" y="1681163"/>
+            <a:ext cx="5183188" cy="823912"/>
           </a:xfrm>
         </p:spPr>
         <p:txBody>
@@ -2999,15 +3062,21 @@
           <a:p>
             <a:pPr lvl="0"/>
             <a:r>
-              <a:rPr lang="en-US" smtClean="0"/>
-              <a:t>Click to edit Master text styles</a:t>
-            </a:r>
-          </a:p>
-        </p:txBody>
-      </p:sp>
-      <p:sp>
-        <p:nvSpPr>
-          <p:cNvPr id="6" name="Content Placeholder 5"/>
+              <a:rPr lang="ru-RU"/>
+              <a:t>Образец текста</a:t>
+            </a:r>
+          </a:p>
+        </p:txBody>
+      </p:sp>
+      <p:sp>
+        <p:nvSpPr>
+          <p:cNvPr id="6" name="Объект 5">
+            <a:extLst>
+              <a:ext uri="{FF2B5EF4-FFF2-40B4-BE49-F238E27FC236}">
+                <a16:creationId xmlns:a16="http://schemas.microsoft.com/office/drawing/2014/main" id="{07F11114-4B22-E34E-1F95-A729894F71C2}"/>
+              </a:ext>
+            </a:extLst>
+          </p:cNvPr>
           <p:cNvSpPr>
             <a:spLocks noGrp="1"/>
           </p:cNvSpPr>
@@ -3017,82 +3086,59 @@
         </p:nvSpPr>
         <p:spPr>
           <a:xfrm>
-            <a:off x="4645025" y="2174875"/>
-            <a:ext cx="4041775" cy="3951288"/>
+            <a:off x="6172200" y="2505075"/>
+            <a:ext cx="5183188" cy="3684588"/>
           </a:xfrm>
         </p:spPr>
         <p:txBody>
           <a:bodyPr/>
-          <a:lstStyle>
-            <a:lvl1pPr>
-              <a:defRPr sz="2400"/>
-            </a:lvl1pPr>
-            <a:lvl2pPr>
-              <a:defRPr sz="2000"/>
-            </a:lvl2pPr>
-            <a:lvl3pPr>
-              <a:defRPr sz="1800"/>
-            </a:lvl3pPr>
-            <a:lvl4pPr>
-              <a:defRPr sz="1600"/>
-            </a:lvl4pPr>
-            <a:lvl5pPr>
-              <a:defRPr sz="1600"/>
-            </a:lvl5pPr>
-            <a:lvl6pPr>
-              <a:defRPr sz="1600"/>
-            </a:lvl6pPr>
-            <a:lvl7pPr>
-              <a:defRPr sz="1600"/>
-            </a:lvl7pPr>
-            <a:lvl8pPr>
-              <a:defRPr sz="1600"/>
-            </a:lvl8pPr>
-            <a:lvl9pPr>
-              <a:defRPr sz="1600"/>
-            </a:lvl9pPr>
-          </a:lstStyle>
+          <a:lstStyle/>
           <a:p>
             <a:pPr lvl="0"/>
             <a:r>
-              <a:rPr lang="en-US" smtClean="0"/>
-              <a:t>Click to edit Master text styles</a:t>
+              <a:rPr lang="ru-RU"/>
+              <a:t>Образец текста</a:t>
             </a:r>
           </a:p>
           <a:p>
             <a:pPr lvl="1"/>
             <a:r>
-              <a:rPr lang="en-US" smtClean="0"/>
-              <a:t>Second level</a:t>
+              <a:rPr lang="ru-RU"/>
+              <a:t>Второй уровень</a:t>
             </a:r>
           </a:p>
           <a:p>
             <a:pPr lvl="2"/>
             <a:r>
-              <a:rPr lang="en-US" smtClean="0"/>
-              <a:t>Third level</a:t>
+              <a:rPr lang="ru-RU"/>
+              <a:t>Третий уровень</a:t>
             </a:r>
           </a:p>
           <a:p>
             <a:pPr lvl="3"/>
             <a:r>
-              <a:rPr lang="en-US" smtClean="0"/>
-              <a:t>Fourth level</a:t>
+              <a:rPr lang="ru-RU"/>
+              <a:t>Четвертый уровень</a:t>
             </a:r>
           </a:p>
           <a:p>
             <a:pPr lvl="4"/>
             <a:r>
-              <a:rPr lang="en-US" smtClean="0"/>
-              <a:t>Fifth level</a:t>
-            </a:r>
-            <a:endParaRPr lang="en-US"/>
-          </a:p>
-        </p:txBody>
-      </p:sp>
-      <p:sp>
-        <p:nvSpPr>
-          <p:cNvPr id="7" name="Date Placeholder 6"/>
+              <a:rPr lang="ru-RU"/>
+              <a:t>Пятый уровень</a:t>
+            </a:r>
+          </a:p>
+        </p:txBody>
+      </p:sp>
+      <p:sp>
+        <p:nvSpPr>
+          <p:cNvPr id="7" name="Дата 6">
+            <a:extLst>
+              <a:ext uri="{FF2B5EF4-FFF2-40B4-BE49-F238E27FC236}">
+                <a16:creationId xmlns:a16="http://schemas.microsoft.com/office/drawing/2014/main" id="{74CD0744-FDEE-3058-063A-3D4EA031D5D7}"/>
+              </a:ext>
+            </a:extLst>
+          </p:cNvPr>
           <p:cNvSpPr>
             <a:spLocks noGrp="1"/>
           </p:cNvSpPr>
@@ -3105,17 +3151,23 @@
           <a:bodyPr/>
           <a:lstStyle/>
           <a:p>
-            <a:fld id="{5BCAD085-E8A6-8845-BD4E-CB4CCA059FC4}" type="datetimeFigureOut">
-              <a:rPr lang="en-US" smtClean="0"/>
-              <a:t>1/27/13</a:t>
+            <a:fld id="{207A8441-1D27-874E-A0C6-3CD416A85B54}" type="datetimeFigureOut">
+              <a:rPr lang="ru-RU" smtClean="0"/>
+              <a:t>21.08.2026</a:t>
             </a:fld>
-            <a:endParaRPr lang="en-US"/>
-          </a:p>
-        </p:txBody>
-      </p:sp>
-      <p:sp>
-        <p:nvSpPr>
-          <p:cNvPr id="8" name="Footer Placeholder 7"/>
+            <a:endParaRPr lang="ru-RU"/>
+          </a:p>
+        </p:txBody>
+      </p:sp>
+      <p:sp>
+        <p:nvSpPr>
+          <p:cNvPr id="8" name="Нижний колонтитул 7">
+            <a:extLst>
+              <a:ext uri="{FF2B5EF4-FFF2-40B4-BE49-F238E27FC236}">
+                <a16:creationId xmlns:a16="http://schemas.microsoft.com/office/drawing/2014/main" id="{191E1B0C-FD6B-30FF-3C39-046DB0FE8756}"/>
+              </a:ext>
+            </a:extLst>
+          </p:cNvPr>
           <p:cNvSpPr>
             <a:spLocks noGrp="1"/>
           </p:cNvSpPr>
@@ -3128,13 +3180,19 @@
           <a:bodyPr/>
           <a:lstStyle/>
           <a:p>
-            <a:endParaRPr lang="en-US"/>
-          </a:p>
-        </p:txBody>
-      </p:sp>
-      <p:sp>
-        <p:nvSpPr>
-          <p:cNvPr id="9" name="Slide Number Placeholder 8"/>
+            <a:endParaRPr lang="ru-RU"/>
+          </a:p>
+        </p:txBody>
+      </p:sp>
+      <p:sp>
+        <p:nvSpPr>
+          <p:cNvPr id="9" name="Номер слайда 8">
+            <a:extLst>
+              <a:ext uri="{FF2B5EF4-FFF2-40B4-BE49-F238E27FC236}">
+                <a16:creationId xmlns:a16="http://schemas.microsoft.com/office/drawing/2014/main" id="{10B379FC-C87C-3A68-5ED2-D5F8AB741449}"/>
+              </a:ext>
+            </a:extLst>
+          </p:cNvPr>
           <p:cNvSpPr>
             <a:spLocks noGrp="1"/>
           </p:cNvSpPr>
@@ -3147,18 +3205,18 @@
           <a:bodyPr/>
           <a:lstStyle/>
           <a:p>
-            <a:fld id="{C1FF6DA9-008F-8B48-92A6-B652298478BF}" type="slidenum">
-              <a:rPr lang="en-US" smtClean="0"/>
+            <a:fld id="{91757437-5F8E-3041-A851-F94714F6C6A0}" type="slidenum">
+              <a:rPr lang="ru-RU" smtClean="0"/>
               <a:t>‹#›</a:t>
             </a:fld>
-            <a:endParaRPr lang="en-US"/>
+            <a:endParaRPr lang="ru-RU"/>
           </a:p>
         </p:txBody>
       </p:sp>
     </p:spTree>
     <p:extLst>
       <p:ext uri="{BB962C8B-B14F-4D97-AF65-F5344CB8AC3E}">
-        <p14:creationId xmlns:p14="http://schemas.microsoft.com/office/powerpoint/2010/main" val="990158736"/>
+        <p14:creationId xmlns:p14="http://schemas.microsoft.com/office/powerpoint/2010/main" val="4124406668"/>
       </p:ext>
     </p:extLst>
   </p:cSld>
@@ -3170,7 +3228,7 @@
 
 <file path=ppt/slideLayouts/slideLayout6.xml><?xml version="1.0" encoding="utf-8"?>
 <p:sldLayout xmlns:a="http://schemas.openxmlformats.org/drawingml/2006/main" xmlns:r="http://schemas.openxmlformats.org/officeDocument/2006/relationships" xmlns:p="http://schemas.openxmlformats.org/presentationml/2006/main" type="titleOnly" preserve="1">
-  <p:cSld name="Title Only">
+  <p:cSld name="Только заголовок">
     <p:spTree>
       <p:nvGrpSpPr>
         <p:cNvPr id="1" name=""/>
@@ -3187,7 +3245,13 @@
       </p:grpSpPr>
       <p:sp>
         <p:nvSpPr>
-          <p:cNvPr id="2" name="Title 1"/>
+          <p:cNvPr id="2" name="Заголовок 1">
+            <a:extLst>
+              <a:ext uri="{FF2B5EF4-FFF2-40B4-BE49-F238E27FC236}">
+                <a16:creationId xmlns:a16="http://schemas.microsoft.com/office/drawing/2014/main" id="{FFC26B19-F374-941F-055E-EE5269503A86}"/>
+              </a:ext>
+            </a:extLst>
+          </p:cNvPr>
           <p:cNvSpPr>
             <a:spLocks noGrp="1"/>
           </p:cNvSpPr>
@@ -3201,16 +3265,21 @@
           <a:lstStyle/>
           <a:p>
             <a:r>
-              <a:rPr lang="en-US" smtClean="0"/>
-              <a:t>Click to edit Master title style</a:t>
-            </a:r>
-            <a:endParaRPr lang="en-US"/>
-          </a:p>
-        </p:txBody>
-      </p:sp>
-      <p:sp>
-        <p:nvSpPr>
-          <p:cNvPr id="3" name="Date Placeholder 2"/>
+              <a:rPr lang="ru-RU"/>
+              <a:t>Образец заголовка</a:t>
+            </a:r>
+          </a:p>
+        </p:txBody>
+      </p:sp>
+      <p:sp>
+        <p:nvSpPr>
+          <p:cNvPr id="3" name="Дата 2">
+            <a:extLst>
+              <a:ext uri="{FF2B5EF4-FFF2-40B4-BE49-F238E27FC236}">
+                <a16:creationId xmlns:a16="http://schemas.microsoft.com/office/drawing/2014/main" id="{9823C788-EA20-015F-93E7-19C72B642812}"/>
+              </a:ext>
+            </a:extLst>
+          </p:cNvPr>
           <p:cNvSpPr>
             <a:spLocks noGrp="1"/>
           </p:cNvSpPr>
@@ -3223,17 +3292,23 @@
           <a:bodyPr/>
           <a:lstStyle/>
           <a:p>
-            <a:fld id="{5BCAD085-E8A6-8845-BD4E-CB4CCA059FC4}" type="datetimeFigureOut">
-              <a:rPr lang="en-US" smtClean="0"/>
-              <a:t>1/27/13</a:t>
+            <a:fld id="{207A8441-1D27-874E-A0C6-3CD416A85B54}" type="datetimeFigureOut">
+              <a:rPr lang="ru-RU" smtClean="0"/>
+              <a:t>21.08.2026</a:t>
             </a:fld>
-            <a:endParaRPr lang="en-US"/>
-          </a:p>
-        </p:txBody>
-      </p:sp>
-      <p:sp>
-        <p:nvSpPr>
-          <p:cNvPr id="4" name="Footer Placeholder 3"/>
+            <a:endParaRPr lang="ru-RU"/>
+          </a:p>
+        </p:txBody>
+      </p:sp>
+      <p:sp>
+        <p:nvSpPr>
+          <p:cNvPr id="4" name="Нижний колонтитул 3">
+            <a:extLst>
+              <a:ext uri="{FF2B5EF4-FFF2-40B4-BE49-F238E27FC236}">
+                <a16:creationId xmlns:a16="http://schemas.microsoft.com/office/drawing/2014/main" id="{ABC31C02-9F37-3BE6-9628-5A8D5E0E39B8}"/>
+              </a:ext>
+            </a:extLst>
+          </p:cNvPr>
           <p:cNvSpPr>
             <a:spLocks noGrp="1"/>
           </p:cNvSpPr>
@@ -3246,13 +3321,19 @@
           <a:bodyPr/>
           <a:lstStyle/>
           <a:p>
-            <a:endParaRPr lang="en-US"/>
-          </a:p>
-        </p:txBody>
-      </p:sp>
-      <p:sp>
-        <p:nvSpPr>
-          <p:cNvPr id="5" name="Slide Number Placeholder 4"/>
+            <a:endParaRPr lang="ru-RU"/>
+          </a:p>
+        </p:txBody>
+      </p:sp>
+      <p:sp>
+        <p:nvSpPr>
+          <p:cNvPr id="5" name="Номер слайда 4">
+            <a:extLst>
+              <a:ext uri="{FF2B5EF4-FFF2-40B4-BE49-F238E27FC236}">
+                <a16:creationId xmlns:a16="http://schemas.microsoft.com/office/drawing/2014/main" id="{8EEDBB82-5E01-18B3-4948-3CE8F0C0F6B4}"/>
+              </a:ext>
+            </a:extLst>
+          </p:cNvPr>
           <p:cNvSpPr>
             <a:spLocks noGrp="1"/>
           </p:cNvSpPr>
@@ -3265,18 +3346,18 @@
           <a:bodyPr/>
           <a:lstStyle/>
           <a:p>
-            <a:fld id="{C1FF6DA9-008F-8B48-92A6-B652298478BF}" type="slidenum">
-              <a:rPr lang="en-US" smtClean="0"/>
+            <a:fld id="{91757437-5F8E-3041-A851-F94714F6C6A0}" type="slidenum">
+              <a:rPr lang="ru-RU" smtClean="0"/>
               <a:t>‹#›</a:t>
             </a:fld>
-            <a:endParaRPr lang="en-US"/>
+            <a:endParaRPr lang="ru-RU"/>
           </a:p>
         </p:txBody>
       </p:sp>
     </p:spTree>
     <p:extLst>
       <p:ext uri="{BB962C8B-B14F-4D97-AF65-F5344CB8AC3E}">
-        <p14:creationId xmlns:p14="http://schemas.microsoft.com/office/powerpoint/2010/main" val="727027711"/>
+        <p14:creationId xmlns:p14="http://schemas.microsoft.com/office/powerpoint/2010/main" val="2922840214"/>
       </p:ext>
     </p:extLst>
   </p:cSld>
@@ -3288,7 +3369,7 @@
 
 <file path=ppt/slideLayouts/slideLayout7.xml><?xml version="1.0" encoding="utf-8"?>
 <p:sldLayout xmlns:a="http://schemas.openxmlformats.org/drawingml/2006/main" xmlns:r="http://schemas.openxmlformats.org/officeDocument/2006/relationships" xmlns:p="http://schemas.openxmlformats.org/presentationml/2006/main" type="blank" preserve="1">
-  <p:cSld name="Blank">
+  <p:cSld name="Пустой слайд">
     <p:spTree>
       <p:nvGrpSpPr>
         <p:cNvPr id="1" name=""/>
@@ -3305,7 +3386,13 @@
       </p:grpSpPr>
       <p:sp>
         <p:nvSpPr>
-          <p:cNvPr id="2" name="Date Placeholder 1"/>
+          <p:cNvPr id="2" name="Дата 1">
+            <a:extLst>
+              <a:ext uri="{FF2B5EF4-FFF2-40B4-BE49-F238E27FC236}">
+                <a16:creationId xmlns:a16="http://schemas.microsoft.com/office/drawing/2014/main" id="{DA95DFBD-15A4-DB3F-85BE-0D50EC05632B}"/>
+              </a:ext>
+            </a:extLst>
+          </p:cNvPr>
           <p:cNvSpPr>
             <a:spLocks noGrp="1"/>
           </p:cNvSpPr>
@@ -3318,17 +3405,23 @@
           <a:bodyPr/>
           <a:lstStyle/>
           <a:p>
-            <a:fld id="{5BCAD085-E8A6-8845-BD4E-CB4CCA059FC4}" type="datetimeFigureOut">
-              <a:rPr lang="en-US" smtClean="0"/>
-              <a:t>1/27/13</a:t>
+            <a:fld id="{207A8441-1D27-874E-A0C6-3CD416A85B54}" type="datetimeFigureOut">
+              <a:rPr lang="ru-RU" smtClean="0"/>
+              <a:t>21.08.2026</a:t>
             </a:fld>
-            <a:endParaRPr lang="en-US"/>
-          </a:p>
-        </p:txBody>
-      </p:sp>
-      <p:sp>
-        <p:nvSpPr>
-          <p:cNvPr id="3" name="Footer Placeholder 2"/>
+            <a:endParaRPr lang="ru-RU"/>
+          </a:p>
+        </p:txBody>
+      </p:sp>
+      <p:sp>
+        <p:nvSpPr>
+          <p:cNvPr id="3" name="Нижний колонтитул 2">
+            <a:extLst>
+              <a:ext uri="{FF2B5EF4-FFF2-40B4-BE49-F238E27FC236}">
+                <a16:creationId xmlns:a16="http://schemas.microsoft.com/office/drawing/2014/main" id="{BDD8EE76-4D0D-8DC0-896B-A5C92E55FCDC}"/>
+              </a:ext>
+            </a:extLst>
+          </p:cNvPr>
           <p:cNvSpPr>
             <a:spLocks noGrp="1"/>
           </p:cNvSpPr>
@@ -3341,13 +3434,19 @@
           <a:bodyPr/>
           <a:lstStyle/>
           <a:p>
-            <a:endParaRPr lang="en-US"/>
-          </a:p>
-        </p:txBody>
-      </p:sp>
-      <p:sp>
-        <p:nvSpPr>
-          <p:cNvPr id="4" name="Slide Number Placeholder 3"/>
+            <a:endParaRPr lang="ru-RU"/>
+          </a:p>
+        </p:txBody>
+      </p:sp>
+      <p:sp>
+        <p:nvSpPr>
+          <p:cNvPr id="4" name="Номер слайда 3">
+            <a:extLst>
+              <a:ext uri="{FF2B5EF4-FFF2-40B4-BE49-F238E27FC236}">
+                <a16:creationId xmlns:a16="http://schemas.microsoft.com/office/drawing/2014/main" id="{FCB15FE9-1147-B58B-E43F-EA6389C06C6C}"/>
+              </a:ext>
+            </a:extLst>
+          </p:cNvPr>
           <p:cNvSpPr>
             <a:spLocks noGrp="1"/>
           </p:cNvSpPr>
@@ -3360,18 +3459,18 @@
           <a:bodyPr/>
           <a:lstStyle/>
           <a:p>
-            <a:fld id="{C1FF6DA9-008F-8B48-92A6-B652298478BF}" type="slidenum">
-              <a:rPr lang="en-US" smtClean="0"/>
+            <a:fld id="{91757437-5F8E-3041-A851-F94714F6C6A0}" type="slidenum">
+              <a:rPr lang="ru-RU" smtClean="0"/>
               <a:t>‹#›</a:t>
             </a:fld>
-            <a:endParaRPr lang="en-US"/>
+            <a:endParaRPr lang="ru-RU"/>
           </a:p>
         </p:txBody>
       </p:sp>
     </p:spTree>
     <p:extLst>
       <p:ext uri="{BB962C8B-B14F-4D97-AF65-F5344CB8AC3E}">
-        <p14:creationId xmlns:p14="http://schemas.microsoft.com/office/powerpoint/2010/main" val="1212999818"/>
+        <p14:creationId xmlns:p14="http://schemas.microsoft.com/office/powerpoint/2010/main" val="533181163"/>
       </p:ext>
     </p:extLst>
   </p:cSld>
@@ -3383,7 +3482,7 @@
 
 <file path=ppt/slideLayouts/slideLayout8.xml><?xml version="1.0" encoding="utf-8"?>
 <p:sldLayout xmlns:a="http://schemas.openxmlformats.org/drawingml/2006/main" xmlns:r="http://schemas.openxmlformats.org/officeDocument/2006/relationships" xmlns:p="http://schemas.openxmlformats.org/presentationml/2006/main" type="objTx" preserve="1">
-  <p:cSld name="Content with Caption">
+  <p:cSld name="Объект с подписью">
     <p:spTree>
       <p:nvGrpSpPr>
         <p:cNvPr id="1" name=""/>
@@ -3400,7 +3499,13 @@
       </p:grpSpPr>
       <p:sp>
         <p:nvSpPr>
-          <p:cNvPr id="2" name="Title 1"/>
+          <p:cNvPr id="2" name="Заголовок 1">
+            <a:extLst>
+              <a:ext uri="{FF2B5EF4-FFF2-40B4-BE49-F238E27FC236}">
+                <a16:creationId xmlns:a16="http://schemas.microsoft.com/office/drawing/2014/main" id="{5D6F24B5-5635-A7AE-CF7C-C316739CCE5D}"/>
+              </a:ext>
+            </a:extLst>
+          </p:cNvPr>
           <p:cNvSpPr>
             <a:spLocks noGrp="1"/>
           </p:cNvSpPr>
@@ -3410,29 +3515,34 @@
         </p:nvSpPr>
         <p:spPr>
           <a:xfrm>
-            <a:off x="457200" y="273050"/>
-            <a:ext cx="3008313" cy="1162050"/>
+            <a:off x="839788" y="987424"/>
+            <a:ext cx="3932237" cy="1069975"/>
           </a:xfrm>
         </p:spPr>
         <p:txBody>
           <a:bodyPr anchor="b"/>
           <a:lstStyle>
-            <a:lvl1pPr algn="l">
-              <a:defRPr sz="2000" b="1"/>
+            <a:lvl1pPr>
+              <a:defRPr sz="3200"/>
             </a:lvl1pPr>
           </a:lstStyle>
           <a:p>
             <a:r>
-              <a:rPr lang="en-US" smtClean="0"/>
-              <a:t>Click to edit Master title style</a:t>
-            </a:r>
-            <a:endParaRPr lang="en-US"/>
-          </a:p>
-        </p:txBody>
-      </p:sp>
-      <p:sp>
-        <p:nvSpPr>
-          <p:cNvPr id="3" name="Content Placeholder 2"/>
+              <a:rPr lang="ru-RU" dirty="0"/>
+              <a:t>Образец заголовка</a:t>
+            </a:r>
+          </a:p>
+        </p:txBody>
+      </p:sp>
+      <p:sp>
+        <p:nvSpPr>
+          <p:cNvPr id="3" name="Объект 2">
+            <a:extLst>
+              <a:ext uri="{FF2B5EF4-FFF2-40B4-BE49-F238E27FC236}">
+                <a16:creationId xmlns:a16="http://schemas.microsoft.com/office/drawing/2014/main" id="{85ADD381-57E6-01CC-0078-729BE04472D7}"/>
+              </a:ext>
+            </a:extLst>
+          </p:cNvPr>
           <p:cNvSpPr>
             <a:spLocks noGrp="1"/>
           </p:cNvSpPr>
@@ -3442,8 +3552,8 @@
         </p:nvSpPr>
         <p:spPr>
           <a:xfrm>
-            <a:off x="3575050" y="273050"/>
-            <a:ext cx="5111750" cy="5853113"/>
+            <a:off x="5183188" y="987425"/>
+            <a:ext cx="6172200" cy="4873625"/>
           </a:xfrm>
         </p:spPr>
         <p:txBody>
@@ -3480,44 +3590,49 @@
           <a:p>
             <a:pPr lvl="0"/>
             <a:r>
-              <a:rPr lang="en-US" smtClean="0"/>
-              <a:t>Click to edit Master text styles</a:t>
+              <a:rPr lang="ru-RU"/>
+              <a:t>Образец текста</a:t>
             </a:r>
           </a:p>
           <a:p>
             <a:pPr lvl="1"/>
             <a:r>
-              <a:rPr lang="en-US" smtClean="0"/>
-              <a:t>Second level</a:t>
+              <a:rPr lang="ru-RU"/>
+              <a:t>Второй уровень</a:t>
             </a:r>
           </a:p>
           <a:p>
             <a:pPr lvl="2"/>
             <a:r>
-              <a:rPr lang="en-US" smtClean="0"/>
-              <a:t>Third level</a:t>
+              <a:rPr lang="ru-RU"/>
+              <a:t>Третий уровень</a:t>
             </a:r>
           </a:p>
           <a:p>
             <a:pPr lvl="3"/>
             <a:r>
-              <a:rPr lang="en-US" smtClean="0"/>
-              <a:t>Fourth level</a:t>
+              <a:rPr lang="ru-RU"/>
+              <a:t>Четвертый уровень</a:t>
             </a:r>
           </a:p>
           <a:p>
             <a:pPr lvl="4"/>
             <a:r>
-              <a:rPr lang="en-US" smtClean="0"/>
-              <a:t>Fifth level</a:t>
-            </a:r>
-            <a:endParaRPr lang="en-US"/>
-          </a:p>
-        </p:txBody>
-      </p:sp>
-      <p:sp>
-        <p:nvSpPr>
-          <p:cNvPr id="4" name="Text Placeholder 3"/>
+              <a:rPr lang="ru-RU"/>
+              <a:t>Пятый уровень</a:t>
+            </a:r>
+          </a:p>
+        </p:txBody>
+      </p:sp>
+      <p:sp>
+        <p:nvSpPr>
+          <p:cNvPr id="4" name="Текст 3">
+            <a:extLst>
+              <a:ext uri="{FF2B5EF4-FFF2-40B4-BE49-F238E27FC236}">
+                <a16:creationId xmlns:a16="http://schemas.microsoft.com/office/drawing/2014/main" id="{D4452FDF-B57A-0B73-DF8B-39FFAB10DE62}"/>
+              </a:ext>
+            </a:extLst>
+          </p:cNvPr>
           <p:cNvSpPr>
             <a:spLocks noGrp="1"/>
           </p:cNvSpPr>
@@ -3527,8 +3642,8 @@
         </p:nvSpPr>
         <p:spPr>
           <a:xfrm>
-            <a:off x="457200" y="1435100"/>
-            <a:ext cx="3008313" cy="4691063"/>
+            <a:off x="839788" y="2057400"/>
+            <a:ext cx="3932237" cy="3811588"/>
           </a:xfrm>
         </p:spPr>
         <p:txBody>
@@ -3536,53 +3651,59 @@
           <a:lstStyle>
             <a:lvl1pPr marL="0" indent="0">
               <a:buNone/>
-              <a:defRPr sz="1400"/>
+              <a:defRPr sz="1600"/>
             </a:lvl1pPr>
             <a:lvl2pPr marL="457200" indent="0">
               <a:buNone/>
-              <a:defRPr sz="1200"/>
+              <a:defRPr sz="1400"/>
             </a:lvl2pPr>
             <a:lvl3pPr marL="914400" indent="0">
               <a:buNone/>
-              <a:defRPr sz="1000"/>
+              <a:defRPr sz="1200"/>
             </a:lvl3pPr>
             <a:lvl4pPr marL="1371600" indent="0">
               <a:buNone/>
-              <a:defRPr sz="900"/>
+              <a:defRPr sz="1000"/>
             </a:lvl4pPr>
             <a:lvl5pPr marL="1828800" indent="0">
               <a:buNone/>
-              <a:defRPr sz="900"/>
+              <a:defRPr sz="1000"/>
             </a:lvl5pPr>
             <a:lvl6pPr marL="2286000" indent="0">
               <a:buNone/>
-              <a:defRPr sz="900"/>
+              <a:defRPr sz="1000"/>
             </a:lvl6pPr>
             <a:lvl7pPr marL="2743200" indent="0">
               <a:buNone/>
-              <a:defRPr sz="900"/>
+              <a:defRPr sz="1000"/>
             </a:lvl7pPr>
             <a:lvl8pPr marL="3200400" indent="0">
               <a:buNone/>
-              <a:defRPr sz="900"/>
+              <a:defRPr sz="1000"/>
             </a:lvl8pPr>
             <a:lvl9pPr marL="3657600" indent="0">
               <a:buNone/>
-              <a:defRPr sz="900"/>
+              <a:defRPr sz="1000"/>
             </a:lvl9pPr>
           </a:lstStyle>
           <a:p>
             <a:pPr lvl="0"/>
             <a:r>
-              <a:rPr lang="en-US" smtClean="0"/>
-              <a:t>Click to edit Master text styles</a:t>
-            </a:r>
-          </a:p>
-        </p:txBody>
-      </p:sp>
-      <p:sp>
-        <p:nvSpPr>
-          <p:cNvPr id="5" name="Date Placeholder 4"/>
+              <a:rPr lang="ru-RU"/>
+              <a:t>Образец текста</a:t>
+            </a:r>
+          </a:p>
+        </p:txBody>
+      </p:sp>
+      <p:sp>
+        <p:nvSpPr>
+          <p:cNvPr id="5" name="Дата 4">
+            <a:extLst>
+              <a:ext uri="{FF2B5EF4-FFF2-40B4-BE49-F238E27FC236}">
+                <a16:creationId xmlns:a16="http://schemas.microsoft.com/office/drawing/2014/main" id="{462A6BE5-24A2-8158-AD58-24BE20A2FC5C}"/>
+              </a:ext>
+            </a:extLst>
+          </p:cNvPr>
           <p:cNvSpPr>
             <a:spLocks noGrp="1"/>
           </p:cNvSpPr>
@@ -3595,17 +3716,23 @@
           <a:bodyPr/>
           <a:lstStyle/>
           <a:p>
-            <a:fld id="{5BCAD085-E8A6-8845-BD4E-CB4CCA059FC4}" type="datetimeFigureOut">
-              <a:rPr lang="en-US" smtClean="0"/>
-              <a:t>1/27/13</a:t>
+            <a:fld id="{207A8441-1D27-874E-A0C6-3CD416A85B54}" type="datetimeFigureOut">
+              <a:rPr lang="ru-RU" smtClean="0"/>
+              <a:t>21.08.2026</a:t>
             </a:fld>
-            <a:endParaRPr lang="en-US"/>
-          </a:p>
-        </p:txBody>
-      </p:sp>
-      <p:sp>
-        <p:nvSpPr>
-          <p:cNvPr id="6" name="Footer Placeholder 5"/>
+            <a:endParaRPr lang="ru-RU"/>
+          </a:p>
+        </p:txBody>
+      </p:sp>
+      <p:sp>
+        <p:nvSpPr>
+          <p:cNvPr id="6" name="Нижний колонтитул 5">
+            <a:extLst>
+              <a:ext uri="{FF2B5EF4-FFF2-40B4-BE49-F238E27FC236}">
+                <a16:creationId xmlns:a16="http://schemas.microsoft.com/office/drawing/2014/main" id="{93751D27-D143-53CC-462D-B1195B1CCB8C}"/>
+              </a:ext>
+            </a:extLst>
+          </p:cNvPr>
           <p:cNvSpPr>
             <a:spLocks noGrp="1"/>
           </p:cNvSpPr>
@@ -3618,13 +3745,19 @@
           <a:bodyPr/>
           <a:lstStyle/>
           <a:p>
-            <a:endParaRPr lang="en-US"/>
-          </a:p>
-        </p:txBody>
-      </p:sp>
-      <p:sp>
-        <p:nvSpPr>
-          <p:cNvPr id="7" name="Slide Number Placeholder 6"/>
+            <a:endParaRPr lang="ru-RU"/>
+          </a:p>
+        </p:txBody>
+      </p:sp>
+      <p:sp>
+        <p:nvSpPr>
+          <p:cNvPr id="7" name="Номер слайда 6">
+            <a:extLst>
+              <a:ext uri="{FF2B5EF4-FFF2-40B4-BE49-F238E27FC236}">
+                <a16:creationId xmlns:a16="http://schemas.microsoft.com/office/drawing/2014/main" id="{E3AF0CB1-DB42-BFEB-6B9C-41E1F59425DA}"/>
+              </a:ext>
+            </a:extLst>
+          </p:cNvPr>
           <p:cNvSpPr>
             <a:spLocks noGrp="1"/>
           </p:cNvSpPr>
@@ -3637,18 +3770,18 @@
           <a:bodyPr/>
           <a:lstStyle/>
           <a:p>
-            <a:fld id="{C1FF6DA9-008F-8B48-92A6-B652298478BF}" type="slidenum">
-              <a:rPr lang="en-US" smtClean="0"/>
+            <a:fld id="{91757437-5F8E-3041-A851-F94714F6C6A0}" type="slidenum">
+              <a:rPr lang="ru-RU" smtClean="0"/>
               <a:t>‹#›</a:t>
             </a:fld>
-            <a:endParaRPr lang="en-US"/>
+            <a:endParaRPr lang="ru-RU"/>
           </a:p>
         </p:txBody>
       </p:sp>
     </p:spTree>
     <p:extLst>
       <p:ext uri="{BB962C8B-B14F-4D97-AF65-F5344CB8AC3E}">
-        <p14:creationId xmlns:p14="http://schemas.microsoft.com/office/powerpoint/2010/main" val="1840726560"/>
+        <p14:creationId xmlns:p14="http://schemas.microsoft.com/office/powerpoint/2010/main" val="585460354"/>
       </p:ext>
     </p:extLst>
   </p:cSld>
@@ -3660,7 +3793,7 @@
 
 <file path=ppt/slideLayouts/slideLayout9.xml><?xml version="1.0" encoding="utf-8"?>
 <p:sldLayout xmlns:a="http://schemas.openxmlformats.org/drawingml/2006/main" xmlns:r="http://schemas.openxmlformats.org/officeDocument/2006/relationships" xmlns:p="http://schemas.openxmlformats.org/presentationml/2006/main" type="picTx" preserve="1">
-  <p:cSld name="Picture with Caption">
+  <p:cSld name="Рисунок с подписью">
     <p:spTree>
       <p:nvGrpSpPr>
         <p:cNvPr id="1" name=""/>
@@ -3677,7 +3810,13 @@
       </p:grpSpPr>
       <p:sp>
         <p:nvSpPr>
-          <p:cNvPr id="2" name="Title 1"/>
+          <p:cNvPr id="2" name="Заголовок 1">
+            <a:extLst>
+              <a:ext uri="{FF2B5EF4-FFF2-40B4-BE49-F238E27FC236}">
+                <a16:creationId xmlns:a16="http://schemas.microsoft.com/office/drawing/2014/main" id="{57E9DE95-6C09-24D7-4DAC-6B8795C19C54}"/>
+              </a:ext>
+            </a:extLst>
+          </p:cNvPr>
           <p:cNvSpPr>
             <a:spLocks noGrp="1"/>
           </p:cNvSpPr>
@@ -3687,29 +3826,34 @@
         </p:nvSpPr>
         <p:spPr>
           <a:xfrm>
-            <a:off x="1792288" y="4800600"/>
-            <a:ext cx="5486400" cy="566738"/>
+            <a:off x="839788" y="987424"/>
+            <a:ext cx="3932237" cy="1069975"/>
           </a:xfrm>
         </p:spPr>
         <p:txBody>
           <a:bodyPr anchor="b"/>
           <a:lstStyle>
-            <a:lvl1pPr algn="l">
-              <a:defRPr sz="2000" b="1"/>
+            <a:lvl1pPr>
+              <a:defRPr sz="3200"/>
             </a:lvl1pPr>
           </a:lstStyle>
           <a:p>
             <a:r>
-              <a:rPr lang="en-US" smtClean="0"/>
-              <a:t>Click to edit Master title style</a:t>
-            </a:r>
-            <a:endParaRPr lang="en-US"/>
-          </a:p>
-        </p:txBody>
-      </p:sp>
-      <p:sp>
-        <p:nvSpPr>
-          <p:cNvPr id="3" name="Picture Placeholder 2"/>
+              <a:rPr lang="ru-RU"/>
+              <a:t>Образец заголовка</a:t>
+            </a:r>
+          </a:p>
+        </p:txBody>
+      </p:sp>
+      <p:sp>
+        <p:nvSpPr>
+          <p:cNvPr id="3" name="Рисунок 2">
+            <a:extLst>
+              <a:ext uri="{FF2B5EF4-FFF2-40B4-BE49-F238E27FC236}">
+                <a16:creationId xmlns:a16="http://schemas.microsoft.com/office/drawing/2014/main" id="{911955BE-CC26-67CB-7F2A-B299CEEF05A3}"/>
+              </a:ext>
+            </a:extLst>
+          </p:cNvPr>
           <p:cNvSpPr>
             <a:spLocks noGrp="1"/>
           </p:cNvSpPr>
@@ -3719,8 +3863,8 @@
         </p:nvSpPr>
         <p:spPr>
           <a:xfrm>
-            <a:off x="1792288" y="612775"/>
-            <a:ext cx="5486400" cy="4114800"/>
+            <a:off x="5183188" y="987425"/>
+            <a:ext cx="6172200" cy="4873625"/>
           </a:xfrm>
         </p:spPr>
         <p:txBody>
@@ -3764,13 +3908,19 @@
             </a:lvl9pPr>
           </a:lstStyle>
           <a:p>
-            <a:endParaRPr lang="en-US"/>
-          </a:p>
-        </p:txBody>
-      </p:sp>
-      <p:sp>
-        <p:nvSpPr>
-          <p:cNvPr id="4" name="Text Placeholder 3"/>
+            <a:endParaRPr lang="ru-RU"/>
+          </a:p>
+        </p:txBody>
+      </p:sp>
+      <p:sp>
+        <p:nvSpPr>
+          <p:cNvPr id="4" name="Текст 3">
+            <a:extLst>
+              <a:ext uri="{FF2B5EF4-FFF2-40B4-BE49-F238E27FC236}">
+                <a16:creationId xmlns:a16="http://schemas.microsoft.com/office/drawing/2014/main" id="{6D16D6E9-9634-DD08-3FEE-42D1205A296D}"/>
+              </a:ext>
+            </a:extLst>
+          </p:cNvPr>
           <p:cNvSpPr>
             <a:spLocks noGrp="1"/>
           </p:cNvSpPr>
@@ -3780,8 +3930,8 @@
         </p:nvSpPr>
         <p:spPr>
           <a:xfrm>
-            <a:off x="1792288" y="5367338"/>
-            <a:ext cx="5486400" cy="804862"/>
+            <a:off x="839788" y="2057400"/>
+            <a:ext cx="3932237" cy="3811588"/>
           </a:xfrm>
         </p:spPr>
         <p:txBody>
@@ -3789,53 +3939,59 @@
           <a:lstStyle>
             <a:lvl1pPr marL="0" indent="0">
               <a:buNone/>
-              <a:defRPr sz="1400"/>
+              <a:defRPr sz="1600"/>
             </a:lvl1pPr>
             <a:lvl2pPr marL="457200" indent="0">
               <a:buNone/>
-              <a:defRPr sz="1200"/>
+              <a:defRPr sz="1400"/>
             </a:lvl2pPr>
             <a:lvl3pPr marL="914400" indent="0">
               <a:buNone/>
-              <a:defRPr sz="1000"/>
+              <a:defRPr sz="1200"/>
             </a:lvl3pPr>
             <a:lvl4pPr marL="1371600" indent="0">
               <a:buNone/>
-              <a:defRPr sz="900"/>
+              <a:defRPr sz="1000"/>
             </a:lvl4pPr>
             <a:lvl5pPr marL="1828800" indent="0">
               <a:buNone/>
-              <a:defRPr sz="900"/>
+              <a:defRPr sz="1000"/>
             </a:lvl5pPr>
             <a:lvl6pPr marL="2286000" indent="0">
               <a:buNone/>
-              <a:defRPr sz="900"/>
+              <a:defRPr sz="1000"/>
             </a:lvl6pPr>
             <a:lvl7pPr marL="2743200" indent="0">
               <a:buNone/>
-              <a:defRPr sz="900"/>
+              <a:defRPr sz="1000"/>
             </a:lvl7pPr>
             <a:lvl8pPr marL="3200400" indent="0">
               <a:buNone/>
-              <a:defRPr sz="900"/>
+              <a:defRPr sz="1000"/>
             </a:lvl8pPr>
             <a:lvl9pPr marL="3657600" indent="0">
               <a:buNone/>
-              <a:defRPr sz="900"/>
+              <a:defRPr sz="1000"/>
             </a:lvl9pPr>
           </a:lstStyle>
           <a:p>
             <a:pPr lvl="0"/>
             <a:r>
-              <a:rPr lang="en-US" smtClean="0"/>
-              <a:t>Click to edit Master text styles</a:t>
-            </a:r>
-          </a:p>
-        </p:txBody>
-      </p:sp>
-      <p:sp>
-        <p:nvSpPr>
-          <p:cNvPr id="5" name="Date Placeholder 4"/>
+              <a:rPr lang="ru-RU"/>
+              <a:t>Образец текста</a:t>
+            </a:r>
+          </a:p>
+        </p:txBody>
+      </p:sp>
+      <p:sp>
+        <p:nvSpPr>
+          <p:cNvPr id="5" name="Дата 4">
+            <a:extLst>
+              <a:ext uri="{FF2B5EF4-FFF2-40B4-BE49-F238E27FC236}">
+                <a16:creationId xmlns:a16="http://schemas.microsoft.com/office/drawing/2014/main" id="{BED1B4CD-6C2C-245C-8FB2-7C29CE85736C}"/>
+              </a:ext>
+            </a:extLst>
+          </p:cNvPr>
           <p:cNvSpPr>
             <a:spLocks noGrp="1"/>
           </p:cNvSpPr>
@@ -3848,17 +4004,23 @@
           <a:bodyPr/>
           <a:lstStyle/>
           <a:p>
-            <a:fld id="{5BCAD085-E8A6-8845-BD4E-CB4CCA059FC4}" type="datetimeFigureOut">
-              <a:rPr lang="en-US" smtClean="0"/>
-              <a:t>1/27/13</a:t>
+            <a:fld id="{207A8441-1D27-874E-A0C6-3CD416A85B54}" type="datetimeFigureOut">
+              <a:rPr lang="ru-RU" smtClean="0"/>
+              <a:t>21.08.2026</a:t>
             </a:fld>
-            <a:endParaRPr lang="en-US"/>
-          </a:p>
-        </p:txBody>
-      </p:sp>
-      <p:sp>
-        <p:nvSpPr>
-          <p:cNvPr id="6" name="Footer Placeholder 5"/>
+            <a:endParaRPr lang="ru-RU"/>
+          </a:p>
+        </p:txBody>
+      </p:sp>
+      <p:sp>
+        <p:nvSpPr>
+          <p:cNvPr id="6" name="Нижний колонтитул 5">
+            <a:extLst>
+              <a:ext uri="{FF2B5EF4-FFF2-40B4-BE49-F238E27FC236}">
+                <a16:creationId xmlns:a16="http://schemas.microsoft.com/office/drawing/2014/main" id="{C06260B4-B52D-8512-75DC-BDE7896B89BD}"/>
+              </a:ext>
+            </a:extLst>
+          </p:cNvPr>
           <p:cNvSpPr>
             <a:spLocks noGrp="1"/>
           </p:cNvSpPr>
@@ -3871,13 +4033,19 @@
           <a:bodyPr/>
           <a:lstStyle/>
           <a:p>
-            <a:endParaRPr lang="en-US"/>
-          </a:p>
-        </p:txBody>
-      </p:sp>
-      <p:sp>
-        <p:nvSpPr>
-          <p:cNvPr id="7" name="Slide Number Placeholder 6"/>
+            <a:endParaRPr lang="ru-RU"/>
+          </a:p>
+        </p:txBody>
+      </p:sp>
+      <p:sp>
+        <p:nvSpPr>
+          <p:cNvPr id="7" name="Номер слайда 6">
+            <a:extLst>
+              <a:ext uri="{FF2B5EF4-FFF2-40B4-BE49-F238E27FC236}">
+                <a16:creationId xmlns:a16="http://schemas.microsoft.com/office/drawing/2014/main" id="{614D5E31-7007-3548-70C2-9C2E48BA5E20}"/>
+              </a:ext>
+            </a:extLst>
+          </p:cNvPr>
           <p:cNvSpPr>
             <a:spLocks noGrp="1"/>
           </p:cNvSpPr>
@@ -3890,18 +4058,18 @@
           <a:bodyPr/>
           <a:lstStyle/>
           <a:p>
-            <a:fld id="{C1FF6DA9-008F-8B48-92A6-B652298478BF}" type="slidenum">
-              <a:rPr lang="en-US" smtClean="0"/>
+            <a:fld id="{91757437-5F8E-3041-A851-F94714F6C6A0}" type="slidenum">
+              <a:rPr lang="ru-RU" smtClean="0"/>
               <a:t>‹#›</a:t>
             </a:fld>
-            <a:endParaRPr lang="en-US"/>
+            <a:endParaRPr lang="ru-RU"/>
           </a:p>
         </p:txBody>
       </p:sp>
     </p:spTree>
     <p:extLst>
       <p:ext uri="{BB962C8B-B14F-4D97-AF65-F5344CB8AC3E}">
-        <p14:creationId xmlns:p14="http://schemas.microsoft.com/office/powerpoint/2010/main" val="3889236939"/>
+        <p14:creationId xmlns:p14="http://schemas.microsoft.com/office/powerpoint/2010/main" val="2080244226"/>
       </p:ext>
     </p:extLst>
   </p:cSld>
@@ -3933,9 +4101,45 @@
           <a:chExt cx="0" cy="0"/>
         </a:xfrm>
       </p:grpSpPr>
-      <p:sp>
-        <p:nvSpPr>
-          <p:cNvPr id="2" name="Title Placeholder 1"/>
+      <p:pic>
+        <p:nvPicPr>
+          <p:cNvPr id="7" name="Рисунок 6">
+            <a:extLst>
+              <a:ext uri="{FF2B5EF4-FFF2-40B4-BE49-F238E27FC236}">
+                <a16:creationId xmlns:a16="http://schemas.microsoft.com/office/drawing/2014/main" id="{5616418B-5303-A72D-F818-B86317F0F72E}"/>
+              </a:ext>
+            </a:extLst>
+          </p:cNvPr>
+          <p:cNvPicPr>
+            <a:picLocks noChangeAspect="1"/>
+          </p:cNvPicPr>
+          <p:nvPr userDrawn="1"/>
+        </p:nvPicPr>
+        <p:blipFill>
+          <a:blip r:embed="rId13"/>
+          <a:stretch>
+            <a:fillRect/>
+          </a:stretch>
+        </p:blipFill>
+        <p:spPr>
+          <a:xfrm>
+            <a:off x="0" y="0"/>
+            <a:ext cx="12192000" cy="6858000"/>
+          </a:xfrm>
+          <a:prstGeom prst="rect">
+            <a:avLst/>
+          </a:prstGeom>
+        </p:spPr>
+      </p:pic>
+      <p:sp>
+        <p:nvSpPr>
+          <p:cNvPr id="2" name="Заголовок 1">
+            <a:extLst>
+              <a:ext uri="{FF2B5EF4-FFF2-40B4-BE49-F238E27FC236}">
+                <a16:creationId xmlns:a16="http://schemas.microsoft.com/office/drawing/2014/main" id="{67ED0000-ADF5-84E8-D201-3D7C5559D149}"/>
+              </a:ext>
+            </a:extLst>
+          </p:cNvPr>
           <p:cNvSpPr>
             <a:spLocks noGrp="1"/>
           </p:cNvSpPr>
@@ -3945,8 +4149,8 @@
         </p:nvSpPr>
         <p:spPr>
           <a:xfrm>
-            <a:off x="457200" y="274638"/>
-            <a:ext cx="8229600" cy="1143000"/>
+            <a:off x="838200" y="1060174"/>
+            <a:ext cx="10515600" cy="630514"/>
           </a:xfrm>
           <a:prstGeom prst="rect">
             <a:avLst/>
@@ -3959,16 +4163,21 @@
           <a:lstStyle/>
           <a:p>
             <a:r>
-              <a:rPr lang="en-US" smtClean="0"/>
-              <a:t>Click to edit Master title style</a:t>
-            </a:r>
-            <a:endParaRPr lang="en-US"/>
-          </a:p>
-        </p:txBody>
-      </p:sp>
-      <p:sp>
-        <p:nvSpPr>
-          <p:cNvPr id="3" name="Text Placeholder 2"/>
+              <a:rPr lang="ru-RU" dirty="0"/>
+              <a:t>Образец заголовка</a:t>
+            </a:r>
+          </a:p>
+        </p:txBody>
+      </p:sp>
+      <p:sp>
+        <p:nvSpPr>
+          <p:cNvPr id="3" name="Текст 2">
+            <a:extLst>
+              <a:ext uri="{FF2B5EF4-FFF2-40B4-BE49-F238E27FC236}">
+                <a16:creationId xmlns:a16="http://schemas.microsoft.com/office/drawing/2014/main" id="{08F29A3F-B394-DBD4-C232-DB8C6B7932A2}"/>
+              </a:ext>
+            </a:extLst>
+          </p:cNvPr>
           <p:cNvSpPr>
             <a:spLocks noGrp="1"/>
           </p:cNvSpPr>
@@ -3978,8 +4187,8 @@
         </p:nvSpPr>
         <p:spPr>
           <a:xfrm>
-            <a:off x="457200" y="1600200"/>
-            <a:ext cx="8229600" cy="4525963"/>
+            <a:off x="838200" y="1825625"/>
+            <a:ext cx="10515600" cy="4351338"/>
           </a:xfrm>
           <a:prstGeom prst="rect">
             <a:avLst/>
@@ -3993,44 +4202,49 @@
           <a:p>
             <a:pPr lvl="0"/>
             <a:r>
-              <a:rPr lang="en-US" smtClean="0"/>
-              <a:t>Click to edit Master text styles</a:t>
+              <a:rPr lang="ru-RU"/>
+              <a:t>Образец текста</a:t>
             </a:r>
           </a:p>
           <a:p>
             <a:pPr lvl="1"/>
             <a:r>
-              <a:rPr lang="en-US" smtClean="0"/>
-              <a:t>Second level</a:t>
+              <a:rPr lang="ru-RU"/>
+              <a:t>Второй уровень</a:t>
             </a:r>
           </a:p>
           <a:p>
             <a:pPr lvl="2"/>
             <a:r>
-              <a:rPr lang="en-US" smtClean="0"/>
-              <a:t>Third level</a:t>
+              <a:rPr lang="ru-RU"/>
+              <a:t>Третий уровень</a:t>
             </a:r>
           </a:p>
           <a:p>
             <a:pPr lvl="3"/>
             <a:r>
-              <a:rPr lang="en-US" smtClean="0"/>
-              <a:t>Fourth level</a:t>
+              <a:rPr lang="ru-RU"/>
+              <a:t>Четвертый уровень</a:t>
             </a:r>
           </a:p>
           <a:p>
             <a:pPr lvl="4"/>
             <a:r>
-              <a:rPr lang="en-US" smtClean="0"/>
-              <a:t>Fifth level</a:t>
-            </a:r>
-            <a:endParaRPr lang="en-US"/>
-          </a:p>
-        </p:txBody>
-      </p:sp>
-      <p:sp>
-        <p:nvSpPr>
-          <p:cNvPr id="4" name="Date Placeholder 3"/>
+              <a:rPr lang="ru-RU"/>
+              <a:t>Пятый уровень</a:t>
+            </a:r>
+          </a:p>
+        </p:txBody>
+      </p:sp>
+      <p:sp>
+        <p:nvSpPr>
+          <p:cNvPr id="4" name="Дата 3">
+            <a:extLst>
+              <a:ext uri="{FF2B5EF4-FFF2-40B4-BE49-F238E27FC236}">
+                <a16:creationId xmlns:a16="http://schemas.microsoft.com/office/drawing/2014/main" id="{C8711584-FB8C-0949-6F50-DE01CE597E96}"/>
+              </a:ext>
+            </a:extLst>
+          </p:cNvPr>
           <p:cNvSpPr>
             <a:spLocks noGrp="1"/>
           </p:cNvSpPr>
@@ -4040,8 +4254,8 @@
         </p:nvSpPr>
         <p:spPr>
           <a:xfrm>
-            <a:off x="457200" y="6356350"/>
-            <a:ext cx="2133600" cy="365125"/>
+            <a:off x="838200" y="6356350"/>
+            <a:ext cx="2743200" cy="365125"/>
           </a:xfrm>
           <a:prstGeom prst="rect">
             <a:avLst/>
@@ -4061,17 +4275,23 @@
             </a:lvl1pPr>
           </a:lstStyle>
           <a:p>
-            <a:fld id="{5BCAD085-E8A6-8845-BD4E-CB4CCA059FC4}" type="datetimeFigureOut">
-              <a:rPr lang="en-US" smtClean="0"/>
-              <a:t>1/27/13</a:t>
+            <a:fld id="{207A8441-1D27-874E-A0C6-3CD416A85B54}" type="datetimeFigureOut">
+              <a:rPr lang="ru-RU" smtClean="0"/>
+              <a:t>21.08.2026</a:t>
             </a:fld>
-            <a:endParaRPr lang="en-US"/>
-          </a:p>
-        </p:txBody>
-      </p:sp>
-      <p:sp>
-        <p:nvSpPr>
-          <p:cNvPr id="5" name="Footer Placeholder 4"/>
+            <a:endParaRPr lang="ru-RU"/>
+          </a:p>
+        </p:txBody>
+      </p:sp>
+      <p:sp>
+        <p:nvSpPr>
+          <p:cNvPr id="5" name="Нижний колонтитул 4">
+            <a:extLst>
+              <a:ext uri="{FF2B5EF4-FFF2-40B4-BE49-F238E27FC236}">
+                <a16:creationId xmlns:a16="http://schemas.microsoft.com/office/drawing/2014/main" id="{9EA0594E-DE67-716C-13C2-3B7AB361EBB4}"/>
+              </a:ext>
+            </a:extLst>
+          </p:cNvPr>
           <p:cNvSpPr>
             <a:spLocks noGrp="1"/>
           </p:cNvSpPr>
@@ -4081,8 +4301,8 @@
         </p:nvSpPr>
         <p:spPr>
           <a:xfrm>
-            <a:off x="3124200" y="6356350"/>
-            <a:ext cx="2895600" cy="365125"/>
+            <a:off x="4038600" y="6356350"/>
+            <a:ext cx="4114800" cy="365125"/>
           </a:xfrm>
           <a:prstGeom prst="rect">
             <a:avLst/>
@@ -4102,13 +4322,19 @@
             </a:lvl1pPr>
           </a:lstStyle>
           <a:p>
-            <a:endParaRPr lang="en-US"/>
-          </a:p>
-        </p:txBody>
-      </p:sp>
-      <p:sp>
-        <p:nvSpPr>
-          <p:cNvPr id="6" name="Slide Number Placeholder 5"/>
+            <a:endParaRPr lang="ru-RU"/>
+          </a:p>
+        </p:txBody>
+      </p:sp>
+      <p:sp>
+        <p:nvSpPr>
+          <p:cNvPr id="6" name="Номер слайда 5">
+            <a:extLst>
+              <a:ext uri="{FF2B5EF4-FFF2-40B4-BE49-F238E27FC236}">
+                <a16:creationId xmlns:a16="http://schemas.microsoft.com/office/drawing/2014/main" id="{76E20E65-5954-EE58-8538-C9AA7C8CE497}"/>
+              </a:ext>
+            </a:extLst>
+          </p:cNvPr>
           <p:cNvSpPr>
             <a:spLocks noGrp="1"/>
           </p:cNvSpPr>
@@ -4118,8 +4344,8 @@
         </p:nvSpPr>
         <p:spPr>
           <a:xfrm>
-            <a:off x="6553200" y="6356350"/>
-            <a:ext cx="2133600" cy="365125"/>
+            <a:off x="8610600" y="6356350"/>
+            <a:ext cx="2743200" cy="365125"/>
           </a:xfrm>
           <a:prstGeom prst="rect">
             <a:avLst/>
@@ -4139,18 +4365,18 @@
             </a:lvl1pPr>
           </a:lstStyle>
           <a:p>
-            <a:fld id="{C1FF6DA9-008F-8B48-92A6-B652298478BF}" type="slidenum">
-              <a:rPr lang="en-US" smtClean="0"/>
+            <a:fld id="{91757437-5F8E-3041-A851-F94714F6C6A0}" type="slidenum">
+              <a:rPr lang="ru-RU" smtClean="0"/>
               <a:t>‹#›</a:t>
             </a:fld>
-            <a:endParaRPr lang="en-US"/>
+            <a:endParaRPr lang="ru-RU"/>
           </a:p>
         </p:txBody>
       </p:sp>
     </p:spTree>
     <p:extLst>
       <p:ext uri="{BB962C8B-B14F-4D97-AF65-F5344CB8AC3E}">
-        <p14:creationId xmlns:p14="http://schemas.microsoft.com/office/powerpoint/2010/main" val="2209977519"/>
+        <p14:creationId xmlns:p14="http://schemas.microsoft.com/office/powerpoint/2010/main" val="2978361392"/>
       </p:ext>
     </p:extLst>
   </p:cSld>
@@ -4170,7 +4396,10 @@
   </p:sldLayoutIdLst>
   <p:txStyles>
     <p:titleStyle>
-      <a:lvl1pPr algn="ctr" defTabSz="457200" rtl="0" eaLnBrk="1" latinLnBrk="0" hangingPunct="1">
+      <a:lvl1pPr algn="l" defTabSz="914400" rtl="0" eaLnBrk="1" latinLnBrk="0" hangingPunct="1">
+        <a:lnSpc>
+          <a:spcPct val="90000"/>
+        </a:lnSpc>
         <a:spcBef>
           <a:spcPct val="0"/>
         </a:spcBef>
@@ -4186,13 +4415,16 @@
       </a:lvl1pPr>
     </p:titleStyle>
     <p:bodyStyle>
-      <a:lvl1pPr marL="342900" indent="-342900" algn="l" defTabSz="457200" rtl="0" eaLnBrk="1" latinLnBrk="0" hangingPunct="1">
+      <a:lvl1pPr marL="228600" indent="-228600" algn="l" defTabSz="914400" rtl="0" eaLnBrk="1" latinLnBrk="0" hangingPunct="1">
+        <a:lnSpc>
+          <a:spcPct val="90000"/>
+        </a:lnSpc>
         <a:spcBef>
-          <a:spcPct val="20000"/>
+          <a:spcPts val="1000"/>
         </a:spcBef>
-        <a:buFont typeface="Arial"/>
+        <a:buFont typeface="Arial" panose="020B0604020202020204" pitchFamily="34" charset="0"/>
         <a:buChar char="•"/>
-        <a:defRPr sz="3200" kern="1200">
+        <a:defRPr sz="2800" kern="1200">
           <a:solidFill>
             <a:schemeClr val="tx1"/>
           </a:solidFill>
@@ -4201,26 +4433,14 @@
           <a:cs typeface="+mn-cs"/>
         </a:defRPr>
       </a:lvl1pPr>
-      <a:lvl2pPr marL="742950" indent="-285750" algn="l" defTabSz="457200" rtl="0" eaLnBrk="1" latinLnBrk="0" hangingPunct="1">
+      <a:lvl2pPr marL="685800" indent="-228600" algn="l" defTabSz="914400" rtl="0" eaLnBrk="1" latinLnBrk="0" hangingPunct="1">
+        <a:lnSpc>
+          <a:spcPct val="90000"/>
+        </a:lnSpc>
         <a:spcBef>
-          <a:spcPct val="20000"/>
+          <a:spcPts val="500"/>
         </a:spcBef>
-        <a:buFont typeface="Arial"/>
-        <a:buChar char="–"/>
-        <a:defRPr sz="2800" kern="1200">
-          <a:solidFill>
-            <a:schemeClr val="tx1"/>
-          </a:solidFill>
-          <a:latin typeface="+mn-lt"/>
-          <a:ea typeface="+mn-ea"/>
-          <a:cs typeface="+mn-cs"/>
-        </a:defRPr>
-      </a:lvl2pPr>
-      <a:lvl3pPr marL="1143000" indent="-228600" algn="l" defTabSz="457200" rtl="0" eaLnBrk="1" latinLnBrk="0" hangingPunct="1">
-        <a:spcBef>
-          <a:spcPct val="20000"/>
-        </a:spcBef>
-        <a:buFont typeface="Arial"/>
+        <a:buFont typeface="Arial" panose="020B0604020202020204" pitchFamily="34" charset="0"/>
         <a:buChar char="•"/>
         <a:defRPr sz="2400" kern="1200">
           <a:solidFill>
@@ -4230,42 +4450,15 @@
           <a:ea typeface="+mn-ea"/>
           <a:cs typeface="+mn-cs"/>
         </a:defRPr>
-      </a:lvl3pPr>
-      <a:lvl4pPr marL="1600200" indent="-228600" algn="l" defTabSz="457200" rtl="0" eaLnBrk="1" latinLnBrk="0" hangingPunct="1">
+      </a:lvl2pPr>
+      <a:lvl3pPr marL="1143000" indent="-228600" algn="l" defTabSz="914400" rtl="0" eaLnBrk="1" latinLnBrk="0" hangingPunct="1">
+        <a:lnSpc>
+          <a:spcPct val="90000"/>
+        </a:lnSpc>
         <a:spcBef>
-          <a:spcPct val="20000"/>
+          <a:spcPts val="500"/>
         </a:spcBef>
-        <a:buFont typeface="Arial"/>
-        <a:buChar char="–"/>
-        <a:defRPr sz="2000" kern="1200">
-          <a:solidFill>
-            <a:schemeClr val="tx1"/>
-          </a:solidFill>
-          <a:latin typeface="+mn-lt"/>
-          <a:ea typeface="+mn-ea"/>
-          <a:cs typeface="+mn-cs"/>
-        </a:defRPr>
-      </a:lvl4pPr>
-      <a:lvl5pPr marL="2057400" indent="-228600" algn="l" defTabSz="457200" rtl="0" eaLnBrk="1" latinLnBrk="0" hangingPunct="1">
-        <a:spcBef>
-          <a:spcPct val="20000"/>
-        </a:spcBef>
-        <a:buFont typeface="Arial"/>
-        <a:buChar char="»"/>
-        <a:defRPr sz="2000" kern="1200">
-          <a:solidFill>
-            <a:schemeClr val="tx1"/>
-          </a:solidFill>
-          <a:latin typeface="+mn-lt"/>
-          <a:ea typeface="+mn-ea"/>
-          <a:cs typeface="+mn-cs"/>
-        </a:defRPr>
-      </a:lvl5pPr>
-      <a:lvl6pPr marL="2514600" indent="-228600" algn="l" defTabSz="457200" rtl="0" eaLnBrk="1" latinLnBrk="0" hangingPunct="1">
-        <a:spcBef>
-          <a:spcPct val="20000"/>
-        </a:spcBef>
-        <a:buFont typeface="Arial"/>
+        <a:buFont typeface="Arial" panose="020B0604020202020204" pitchFamily="34" charset="0"/>
         <a:buChar char="•"/>
         <a:defRPr sz="2000" kern="1200">
           <a:solidFill>
@@ -4275,14 +4468,71 @@
           <a:ea typeface="+mn-ea"/>
           <a:cs typeface="+mn-cs"/>
         </a:defRPr>
+      </a:lvl3pPr>
+      <a:lvl4pPr marL="1600200" indent="-228600" algn="l" defTabSz="914400" rtl="0" eaLnBrk="1" latinLnBrk="0" hangingPunct="1">
+        <a:lnSpc>
+          <a:spcPct val="90000"/>
+        </a:lnSpc>
+        <a:spcBef>
+          <a:spcPts val="500"/>
+        </a:spcBef>
+        <a:buFont typeface="Arial" panose="020B0604020202020204" pitchFamily="34" charset="0"/>
+        <a:buChar char="•"/>
+        <a:defRPr sz="1800" kern="1200">
+          <a:solidFill>
+            <a:schemeClr val="tx1"/>
+          </a:solidFill>
+          <a:latin typeface="+mn-lt"/>
+          <a:ea typeface="+mn-ea"/>
+          <a:cs typeface="+mn-cs"/>
+        </a:defRPr>
+      </a:lvl4pPr>
+      <a:lvl5pPr marL="2057400" indent="-228600" algn="l" defTabSz="914400" rtl="0" eaLnBrk="1" latinLnBrk="0" hangingPunct="1">
+        <a:lnSpc>
+          <a:spcPct val="90000"/>
+        </a:lnSpc>
+        <a:spcBef>
+          <a:spcPts val="500"/>
+        </a:spcBef>
+        <a:buFont typeface="Arial" panose="020B0604020202020204" pitchFamily="34" charset="0"/>
+        <a:buChar char="•"/>
+        <a:defRPr sz="1800" kern="1200">
+          <a:solidFill>
+            <a:schemeClr val="tx1"/>
+          </a:solidFill>
+          <a:latin typeface="+mn-lt"/>
+          <a:ea typeface="+mn-ea"/>
+          <a:cs typeface="+mn-cs"/>
+        </a:defRPr>
+      </a:lvl5pPr>
+      <a:lvl6pPr marL="2514600" indent="-228600" algn="l" defTabSz="914400" rtl="0" eaLnBrk="1" latinLnBrk="0" hangingPunct="1">
+        <a:lnSpc>
+          <a:spcPct val="90000"/>
+        </a:lnSpc>
+        <a:spcBef>
+          <a:spcPts val="500"/>
+        </a:spcBef>
+        <a:buFont typeface="Arial" panose="020B0604020202020204" pitchFamily="34" charset="0"/>
+        <a:buChar char="•"/>
+        <a:defRPr sz="1800" kern="1200">
+          <a:solidFill>
+            <a:schemeClr val="tx1"/>
+          </a:solidFill>
+          <a:latin typeface="+mn-lt"/>
+          <a:ea typeface="+mn-ea"/>
+          <a:cs typeface="+mn-cs"/>
+        </a:defRPr>
       </a:lvl6pPr>
-      <a:lvl7pPr marL="2971800" indent="-228600" algn="l" defTabSz="457200" rtl="0" eaLnBrk="1" latinLnBrk="0" hangingPunct="1">
+      <a:lvl7pPr marL="2971800" indent="-228600" algn="l" defTabSz="914400" rtl="0" eaLnBrk="1" latinLnBrk="0" hangingPunct="1">
+        <a:lnSpc>
+          <a:spcPct val="90000"/>
+        </a:lnSpc>
         <a:spcBef>
-          <a:spcPct val="20000"/>
+          <a:spcPts val="500"/>
         </a:spcBef>
-        <a:buFont typeface="Arial"/>
+        <a:buFont typeface="Arial" panose="020B0604020202020204" pitchFamily="34" charset="0"/>
         <a:buChar char="•"/>
-        <a:defRPr sz="2000" kern="1200">
+        <a:defRPr sz="1800" kern="1200">
           <a:solidFill>
             <a:schemeClr val="tx1"/>
           </a:solidFill>
@@ -4291,13 +4541,16 @@
           <a:cs typeface="+mn-cs"/>
         </a:defRPr>
       </a:lvl7pPr>
-      <a:lvl8pPr marL="3429000" indent="-228600" algn="l" defTabSz="457200" rtl="0" eaLnBrk="1" latinLnBrk="0" hangingPunct="1">
+      <a:lvl8pPr marL="3429000" indent="-228600" algn="l" defTabSz="914400" rtl="0" eaLnBrk="1" latinLnBrk="0" hangingPunct="1">
+        <a:lnSpc>
+          <a:spcPct val="90000"/>
+        </a:lnSpc>
         <a:spcBef>
-          <a:spcPct val="20000"/>
+          <a:spcPts val="500"/>
         </a:spcBef>
-        <a:buFont typeface="Arial"/>
+        <a:buFont typeface="Arial" panose="020B0604020202020204" pitchFamily="34" charset="0"/>
         <a:buChar char="•"/>
-        <a:defRPr sz="2000" kern="1200">
+        <a:defRPr sz="1800" kern="1200">
           <a:solidFill>
             <a:schemeClr val="tx1"/>
           </a:solidFill>
@@ -4306,13 +4559,16 @@
           <a:cs typeface="+mn-cs"/>
         </a:defRPr>
       </a:lvl8pPr>
-      <a:lvl9pPr marL="3886200" indent="-228600" algn="l" defTabSz="457200" rtl="0" eaLnBrk="1" latinLnBrk="0" hangingPunct="1">
+      <a:lvl9pPr marL="3886200" indent="-228600" algn="l" defTabSz="914400" rtl="0" eaLnBrk="1" latinLnBrk="0" hangingPunct="1">
+        <a:lnSpc>
+          <a:spcPct val="90000"/>
+        </a:lnSpc>
         <a:spcBef>
-          <a:spcPct val="20000"/>
+          <a:spcPts val="500"/>
         </a:spcBef>
-        <a:buFont typeface="Arial"/>
+        <a:buFont typeface="Arial" panose="020B0604020202020204" pitchFamily="34" charset="0"/>
         <a:buChar char="•"/>
-        <a:defRPr sz="2000" kern="1200">
+        <a:defRPr sz="1800" kern="1200">
           <a:solidFill>
             <a:schemeClr val="tx1"/>
           </a:solidFill>
@@ -4324,9 +4580,9 @@
     </p:bodyStyle>
     <p:otherStyle>
       <a:defPPr>
-        <a:defRPr lang="en-US"/>
+        <a:defRPr lang="ru-RU"/>
       </a:defPPr>
-      <a:lvl1pPr marL="0" algn="l" defTabSz="457200" rtl="0" eaLnBrk="1" latinLnBrk="0" hangingPunct="1">
+      <a:lvl1pPr marL="0" algn="l" defTabSz="914400" rtl="0" eaLnBrk="1" latinLnBrk="0" hangingPunct="1">
         <a:defRPr sz="1800" kern="1200">
           <a:solidFill>
             <a:schemeClr val="tx1"/>
@@ -4336,7 +4592,7 @@
           <a:cs typeface="+mn-cs"/>
         </a:defRPr>
       </a:lvl1pPr>
-      <a:lvl2pPr marL="457200" algn="l" defTabSz="457200" rtl="0" eaLnBrk="1" latinLnBrk="0" hangingPunct="1">
+      <a:lvl2pPr marL="457200" algn="l" defTabSz="914400" rtl="0" eaLnBrk="1" latinLnBrk="0" hangingPunct="1">
         <a:defRPr sz="1800" kern="1200">
           <a:solidFill>
             <a:schemeClr val="tx1"/>
@@ -4346,7 +4602,7 @@
           <a:cs typeface="+mn-cs"/>
         </a:defRPr>
       </a:lvl2pPr>
-      <a:lvl3pPr marL="914400" algn="l" defTabSz="457200" rtl="0" eaLnBrk="1" latinLnBrk="0" hangingPunct="1">
+      <a:lvl3pPr marL="914400" algn="l" defTabSz="914400" rtl="0" eaLnBrk="1" latinLnBrk="0" hangingPunct="1">
         <a:defRPr sz="1800" kern="1200">
           <a:solidFill>
             <a:schemeClr val="tx1"/>
@@ -4356,7 +4612,7 @@
           <a:cs typeface="+mn-cs"/>
         </a:defRPr>
       </a:lvl3pPr>
-      <a:lvl4pPr marL="1371600" algn="l" defTabSz="457200" rtl="0" eaLnBrk="1" latinLnBrk="0" hangingPunct="1">
+      <a:lvl4pPr marL="1371600" algn="l" defTabSz="914400" rtl="0" eaLnBrk="1" latinLnBrk="0" hangingPunct="1">
         <a:defRPr sz="1800" kern="1200">
           <a:solidFill>
             <a:schemeClr val="tx1"/>
@@ -4366,7 +4622,7 @@
           <a:cs typeface="+mn-cs"/>
         </a:defRPr>
       </a:lvl4pPr>
-      <a:lvl5pPr marL="1828800" algn="l" defTabSz="457200" rtl="0" eaLnBrk="1" latinLnBrk="0" hangingPunct="1">
+      <a:lvl5pPr marL="1828800" algn="l" defTabSz="914400" rtl="0" eaLnBrk="1" latinLnBrk="0" hangingPunct="1">
         <a:defRPr sz="1800" kern="1200">
           <a:solidFill>
             <a:schemeClr val="tx1"/>
@@ -4376,7 +4632,7 @@
           <a:cs typeface="+mn-cs"/>
         </a:defRPr>
       </a:lvl5pPr>
-      <a:lvl6pPr marL="2286000" algn="l" defTabSz="457200" rtl="0" eaLnBrk="1" latinLnBrk="0" hangingPunct="1">
+      <a:lvl6pPr marL="2286000" algn="l" defTabSz="914400" rtl="0" eaLnBrk="1" latinLnBrk="0" hangingPunct="1">
         <a:defRPr sz="1800" kern="1200">
           <a:solidFill>
             <a:schemeClr val="tx1"/>
@@ -4386,7 +4642,7 @@
           <a:cs typeface="+mn-cs"/>
         </a:defRPr>
       </a:lvl6pPr>
-      <a:lvl7pPr marL="2743200" algn="l" defTabSz="457200" rtl="0" eaLnBrk="1" latinLnBrk="0" hangingPunct="1">
+      <a:lvl7pPr marL="2743200" algn="l" defTabSz="914400" rtl="0" eaLnBrk="1" latinLnBrk="0" hangingPunct="1">
         <a:defRPr sz="1800" kern="1200">
           <a:solidFill>
             <a:schemeClr val="tx1"/>
@@ -4396,7 +4652,7 @@
           <a:cs typeface="+mn-cs"/>
         </a:defRPr>
       </a:lvl7pPr>
-      <a:lvl8pPr marL="3200400" algn="l" defTabSz="457200" rtl="0" eaLnBrk="1" latinLnBrk="0" hangingPunct="1">
+      <a:lvl8pPr marL="3200400" algn="l" defTabSz="914400" rtl="0" eaLnBrk="1" latinLnBrk="0" hangingPunct="1">
         <a:defRPr sz="1800" kern="1200">
           <a:solidFill>
             <a:schemeClr val="tx1"/>
@@ -4406,7 +4662,7 @@
           <a:cs typeface="+mn-cs"/>
         </a:defRPr>
       </a:lvl8pPr>
-      <a:lvl9pPr marL="3657600" algn="l" defTabSz="457200" rtl="0" eaLnBrk="1" latinLnBrk="0" hangingPunct="1">
+      <a:lvl9pPr marL="3657600" algn="l" defTabSz="914400" rtl="0" eaLnBrk="1" latinLnBrk="0" hangingPunct="1">
         <a:defRPr sz="1800" kern="1200">
           <a:solidFill>
             <a:schemeClr val="tx1"/>
@@ -4424,14 +4680,6 @@
 <file path=ppt/slides/slide1.xml><?xml version="1.0" encoding="utf-8"?>
 <p:sld xmlns:a="http://schemas.openxmlformats.org/drawingml/2006/main" xmlns:p="http://schemas.openxmlformats.org/presentationml/2006/main" xmlns:r="http://schemas.openxmlformats.org/officeDocument/2006/relationships">
   <p:cSld>
-    <p:bg>
-      <p:bgPr>
-        <a:solidFill>
-          <a:srgbClr val="FFFFFF"/>
-        </a:solidFill>
-        <a:effectLst/>
-      </p:bgPr>
-    </p:bg>
     <p:spTree>
       <p:nvGrpSpPr>
         <p:cNvPr id="1" name=""/>
@@ -4441,7 +4689,7 @@
       <p:grpSpPr/>
       <p:pic>
         <p:nvPicPr>
-          <p:cNvPr id="2" name="Picture 1" descr="cover_autumn.jpg"/>
+          <p:cNvPr id="3" name="Picture 2" descr="cover_autumn.jpg"/>
           <p:cNvPicPr>
             <a:picLocks noChangeAspect="1"/>
           </p:cNvPicPr>
@@ -4449,15 +4697,15 @@
         </p:nvPicPr>
         <p:blipFill>
           <a:blip r:embed="rId2"/>
-          <a:srcRect t="25" b="25"/>
+          <a:srcRect t="8021" b="8021"/>
           <a:stretch>
             <a:fillRect/>
           </a:stretch>
         </p:blipFill>
         <p:spPr>
           <a:xfrm>
-            <a:off x="0" y="0"/>
-            <a:ext cx="12191695" cy="6858000"/>
+            <a:off x="0" y="1097280"/>
+            <a:ext cx="12191695" cy="5760720"/>
           </a:xfrm>
           <a:prstGeom prst="rect">
             <a:avLst/>
@@ -4466,14 +4714,14 @@
       </p:pic>
       <p:sp>
         <p:nvSpPr>
-          <p:cNvPr id="3" name="Rectangle 2"/>
+          <p:cNvPr id="4" name="Rectangle 3"/>
           <p:cNvSpPr/>
           <p:nvPr/>
         </p:nvSpPr>
         <p:spPr>
           <a:xfrm>
-            <a:off x="0" y="0"/>
-            <a:ext cx="3383280" cy="1417320"/>
+            <a:off x="0" y="1097280"/>
+            <a:ext cx="3383280" cy="1325880"/>
           </a:xfrm>
           <a:prstGeom prst="rect">
             <a:avLst/>
@@ -4497,7 +4745,7 @@
       </p:sp>
       <p:pic>
         <p:nvPicPr>
-          <p:cNvPr id="4" name="Picture 3" descr="logo_dark.png"/>
+          <p:cNvPr id="5" name="Picture 4" descr="logo_dark.png"/>
           <p:cNvPicPr>
             <a:picLocks noChangeAspect="1"/>
           </p:cNvPicPr>
@@ -4511,7 +4759,7 @@
         </p:blipFill>
         <p:spPr>
           <a:xfrm>
-            <a:off x="411480" y="292608"/>
+            <a:off x="411480" y="1371600"/>
             <a:ext cx="2560320" cy="1000268"/>
           </a:xfrm>
           <a:prstGeom prst="rect">
@@ -4521,14 +4769,14 @@
       </p:pic>
       <p:sp>
         <p:nvSpPr>
-          <p:cNvPr id="5" name="Rectangle 4"/>
+          <p:cNvPr id="6" name="Rectangle 5"/>
           <p:cNvSpPr/>
           <p:nvPr/>
         </p:nvSpPr>
         <p:spPr>
           <a:xfrm>
-            <a:off x="3246120" y="2788920"/>
-            <a:ext cx="8945575" cy="4069080"/>
+            <a:off x="3246120" y="3154680"/>
+            <a:ext cx="8945575" cy="3703320"/>
           </a:xfrm>
           <a:prstGeom prst="rect">
             <a:avLst/>
@@ -4552,14 +4800,14 @@
       </p:sp>
       <p:sp>
         <p:nvSpPr>
-          <p:cNvPr id="6" name="Rectangle 5"/>
+          <p:cNvPr id="7" name="Rectangle 6"/>
           <p:cNvSpPr/>
           <p:nvPr/>
         </p:nvSpPr>
         <p:spPr>
           <a:xfrm>
-            <a:off x="3703320" y="3154680"/>
-            <a:ext cx="64008" cy="1691640"/>
+            <a:off x="3703320" y="3474720"/>
+            <a:ext cx="64008" cy="1188720"/>
           </a:xfrm>
           <a:prstGeom prst="rect">
             <a:avLst/>
@@ -4581,14 +4829,53 @@
       </p:sp>
       <p:sp>
         <p:nvSpPr>
-          <p:cNvPr id="7" name="TextBox 6"/>
+          <p:cNvPr id="2" name="Title 1"/>
+          <p:cNvSpPr>
+            <a:spLocks noGrp="1"/>
+          </p:cNvSpPr>
+          <p:nvPr>
+            <p:ph type="title"/>
+          </p:nvPr>
+        </p:nvSpPr>
+        <p:spPr>
+          <a:xfrm>
+            <a:off x="4023360" y="3429000"/>
+            <a:ext cx="7680960" cy="1143000"/>
+          </a:xfrm>
+        </p:spPr>
+        <p:txBody>
+          <a:bodyPr wrap="square" lIns="0" rIns="0" tIns="0" bIns="0" anchor="t">
+            <a:noAutofit/>
+          </a:bodyPr>
+          <a:lstStyle/>
+          <a:p>
+            <a:pPr algn="l">
+              <a:lnSpc>
+                <a:spcPct val="100000"/>
+              </a:lnSpc>
+            </a:pPr>
+            <a:r>
+              <a:rPr sz="2400" b="1">
+                <a:solidFill>
+                  <a:srgbClr val="FFFFFF"/>
+                </a:solidFill>
+                <a:latin typeface="Gilroy"/>
+              </a:rPr>
+              <a:t>СИСТЕМНЫЙ ПОДХОД К ПРИВЛЕЧЕНИЮ КЛИЕНТОВ В ПОСЁЛОК БЕЗ МАРКЕТИНГОВОГО БЮДЖЕТА</a:t>
+            </a:r>
+          </a:p>
+        </p:txBody>
+      </p:sp>
+      <p:sp>
+        <p:nvSpPr>
+          <p:cNvPr id="8" name="TextBox 7"/>
           <p:cNvSpPr txBox="1"/>
           <p:nvPr/>
         </p:nvSpPr>
         <p:spPr>
           <a:xfrm>
-            <a:off x="4023360" y="3108960"/>
-            <a:ext cx="7680960" cy="1371600"/>
+            <a:off x="4023360" y="4846320"/>
+            <a:ext cx="7680960" cy="594360"/>
           </a:xfrm>
           <a:prstGeom prst="rect">
             <a:avLst/>
@@ -4603,34 +4890,34 @@
           <a:p>
             <a:pPr algn="l">
               <a:lnSpc>
-                <a:spcPct val="100000"/>
+                <a:spcPct val="110000"/>
               </a:lnSpc>
               <a:spcAft>
                 <a:spcPts val="0"/>
               </a:spcAft>
             </a:pPr>
             <a:r>
-              <a:rPr sz="2700" b="1" i="0">
+              <a:rPr sz="1500" b="0" i="0">
                 <a:solidFill>
                   <a:srgbClr val="FFFFFF"/>
                 </a:solidFill>
                 <a:latin typeface="Gilroy"/>
               </a:rPr>
-              <a:t>СИСТЕМНЫЙ ПОДХОД К ПРИВЛЕЧЕНИЮ КЛИЕНТОВ В ПОСЁЛОК БЕЗ МАРКЕТИНГОВОГО БЮДЖЕТА</a:t>
-            </a:r>
-          </a:p>
-        </p:txBody>
-      </p:sp>
-      <p:sp>
-        <p:nvSpPr>
-          <p:cNvPr id="8" name="TextBox 7"/>
+              <a:t>Система из трёх каналов: UGC-контент • агенты влияния • партнёрский трафик</a:t>
+            </a:r>
+          </a:p>
+        </p:txBody>
+      </p:sp>
+      <p:sp>
+        <p:nvSpPr>
+          <p:cNvPr id="9" name="TextBox 8"/>
           <p:cNvSpPr txBox="1"/>
           <p:nvPr/>
         </p:nvSpPr>
         <p:spPr>
           <a:xfrm>
-            <a:off x="4023360" y="4572000"/>
-            <a:ext cx="7680960" cy="685800"/>
+            <a:off x="3703320" y="5760720"/>
+            <a:ext cx="4754880" cy="822960"/>
           </a:xfrm>
           <a:prstGeom prst="rect">
             <a:avLst/>
@@ -4645,45 +4932,22 @@
           <a:p>
             <a:pPr algn="l">
               <a:lnSpc>
-                <a:spcPct val="110000"/>
+                <a:spcPct val="115000"/>
               </a:lnSpc>
               <a:spcAft>
                 <a:spcPts val="0"/>
               </a:spcAft>
             </a:pPr>
             <a:r>
-              <a:rPr sz="1500" b="0" i="0">
+              <a:rPr sz="1700" b="1" i="0">
                 <a:solidFill>
                   <a:srgbClr val="FFFFFF"/>
                 </a:solidFill>
                 <a:latin typeface="Gilroy"/>
               </a:rPr>
-              <a:t>Система из трёх каналов: UGC-контент • агенты влияния • партнёрский трафик</a:t>
-            </a:r>
-          </a:p>
-        </p:txBody>
-      </p:sp>
-      <p:sp>
-        <p:nvSpPr>
-          <p:cNvPr id="9" name="TextBox 8"/>
-          <p:cNvSpPr txBox="1"/>
-          <p:nvPr/>
-        </p:nvSpPr>
-        <p:spPr>
-          <a:xfrm>
-            <a:off x="3703320" y="5440680"/>
-            <a:ext cx="4754880" cy="822960"/>
-          </a:xfrm>
-          <a:prstGeom prst="rect">
-            <a:avLst/>
-          </a:prstGeom>
-          <a:noFill/>
-        </p:spPr>
-        <p:txBody>
-          <a:bodyPr wrap="square" lIns="0" rIns="0" tIns="0" bIns="0" anchor="t">
-            <a:spAutoFit/>
-          </a:bodyPr>
-          <a:lstStyle/>
+              <a:t>ШКУРКО МАРИНА</a:t>
+            </a:r>
+          </a:p>
           <a:p>
             <a:pPr algn="l">
               <a:lnSpc>
@@ -4694,25 +4958,6 @@
               </a:spcAft>
             </a:pPr>
             <a:r>
-              <a:rPr sz="1700" b="1" i="0">
-                <a:solidFill>
-                  <a:srgbClr val="FFFFFF"/>
-                </a:solidFill>
-                <a:latin typeface="Gilroy"/>
-              </a:rPr>
-              <a:t>ШКУРКО МАРИНА</a:t>
-            </a:r>
-          </a:p>
-          <a:p>
-            <a:pPr algn="l">
-              <a:lnSpc>
-                <a:spcPct val="115000"/>
-              </a:lnSpc>
-              <a:spcAft>
-                <a:spcPts val="0"/>
-              </a:spcAft>
-            </a:pPr>
-            <a:r>
               <a:rPr sz="1250" b="0" i="0">
                 <a:solidFill>
                   <a:srgbClr val="FFFFFF"/>
@@ -4732,7 +4977,7 @@
         </p:nvSpPr>
         <p:spPr>
           <a:xfrm>
-            <a:off x="8321040" y="5440680"/>
+            <a:off x="8321040" y="5760720"/>
             <a:ext cx="3383280" cy="822960"/>
           </a:xfrm>
           <a:prstGeom prst="rect">
@@ -4777,14 +5022,6 @@
 <file path=ppt/slides/slide10.xml><?xml version="1.0" encoding="utf-8"?>
 <p:sld xmlns:a="http://schemas.openxmlformats.org/drawingml/2006/main" xmlns:p="http://schemas.openxmlformats.org/presentationml/2006/main" xmlns:r="http://schemas.openxmlformats.org/officeDocument/2006/relationships">
   <p:cSld>
-    <p:bg>
-      <p:bgPr>
-        <a:solidFill>
-          <a:srgbClr val="FFFFFF"/>
-        </a:solidFill>
-        <a:effectLst/>
-      </p:bgPr>
-    </p:bg>
     <p:spTree>
       <p:nvGrpSpPr>
         <p:cNvPr id="1" name=""/>
@@ -4794,14 +5031,14 @@
       <p:grpSpPr/>
       <p:sp>
         <p:nvSpPr>
-          <p:cNvPr id="2" name="Rectangle 1"/>
+          <p:cNvPr id="3" name="Rectangle 2"/>
           <p:cNvSpPr/>
           <p:nvPr/>
         </p:nvSpPr>
         <p:spPr>
           <a:xfrm>
-            <a:off x="0" y="0"/>
-            <a:ext cx="12191695" cy="1417320"/>
+            <a:off x="566928" y="1344168"/>
+            <a:ext cx="64008" cy="557784"/>
           </a:xfrm>
           <a:prstGeom prst="rect">
             <a:avLst/>
@@ -4823,30 +5060,40 @@
       </p:sp>
       <p:sp>
         <p:nvSpPr>
-          <p:cNvPr id="3" name="Rectangle 2"/>
-          <p:cNvSpPr/>
-          <p:nvPr/>
-        </p:nvSpPr>
-        <p:spPr>
-          <a:xfrm>
-            <a:off x="548640" y="365760"/>
-            <a:ext cx="64008" cy="731520"/>
-          </a:xfrm>
-          <a:prstGeom prst="rect">
-            <a:avLst/>
-          </a:prstGeom>
-          <a:solidFill>
-            <a:srgbClr val="FFFFFF"/>
-          </a:solidFill>
-          <a:ln>
-            <a:noFill/>
-          </a:ln>
-        </p:spPr>
-        <p:txBody>
-          <a:bodyPr rtlCol="0" anchor="ctr"/>
-          <a:lstStyle/>
-          <a:p>
-            <a:pPr algn="ctr"/>
+          <p:cNvPr id="2" name="Title 1"/>
+          <p:cNvSpPr>
+            <a:spLocks noGrp="1"/>
+          </p:cNvSpPr>
+          <p:nvPr>
+            <p:ph type="title"/>
+          </p:nvPr>
+        </p:nvSpPr>
+        <p:spPr>
+          <a:xfrm>
+            <a:off x="822960" y="1371600"/>
+            <a:ext cx="10515600" cy="502920"/>
+          </a:xfrm>
+        </p:spPr>
+        <p:txBody>
+          <a:bodyPr wrap="square" lIns="0" rIns="0" tIns="0" bIns="0" anchor="t">
+            <a:noAutofit/>
+          </a:bodyPr>
+          <a:lstStyle/>
+          <a:p>
+            <a:pPr algn="l">
+              <a:lnSpc>
+                <a:spcPct val="100000"/>
+              </a:lnSpc>
+            </a:pPr>
+            <a:r>
+              <a:rPr sz="3000" b="1">
+                <a:solidFill>
+                  <a:srgbClr val="1A1A1A"/>
+                </a:solidFill>
+                <a:latin typeface="Gilroy"/>
+              </a:rPr>
+              <a:t>РАБОТАЕМ КАК «СВОЙ ПАРЕНЬ» НА ТЕРРИТОРИИ</a:t>
+            </a:r>
           </a:p>
         </p:txBody>
       </p:sp>
@@ -4858,8 +5105,8 @@
         </p:nvSpPr>
         <p:spPr>
           <a:xfrm>
-            <a:off x="822960" y="274320"/>
-            <a:ext cx="10515600" cy="914400"/>
+            <a:off x="548640" y="2011680"/>
+            <a:ext cx="5120640" cy="320040"/>
           </a:xfrm>
           <a:prstGeom prst="rect">
             <a:avLst/>
@@ -4867,7 +5114,7 @@
           <a:noFill/>
         </p:spPr>
         <p:txBody>
-          <a:bodyPr wrap="square" lIns="0" rIns="0" tIns="0" bIns="0" anchor="ctr">
+          <a:bodyPr wrap="square" lIns="0" rIns="0" tIns="0" bIns="0" anchor="t">
             <a:spAutoFit/>
           </a:bodyPr>
           <a:lstStyle/>
@@ -4881,48 +5128,6 @@
               </a:spcAft>
             </a:pPr>
             <a:r>
-              <a:rPr sz="3000" b="1" i="0">
-                <a:solidFill>
-                  <a:srgbClr val="FFFFFF"/>
-                </a:solidFill>
-                <a:latin typeface="Gilroy"/>
-              </a:rPr>
-              <a:t>РАБОТАЕМ КАК «СВОЙ ПАРЕНЬ» НА ТЕРРИТОРИИ</a:t>
-            </a:r>
-          </a:p>
-        </p:txBody>
-      </p:sp>
-      <p:sp>
-        <p:nvSpPr>
-          <p:cNvPr id="5" name="TextBox 4"/>
-          <p:cNvSpPr txBox="1"/>
-          <p:nvPr/>
-        </p:nvSpPr>
-        <p:spPr>
-          <a:xfrm>
-            <a:off x="548640" y="1645920"/>
-            <a:ext cx="5120640" cy="365760"/>
-          </a:xfrm>
-          <a:prstGeom prst="rect">
-            <a:avLst/>
-          </a:prstGeom>
-          <a:noFill/>
-        </p:spPr>
-        <p:txBody>
-          <a:bodyPr wrap="square" lIns="0" rIns="0" tIns="0" bIns="0" anchor="t">
-            <a:spAutoFit/>
-          </a:bodyPr>
-          <a:lstStyle/>
-          <a:p>
-            <a:pPr algn="l">
-              <a:lnSpc>
-                <a:spcPct val="105000"/>
-              </a:lnSpc>
-              <a:spcAft>
-                <a:spcPts val="0"/>
-              </a:spcAft>
-            </a:pPr>
-            <a:r>
               <a:rPr sz="1500" b="1" i="0">
                 <a:solidFill>
                   <a:srgbClr val="E72F2A"/>
@@ -4936,7 +5141,7 @@
       </p:sp>
       <p:pic>
         <p:nvPicPr>
-          <p:cNvPr id="6" name="Picture 5" descr="collab_a.jpg"/>
+          <p:cNvPr id="5" name="Picture 4" descr="collab_a.jpg"/>
           <p:cNvPicPr>
             <a:picLocks noChangeAspect="1"/>
           </p:cNvPicPr>
@@ -4944,15 +5149,15 @@
         </p:nvPicPr>
         <p:blipFill>
           <a:blip r:embed="rId2"/>
-          <a:srcRect t="58054" b="8054"/>
+          <a:srcRect t="60938" b="10938"/>
           <a:stretch>
             <a:fillRect/>
           </a:stretch>
         </p:blipFill>
         <p:spPr>
           <a:xfrm>
-            <a:off x="548640" y="2103120"/>
-            <a:ext cx="5120640" cy="2148840"/>
+            <a:off x="548640" y="2423160"/>
+            <a:ext cx="5120640" cy="1783080"/>
           </a:xfrm>
           <a:prstGeom prst="rect">
             <a:avLst/>
@@ -4961,14 +5166,14 @@
       </p:pic>
       <p:sp>
         <p:nvSpPr>
-          <p:cNvPr id="7" name="Rounded Rectangle 6"/>
+          <p:cNvPr id="6" name="Rounded Rectangle 5"/>
           <p:cNvSpPr/>
           <p:nvPr/>
         </p:nvSpPr>
         <p:spPr>
           <a:xfrm>
-            <a:off x="548640" y="4434840"/>
-            <a:ext cx="2468880" cy="402336"/>
+            <a:off x="548640" y="4343400"/>
+            <a:ext cx="2468880" cy="384048"/>
           </a:xfrm>
           <a:prstGeom prst="roundRect">
             <a:avLst>
@@ -4992,14 +5197,14 @@
       </p:sp>
       <p:sp>
         <p:nvSpPr>
-          <p:cNvPr id="8" name="TextBox 7"/>
+          <p:cNvPr id="7" name="TextBox 6"/>
           <p:cNvSpPr txBox="1"/>
           <p:nvPr/>
         </p:nvSpPr>
         <p:spPr>
           <a:xfrm>
-            <a:off x="548640" y="4434840"/>
-            <a:ext cx="2468880" cy="402336"/>
+            <a:off x="548640" y="4343400"/>
+            <a:ext cx="2468880" cy="384048"/>
           </a:xfrm>
           <a:prstGeom prst="rect">
             <a:avLst/>
@@ -5034,14 +5239,14 @@
       </p:sp>
       <p:sp>
         <p:nvSpPr>
-          <p:cNvPr id="9" name="Rounded Rectangle 8"/>
+          <p:cNvPr id="8" name="Rounded Rectangle 7"/>
           <p:cNvSpPr/>
           <p:nvPr/>
         </p:nvSpPr>
         <p:spPr>
           <a:xfrm>
-            <a:off x="3154680" y="4434840"/>
-            <a:ext cx="2468880" cy="402336"/>
+            <a:off x="3154680" y="4343400"/>
+            <a:ext cx="2468880" cy="384048"/>
           </a:xfrm>
           <a:prstGeom prst="roundRect">
             <a:avLst>
@@ -5065,14 +5270,14 @@
       </p:sp>
       <p:sp>
         <p:nvSpPr>
-          <p:cNvPr id="10" name="TextBox 9"/>
+          <p:cNvPr id="9" name="TextBox 8"/>
           <p:cNvSpPr txBox="1"/>
           <p:nvPr/>
         </p:nvSpPr>
         <p:spPr>
           <a:xfrm>
-            <a:off x="3154680" y="4434840"/>
-            <a:ext cx="2468880" cy="402336"/>
+            <a:off x="3154680" y="4343400"/>
+            <a:ext cx="2468880" cy="384048"/>
           </a:xfrm>
           <a:prstGeom prst="rect">
             <a:avLst/>
@@ -5107,14 +5312,14 @@
       </p:sp>
       <p:sp>
         <p:nvSpPr>
-          <p:cNvPr id="11" name="Rounded Rectangle 10"/>
+          <p:cNvPr id="10" name="Rounded Rectangle 9"/>
           <p:cNvSpPr/>
           <p:nvPr/>
         </p:nvSpPr>
         <p:spPr>
           <a:xfrm>
-            <a:off x="548640" y="4937759"/>
-            <a:ext cx="2468880" cy="402336"/>
+            <a:off x="548640" y="4818888"/>
+            <a:ext cx="2468880" cy="384048"/>
           </a:xfrm>
           <a:prstGeom prst="roundRect">
             <a:avLst>
@@ -5138,14 +5343,14 @@
       </p:sp>
       <p:sp>
         <p:nvSpPr>
-          <p:cNvPr id="12" name="TextBox 11"/>
+          <p:cNvPr id="11" name="TextBox 10"/>
           <p:cNvSpPr txBox="1"/>
           <p:nvPr/>
         </p:nvSpPr>
         <p:spPr>
           <a:xfrm>
-            <a:off x="548640" y="4937759"/>
-            <a:ext cx="2468880" cy="402336"/>
+            <a:off x="548640" y="4818888"/>
+            <a:ext cx="2468880" cy="384048"/>
           </a:xfrm>
           <a:prstGeom prst="rect">
             <a:avLst/>
@@ -5180,14 +5385,14 @@
       </p:sp>
       <p:sp>
         <p:nvSpPr>
-          <p:cNvPr id="13" name="Rounded Rectangle 12"/>
+          <p:cNvPr id="12" name="Rounded Rectangle 11"/>
           <p:cNvSpPr/>
           <p:nvPr/>
         </p:nvSpPr>
         <p:spPr>
           <a:xfrm>
-            <a:off x="3154680" y="4937759"/>
-            <a:ext cx="2468880" cy="402336"/>
+            <a:off x="3154680" y="4818888"/>
+            <a:ext cx="2468880" cy="384048"/>
           </a:xfrm>
           <a:prstGeom prst="roundRect">
             <a:avLst>
@@ -5211,14 +5416,14 @@
       </p:sp>
       <p:sp>
         <p:nvSpPr>
-          <p:cNvPr id="14" name="TextBox 13"/>
+          <p:cNvPr id="13" name="TextBox 12"/>
           <p:cNvSpPr txBox="1"/>
           <p:nvPr/>
         </p:nvSpPr>
         <p:spPr>
           <a:xfrm>
-            <a:off x="3154680" y="4937759"/>
-            <a:ext cx="2468880" cy="402336"/>
+            <a:off x="3154680" y="4818888"/>
+            <a:ext cx="2468880" cy="384048"/>
           </a:xfrm>
           <a:prstGeom prst="rect">
             <a:avLst/>
@@ -5253,13 +5458,13 @@
       </p:sp>
       <p:sp>
         <p:nvSpPr>
-          <p:cNvPr id="15" name="Diamond 14"/>
+          <p:cNvPr id="14" name="Diamond 13"/>
           <p:cNvSpPr/>
           <p:nvPr/>
         </p:nvSpPr>
         <p:spPr>
           <a:xfrm>
-            <a:off x="548640" y="5596128"/>
+            <a:off x="548640" y="5504688"/>
             <a:ext cx="82296" cy="82296"/>
           </a:xfrm>
           <a:prstGeom prst="diamond">
@@ -5282,13 +5487,13 @@
       </p:sp>
       <p:sp>
         <p:nvSpPr>
-          <p:cNvPr id="16" name="TextBox 15"/>
+          <p:cNvPr id="15" name="TextBox 14"/>
           <p:cNvSpPr txBox="1"/>
           <p:nvPr/>
         </p:nvSpPr>
         <p:spPr>
           <a:xfrm>
-            <a:off x="804672" y="5532120"/>
+            <a:off x="804672" y="5440680"/>
             <a:ext cx="4864607" cy="198437"/>
           </a:xfrm>
           <a:prstGeom prst="rect">
@@ -5324,13 +5529,13 @@
       </p:sp>
       <p:sp>
         <p:nvSpPr>
-          <p:cNvPr id="17" name="Diamond 16"/>
+          <p:cNvPr id="16" name="Diamond 15"/>
           <p:cNvSpPr/>
           <p:nvPr/>
         </p:nvSpPr>
         <p:spPr>
           <a:xfrm>
-            <a:off x="548640" y="5858065"/>
+            <a:off x="548640" y="5766625"/>
             <a:ext cx="82296" cy="82296"/>
           </a:xfrm>
           <a:prstGeom prst="diamond">
@@ -5353,13 +5558,13 @@
       </p:sp>
       <p:sp>
         <p:nvSpPr>
-          <p:cNvPr id="18" name="TextBox 17"/>
+          <p:cNvPr id="17" name="TextBox 16"/>
           <p:cNvSpPr txBox="1"/>
           <p:nvPr/>
         </p:nvSpPr>
         <p:spPr>
           <a:xfrm>
-            <a:off x="804672" y="5794057"/>
+            <a:off x="804672" y="5702617"/>
             <a:ext cx="4864607" cy="198437"/>
           </a:xfrm>
           <a:prstGeom prst="rect">
@@ -5395,14 +5600,14 @@
       </p:sp>
       <p:sp>
         <p:nvSpPr>
-          <p:cNvPr id="19" name="TextBox 18"/>
+          <p:cNvPr id="18" name="TextBox 17"/>
           <p:cNvSpPr txBox="1"/>
           <p:nvPr/>
         </p:nvSpPr>
         <p:spPr>
           <a:xfrm>
-            <a:off x="6126480" y="1645920"/>
-            <a:ext cx="5577840" cy="365760"/>
+            <a:off x="6126480" y="2011680"/>
+            <a:ext cx="5577840" cy="320040"/>
           </a:xfrm>
           <a:prstGeom prst="rect">
             <a:avLst/>
@@ -5437,7 +5642,7 @@
       </p:sp>
       <p:pic>
         <p:nvPicPr>
-          <p:cNvPr id="20" name="Picture 19" descr="collab_b.jpg"/>
+          <p:cNvPr id="19" name="Picture 18" descr="collab_b.jpg"/>
           <p:cNvPicPr>
             <a:picLocks noChangeAspect="1"/>
           </p:cNvPicPr>
@@ -5445,15 +5650,15 @@
         </p:nvPicPr>
         <p:blipFill>
           <a:blip r:embed="rId3"/>
-          <a:srcRect l="316" r="316"/>
+          <a:srcRect t="2795" b="2795"/>
           <a:stretch>
             <a:fillRect/>
           </a:stretch>
         </p:blipFill>
         <p:spPr>
           <a:xfrm>
-            <a:off x="6126480" y="2103120"/>
-            <a:ext cx="2697480" cy="4434840"/>
+            <a:off x="6126480" y="2423160"/>
+            <a:ext cx="2697480" cy="4160520"/>
           </a:xfrm>
           <a:prstGeom prst="rect">
             <a:avLst/>
@@ -5462,7 +5667,7 @@
       </p:pic>
       <p:pic>
         <p:nvPicPr>
-          <p:cNvPr id="21" name="Picture 20" descr="collab_c.jpg"/>
+          <p:cNvPr id="20" name="Picture 19" descr="collab_c.jpg"/>
           <p:cNvPicPr>
             <a:picLocks noChangeAspect="1"/>
           </p:cNvPicPr>
@@ -5470,15 +5675,15 @@
         </p:nvPicPr>
         <p:blipFill>
           <a:blip r:embed="rId4"/>
-          <a:srcRect t="48826" b="24826"/>
+          <a:srcRect t="50544" b="26544"/>
           <a:stretch>
             <a:fillRect/>
           </a:stretch>
         </p:blipFill>
         <p:spPr>
           <a:xfrm>
-            <a:off x="9006840" y="2103120"/>
-            <a:ext cx="2697480" cy="2103120"/>
+            <a:off x="9006840" y="2423160"/>
+            <a:ext cx="2697480" cy="1828800"/>
           </a:xfrm>
           <a:prstGeom prst="rect">
             <a:avLst/>
@@ -5487,13 +5692,13 @@
       </p:pic>
       <p:sp>
         <p:nvSpPr>
-          <p:cNvPr id="22" name="Rounded Rectangle 21"/>
+          <p:cNvPr id="21" name="Rounded Rectangle 20"/>
           <p:cNvSpPr/>
           <p:nvPr/>
         </p:nvSpPr>
         <p:spPr>
           <a:xfrm>
-            <a:off x="9006840" y="4343400"/>
+            <a:off x="9006840" y="4389120"/>
             <a:ext cx="2697480" cy="2194560"/>
           </a:xfrm>
           <a:prstGeom prst="roundRect">
@@ -5518,14 +5723,14 @@
       </p:sp>
       <p:sp>
         <p:nvSpPr>
-          <p:cNvPr id="23" name="TextBox 22"/>
+          <p:cNvPr id="22" name="TextBox 21"/>
           <p:cNvSpPr txBox="1"/>
           <p:nvPr/>
         </p:nvSpPr>
         <p:spPr>
           <a:xfrm>
-            <a:off x="9144000" y="4434840"/>
-            <a:ext cx="2423160" cy="2103120"/>
+            <a:off x="9144000" y="4498848"/>
+            <a:ext cx="2423160" cy="2011680"/>
           </a:xfrm>
           <a:prstGeom prst="rect">
             <a:avLst/>
@@ -5579,18 +5784,18 @@
       </p:sp>
       <p:sp>
         <p:nvSpPr>
-          <p:cNvPr id="24" name="Rounded Rectangle 23"/>
+          <p:cNvPr id="23" name="Rounded Rectangle 22"/>
           <p:cNvSpPr/>
           <p:nvPr/>
         </p:nvSpPr>
         <p:spPr>
           <a:xfrm>
-            <a:off x="6263640" y="5760720"/>
-            <a:ext cx="2423160" cy="658368"/>
+            <a:off x="6263640" y="5806440"/>
+            <a:ext cx="2423160" cy="640080"/>
           </a:xfrm>
           <a:prstGeom prst="roundRect">
             <a:avLst>
-              <a:gd name="adj" fmla="val 13888"/>
+              <a:gd name="adj" fmla="val 14285"/>
             </a:avLst>
           </a:prstGeom>
           <a:solidFill>
@@ -5612,14 +5817,14 @@
       </p:sp>
       <p:sp>
         <p:nvSpPr>
-          <p:cNvPr id="25" name="TextBox 24"/>
+          <p:cNvPr id="24" name="TextBox 23"/>
           <p:cNvSpPr txBox="1"/>
           <p:nvPr/>
         </p:nvSpPr>
         <p:spPr>
           <a:xfrm>
-            <a:off x="6355080" y="5760720"/>
-            <a:ext cx="2240280" cy="658368"/>
+            <a:off x="6355080" y="5806440"/>
+            <a:ext cx="2240280" cy="640080"/>
           </a:xfrm>
           <a:prstGeom prst="rect">
             <a:avLst/>
@@ -5682,14 +5887,6 @@
 <file path=ppt/slides/slide11.xml><?xml version="1.0" encoding="utf-8"?>
 <p:sld xmlns:a="http://schemas.openxmlformats.org/drawingml/2006/main" xmlns:p="http://schemas.openxmlformats.org/presentationml/2006/main" xmlns:r="http://schemas.openxmlformats.org/officeDocument/2006/relationships">
   <p:cSld>
-    <p:bg>
-      <p:bgPr>
-        <a:solidFill>
-          <a:srgbClr val="FFFFFF"/>
-        </a:solidFill>
-        <a:effectLst/>
-      </p:bgPr>
-    </p:bg>
     <p:spTree>
       <p:nvGrpSpPr>
         <p:cNvPr id="1" name=""/>
@@ -5699,14 +5896,14 @@
       <p:grpSpPr/>
       <p:sp>
         <p:nvSpPr>
-          <p:cNvPr id="2" name="TextBox 1"/>
+          <p:cNvPr id="3" name="TextBox 2"/>
           <p:cNvSpPr txBox="1"/>
           <p:nvPr/>
         </p:nvSpPr>
         <p:spPr>
           <a:xfrm>
-            <a:off x="822960" y="256031"/>
-            <a:ext cx="7315200" cy="274320"/>
+            <a:off x="822960" y="1170432"/>
+            <a:ext cx="7315200" cy="256032"/>
           </a:xfrm>
           <a:prstGeom prst="rect">
             <a:avLst/>
@@ -5741,14 +5938,14 @@
       </p:sp>
       <p:sp>
         <p:nvSpPr>
-          <p:cNvPr id="3" name="Rectangle 2"/>
+          <p:cNvPr id="4" name="Rectangle 3"/>
           <p:cNvSpPr/>
           <p:nvPr/>
         </p:nvSpPr>
         <p:spPr>
           <a:xfrm>
-            <a:off x="566928" y="612647"/>
-            <a:ext cx="64008" cy="588264"/>
+            <a:off x="566928" y="1435608"/>
+            <a:ext cx="64008" cy="557784"/>
           </a:xfrm>
           <a:prstGeom prst="rect">
             <a:avLst/>
@@ -5770,23 +5967,23 @@
       </p:sp>
       <p:sp>
         <p:nvSpPr>
-          <p:cNvPr id="4" name="TextBox 3"/>
-          <p:cNvSpPr txBox="1"/>
-          <p:nvPr/>
-        </p:nvSpPr>
-        <p:spPr>
-          <a:xfrm>
-            <a:off x="822960" y="640080"/>
-            <a:ext cx="7315200" cy="533400"/>
-          </a:xfrm>
-          <a:prstGeom prst="rect">
-            <a:avLst/>
-          </a:prstGeom>
-          <a:noFill/>
+          <p:cNvPr id="2" name="Title 1"/>
+          <p:cNvSpPr>
+            <a:spLocks noGrp="1"/>
+          </p:cNvSpPr>
+          <p:nvPr>
+            <p:ph type="title"/>
+          </p:nvPr>
+        </p:nvSpPr>
+        <p:spPr>
+          <a:xfrm>
+            <a:off x="822960" y="1463040"/>
+            <a:ext cx="7315200" cy="502920"/>
+          </a:xfrm>
         </p:spPr>
         <p:txBody>
           <a:bodyPr wrap="square" lIns="0" rIns="0" tIns="0" bIns="0" anchor="t">
-            <a:spAutoFit/>
+            <a:noAutofit/>
           </a:bodyPr>
           <a:lstStyle/>
           <a:p>
@@ -5794,12 +5991,9 @@
               <a:lnSpc>
                 <a:spcPct val="100000"/>
               </a:lnSpc>
-              <a:spcAft>
-                <a:spcPts val="0"/>
-              </a:spcAft>
-            </a:pPr>
-            <a:r>
-              <a:rPr sz="3200" b="1" i="0">
+            </a:pPr>
+            <a:r>
+              <a:rPr sz="3000" b="1">
                 <a:solidFill>
                   <a:srgbClr val="1A1A1A"/>
                 </a:solidFill>
@@ -5818,12 +6012,12 @@
         </p:nvSpPr>
         <p:spPr>
           <a:xfrm>
-            <a:off x="548640" y="1691640"/>
-            <a:ext cx="5532120" cy="2331720"/>
+            <a:off x="548640" y="2240280"/>
+            <a:ext cx="5532120" cy="2057400"/>
           </a:xfrm>
           <a:prstGeom prst="roundRect">
             <a:avLst>
-              <a:gd name="adj" fmla="val 7058"/>
+              <a:gd name="adj" fmla="val 8000"/>
             </a:avLst>
           </a:prstGeom>
           <a:solidFill>
@@ -5849,8 +6043,8 @@
         </p:nvSpPr>
         <p:spPr>
           <a:xfrm>
-            <a:off x="777240" y="1920240"/>
-            <a:ext cx="594360" cy="594360"/>
+            <a:off x="777240" y="2423160"/>
+            <a:ext cx="566928" cy="566928"/>
           </a:xfrm>
           <a:prstGeom prst="roundRect">
             <a:avLst>
@@ -5880,8 +6074,8 @@
         </p:nvSpPr>
         <p:spPr>
           <a:xfrm>
-            <a:off x="777240" y="1920240"/>
-            <a:ext cx="594360" cy="594360"/>
+            <a:off x="777240" y="2423160"/>
+            <a:ext cx="566928" cy="566928"/>
           </a:xfrm>
           <a:prstGeom prst="rect">
             <a:avLst/>
@@ -5922,8 +6116,8 @@
         </p:nvSpPr>
         <p:spPr>
           <a:xfrm>
-            <a:off x="1554480" y="1920240"/>
-            <a:ext cx="4297680" cy="594360"/>
+            <a:off x="1554480" y="2423160"/>
+            <a:ext cx="4297680" cy="566928"/>
           </a:xfrm>
           <a:prstGeom prst="rect">
             <a:avLst/>
@@ -5973,7 +6167,7 @@
         </p:nvSpPr>
         <p:spPr>
           <a:xfrm>
-            <a:off x="822959" y="2724912"/>
+            <a:off x="822959" y="3182112"/>
             <a:ext cx="182880" cy="182880"/>
           </a:xfrm>
           <a:prstGeom prst="rect">
@@ -6004,7 +6198,7 @@
         </p:nvSpPr>
         <p:spPr>
           <a:xfrm>
-            <a:off x="1188719" y="2697480"/>
+            <a:off x="1188719" y="3154680"/>
             <a:ext cx="4572000" cy="201168"/>
           </a:xfrm>
           <a:prstGeom prst="rect">
@@ -6046,7 +6240,7 @@
         </p:nvSpPr>
         <p:spPr>
           <a:xfrm>
-            <a:off x="822959" y="3044952"/>
+            <a:off x="822959" y="3483864"/>
             <a:ext cx="182880" cy="182880"/>
           </a:xfrm>
           <a:prstGeom prst="rect">
@@ -6077,7 +6271,7 @@
         </p:nvSpPr>
         <p:spPr>
           <a:xfrm>
-            <a:off x="1188719" y="3017520"/>
+            <a:off x="1188719" y="3456432"/>
             <a:ext cx="4572000" cy="402336"/>
           </a:xfrm>
           <a:prstGeom prst="rect">
@@ -6119,7 +6313,7 @@
         </p:nvSpPr>
         <p:spPr>
           <a:xfrm>
-            <a:off x="822959" y="3566160"/>
+            <a:off x="822959" y="3986784"/>
             <a:ext cx="182880" cy="182880"/>
           </a:xfrm>
           <a:prstGeom prst="rect">
@@ -6150,7 +6344,7 @@
         </p:nvSpPr>
         <p:spPr>
           <a:xfrm>
-            <a:off x="1188719" y="3538728"/>
+            <a:off x="1188719" y="3959352"/>
             <a:ext cx="4572000" cy="402336"/>
           </a:xfrm>
           <a:prstGeom prst="rect">
@@ -6192,12 +6386,12 @@
         </p:nvSpPr>
         <p:spPr>
           <a:xfrm>
-            <a:off x="6309359" y="1691640"/>
-            <a:ext cx="5532120" cy="2331720"/>
+            <a:off x="6309359" y="2240280"/>
+            <a:ext cx="5532120" cy="2057400"/>
           </a:xfrm>
           <a:prstGeom prst="roundRect">
             <a:avLst>
-              <a:gd name="adj" fmla="val 7058"/>
+              <a:gd name="adj" fmla="val 8000"/>
             </a:avLst>
           </a:prstGeom>
           <a:solidFill>
@@ -6223,8 +6417,8 @@
         </p:nvSpPr>
         <p:spPr>
           <a:xfrm>
-            <a:off x="6537959" y="1920240"/>
-            <a:ext cx="594360" cy="594360"/>
+            <a:off x="6537959" y="2423160"/>
+            <a:ext cx="566928" cy="566928"/>
           </a:xfrm>
           <a:prstGeom prst="roundRect">
             <a:avLst>
@@ -6254,8 +6448,8 @@
         </p:nvSpPr>
         <p:spPr>
           <a:xfrm>
-            <a:off x="6537959" y="1920240"/>
-            <a:ext cx="594360" cy="594360"/>
+            <a:off x="6537959" y="2423160"/>
+            <a:ext cx="566928" cy="566928"/>
           </a:xfrm>
           <a:prstGeom prst="rect">
             <a:avLst/>
@@ -6296,8 +6490,8 @@
         </p:nvSpPr>
         <p:spPr>
           <a:xfrm>
-            <a:off x="7315200" y="1920240"/>
-            <a:ext cx="4297680" cy="594360"/>
+            <a:off x="7315200" y="2423160"/>
+            <a:ext cx="4297680" cy="566928"/>
           </a:xfrm>
           <a:prstGeom prst="rect">
             <a:avLst/>
@@ -6347,7 +6541,7 @@
         </p:nvSpPr>
         <p:spPr>
           <a:xfrm>
-            <a:off x="6583679" y="2724912"/>
+            <a:off x="6583679" y="3182112"/>
             <a:ext cx="182880" cy="182880"/>
           </a:xfrm>
           <a:prstGeom prst="rect">
@@ -6378,7 +6572,7 @@
         </p:nvSpPr>
         <p:spPr>
           <a:xfrm>
-            <a:off x="6949440" y="2697480"/>
+            <a:off x="6949440" y="3154680"/>
             <a:ext cx="4572000" cy="402336"/>
           </a:xfrm>
           <a:prstGeom prst="rect">
@@ -6420,7 +6614,7 @@
         </p:nvSpPr>
         <p:spPr>
           <a:xfrm>
-            <a:off x="6583679" y="3246120"/>
+            <a:off x="6583679" y="3685032"/>
             <a:ext cx="182880" cy="182880"/>
           </a:xfrm>
           <a:prstGeom prst="rect">
@@ -6451,7 +6645,7 @@
         </p:nvSpPr>
         <p:spPr>
           <a:xfrm>
-            <a:off x="6949440" y="3218688"/>
+            <a:off x="6949440" y="3657600"/>
             <a:ext cx="4572000" cy="201168"/>
           </a:xfrm>
           <a:prstGeom prst="rect">
@@ -6493,12 +6687,12 @@
         </p:nvSpPr>
         <p:spPr>
           <a:xfrm>
-            <a:off x="548640" y="4206240"/>
-            <a:ext cx="5532120" cy="2331720"/>
+            <a:off x="548640" y="4434840"/>
+            <a:ext cx="5532120" cy="2057400"/>
           </a:xfrm>
           <a:prstGeom prst="roundRect">
             <a:avLst>
-              <a:gd name="adj" fmla="val 7058"/>
+              <a:gd name="adj" fmla="val 8000"/>
             </a:avLst>
           </a:prstGeom>
           <a:solidFill>
@@ -6524,8 +6718,8 @@
         </p:nvSpPr>
         <p:spPr>
           <a:xfrm>
-            <a:off x="777240" y="4434840"/>
-            <a:ext cx="594360" cy="594360"/>
+            <a:off x="777240" y="4617720"/>
+            <a:ext cx="566928" cy="566928"/>
           </a:xfrm>
           <a:prstGeom prst="roundRect">
             <a:avLst>
@@ -6555,8 +6749,8 @@
         </p:nvSpPr>
         <p:spPr>
           <a:xfrm>
-            <a:off x="777240" y="4434840"/>
-            <a:ext cx="594360" cy="594360"/>
+            <a:off x="777240" y="4617720"/>
+            <a:ext cx="566928" cy="566928"/>
           </a:xfrm>
           <a:prstGeom prst="rect">
             <a:avLst/>
@@ -6597,8 +6791,8 @@
         </p:nvSpPr>
         <p:spPr>
           <a:xfrm>
-            <a:off x="1554480" y="4434840"/>
-            <a:ext cx="4297680" cy="594360"/>
+            <a:off x="1554480" y="4617720"/>
+            <a:ext cx="4297680" cy="566928"/>
           </a:xfrm>
           <a:prstGeom prst="rect">
             <a:avLst/>
@@ -6648,7 +6842,7 @@
         </p:nvSpPr>
         <p:spPr>
           <a:xfrm>
-            <a:off x="822959" y="5239512"/>
+            <a:off x="822959" y="5376672"/>
             <a:ext cx="182880" cy="182880"/>
           </a:xfrm>
           <a:prstGeom prst="rect">
@@ -6679,7 +6873,7 @@
         </p:nvSpPr>
         <p:spPr>
           <a:xfrm>
-            <a:off x="1188719" y="5212079"/>
+            <a:off x="1188719" y="5349240"/>
             <a:ext cx="4572000" cy="402336"/>
           </a:xfrm>
           <a:prstGeom prst="rect">
@@ -6721,7 +6915,7 @@
         </p:nvSpPr>
         <p:spPr>
           <a:xfrm>
-            <a:off x="822959" y="5760720"/>
+            <a:off x="822959" y="5879592"/>
             <a:ext cx="182880" cy="182880"/>
           </a:xfrm>
           <a:prstGeom prst="rect">
@@ -6752,7 +6946,7 @@
         </p:nvSpPr>
         <p:spPr>
           <a:xfrm>
-            <a:off x="1188719" y="5733288"/>
+            <a:off x="1188719" y="5852159"/>
             <a:ext cx="4572000" cy="201168"/>
           </a:xfrm>
           <a:prstGeom prst="rect">
@@ -6794,12 +6988,12 @@
         </p:nvSpPr>
         <p:spPr>
           <a:xfrm>
-            <a:off x="6309359" y="4206240"/>
-            <a:ext cx="5532120" cy="2331720"/>
+            <a:off x="6309359" y="4434840"/>
+            <a:ext cx="5532120" cy="2057400"/>
           </a:xfrm>
           <a:prstGeom prst="roundRect">
             <a:avLst>
-              <a:gd name="adj" fmla="val 7058"/>
+              <a:gd name="adj" fmla="val 8000"/>
             </a:avLst>
           </a:prstGeom>
           <a:solidFill>
@@ -6825,8 +7019,8 @@
         </p:nvSpPr>
         <p:spPr>
           <a:xfrm>
-            <a:off x="6537959" y="4434840"/>
-            <a:ext cx="594360" cy="594360"/>
+            <a:off x="6537959" y="4617720"/>
+            <a:ext cx="566928" cy="566928"/>
           </a:xfrm>
           <a:prstGeom prst="roundRect">
             <a:avLst>
@@ -6856,8 +7050,8 @@
         </p:nvSpPr>
         <p:spPr>
           <a:xfrm>
-            <a:off x="6537959" y="4434840"/>
-            <a:ext cx="594360" cy="594360"/>
+            <a:off x="6537959" y="4617720"/>
+            <a:ext cx="566928" cy="566928"/>
           </a:xfrm>
           <a:prstGeom prst="rect">
             <a:avLst/>
@@ -6898,8 +7092,8 @@
         </p:nvSpPr>
         <p:spPr>
           <a:xfrm>
-            <a:off x="7315200" y="4434840"/>
-            <a:ext cx="4297680" cy="594360"/>
+            <a:off x="7315200" y="4617720"/>
+            <a:ext cx="4297680" cy="566928"/>
           </a:xfrm>
           <a:prstGeom prst="rect">
             <a:avLst/>
@@ -6949,7 +7143,7 @@
         </p:nvSpPr>
         <p:spPr>
           <a:xfrm>
-            <a:off x="6583679" y="5239512"/>
+            <a:off x="6583679" y="5376672"/>
             <a:ext cx="182880" cy="182880"/>
           </a:xfrm>
           <a:prstGeom prst="rect">
@@ -6980,7 +7174,7 @@
         </p:nvSpPr>
         <p:spPr>
           <a:xfrm>
-            <a:off x="6949440" y="5212079"/>
+            <a:off x="6949440" y="5349240"/>
             <a:ext cx="4572000" cy="402336"/>
           </a:xfrm>
           <a:prstGeom prst="rect">
@@ -7025,14 +7219,6 @@
 <file path=ppt/slides/slide12.xml><?xml version="1.0" encoding="utf-8"?>
 <p:sld xmlns:a="http://schemas.openxmlformats.org/drawingml/2006/main" xmlns:p="http://schemas.openxmlformats.org/presentationml/2006/main" xmlns:r="http://schemas.openxmlformats.org/officeDocument/2006/relationships">
   <p:cSld>
-    <p:bg>
-      <p:bgPr>
-        <a:solidFill>
-          <a:srgbClr val="FFFFFF"/>
-        </a:solidFill>
-        <a:effectLst/>
-      </p:bgPr>
-    </p:bg>
     <p:spTree>
       <p:nvGrpSpPr>
         <p:cNvPr id="1" name=""/>
@@ -7042,14 +7228,14 @@
       <p:grpSpPr/>
       <p:sp>
         <p:nvSpPr>
-          <p:cNvPr id="2" name="TextBox 1"/>
+          <p:cNvPr id="3" name="TextBox 2"/>
           <p:cNvSpPr txBox="1"/>
           <p:nvPr/>
         </p:nvSpPr>
         <p:spPr>
           <a:xfrm>
-            <a:off x="822960" y="256031"/>
-            <a:ext cx="7315200" cy="274320"/>
+            <a:off x="822960" y="1170432"/>
+            <a:ext cx="7315200" cy="256032"/>
           </a:xfrm>
           <a:prstGeom prst="rect">
             <a:avLst/>
@@ -7084,14 +7270,14 @@
       </p:sp>
       <p:sp>
         <p:nvSpPr>
-          <p:cNvPr id="3" name="Rectangle 2"/>
+          <p:cNvPr id="4" name="Rectangle 3"/>
           <p:cNvSpPr/>
           <p:nvPr/>
         </p:nvSpPr>
         <p:spPr>
           <a:xfrm>
-            <a:off x="566928" y="612647"/>
-            <a:ext cx="64008" cy="1075944"/>
+            <a:off x="566928" y="1435608"/>
+            <a:ext cx="64008" cy="557784"/>
           </a:xfrm>
           <a:prstGeom prst="rect">
             <a:avLst/>
@@ -7113,23 +7299,23 @@
       </p:sp>
       <p:sp>
         <p:nvSpPr>
-          <p:cNvPr id="4" name="TextBox 3"/>
-          <p:cNvSpPr txBox="1"/>
-          <p:nvPr/>
-        </p:nvSpPr>
-        <p:spPr>
-          <a:xfrm>
-            <a:off x="822960" y="640080"/>
-            <a:ext cx="7315200" cy="1021080"/>
-          </a:xfrm>
-          <a:prstGeom prst="rect">
-            <a:avLst/>
-          </a:prstGeom>
-          <a:noFill/>
+          <p:cNvPr id="2" name="Title 1"/>
+          <p:cNvSpPr>
+            <a:spLocks noGrp="1"/>
+          </p:cNvSpPr>
+          <p:nvPr>
+            <p:ph type="title"/>
+          </p:nvPr>
+        </p:nvSpPr>
+        <p:spPr>
+          <a:xfrm>
+            <a:off x="822960" y="1463040"/>
+            <a:ext cx="7315200" cy="502920"/>
+          </a:xfrm>
         </p:spPr>
         <p:txBody>
           <a:bodyPr wrap="square" lIns="0" rIns="0" tIns="0" bIns="0" anchor="t">
-            <a:spAutoFit/>
+            <a:noAutofit/>
           </a:bodyPr>
           <a:lstStyle/>
           <a:p>
@@ -7137,12 +7323,9 @@
               <a:lnSpc>
                 <a:spcPct val="100000"/>
               </a:lnSpc>
-              <a:spcAft>
-                <a:spcPts val="0"/>
-              </a:spcAft>
-            </a:pPr>
-            <a:r>
-              <a:rPr sz="3200" b="1" i="0">
+            </a:pPr>
+            <a:r>
+              <a:rPr sz="3000" b="1">
                 <a:solidFill>
                   <a:srgbClr val="1A1A1A"/>
                 </a:solidFill>
@@ -7161,8 +7344,8 @@
         </p:nvSpPr>
         <p:spPr>
           <a:xfrm>
-            <a:off x="548640" y="1783080"/>
-            <a:ext cx="2331720" cy="548640"/>
+            <a:off x="548640" y="2240280"/>
+            <a:ext cx="2331720" cy="502920"/>
           </a:xfrm>
           <a:prstGeom prst="rect">
             <a:avLst/>
@@ -7190,8 +7373,8 @@
         </p:nvSpPr>
         <p:spPr>
           <a:xfrm>
-            <a:off x="685800" y="1783080"/>
-            <a:ext cx="2057400" cy="548640"/>
+            <a:off x="685800" y="2240280"/>
+            <a:ext cx="2057400" cy="502920"/>
           </a:xfrm>
           <a:prstGeom prst="rect">
             <a:avLst/>
@@ -7232,8 +7415,8 @@
         </p:nvSpPr>
         <p:spPr>
           <a:xfrm>
-            <a:off x="2880360" y="1783080"/>
-            <a:ext cx="2514600" cy="548640"/>
+            <a:off x="2880360" y="2240280"/>
+            <a:ext cx="2514600" cy="502920"/>
           </a:xfrm>
           <a:prstGeom prst="rect">
             <a:avLst/>
@@ -7261,8 +7444,8 @@
         </p:nvSpPr>
         <p:spPr>
           <a:xfrm>
-            <a:off x="3017520" y="1783080"/>
-            <a:ext cx="2240280" cy="548640"/>
+            <a:off x="3017520" y="2240280"/>
+            <a:ext cx="2240280" cy="502920"/>
           </a:xfrm>
           <a:prstGeom prst="rect">
             <a:avLst/>
@@ -7303,8 +7486,8 @@
         </p:nvSpPr>
         <p:spPr>
           <a:xfrm>
-            <a:off x="5394960" y="1783080"/>
-            <a:ext cx="1965960" cy="548640"/>
+            <a:off x="5394960" y="2240280"/>
+            <a:ext cx="1965960" cy="502920"/>
           </a:xfrm>
           <a:prstGeom prst="rect">
             <a:avLst/>
@@ -7332,8 +7515,8 @@
         </p:nvSpPr>
         <p:spPr>
           <a:xfrm>
-            <a:off x="5532120" y="1783080"/>
-            <a:ext cx="1691639" cy="548640"/>
+            <a:off x="5532120" y="2240280"/>
+            <a:ext cx="1691639" cy="502920"/>
           </a:xfrm>
           <a:prstGeom prst="rect">
             <a:avLst/>
@@ -7374,8 +7557,8 @@
         </p:nvSpPr>
         <p:spPr>
           <a:xfrm>
-            <a:off x="548640" y="2331720"/>
-            <a:ext cx="2331720" cy="822960"/>
+            <a:off x="548640" y="2743200"/>
+            <a:ext cx="2331720" cy="731520"/>
           </a:xfrm>
           <a:prstGeom prst="rect">
             <a:avLst/>
@@ -7405,8 +7588,8 @@
         </p:nvSpPr>
         <p:spPr>
           <a:xfrm>
-            <a:off x="685800" y="2331720"/>
-            <a:ext cx="2057400" cy="822960"/>
+            <a:off x="685800" y="2743200"/>
+            <a:ext cx="2057400" cy="731520"/>
           </a:xfrm>
           <a:prstGeom prst="rect">
             <a:avLst/>
@@ -7447,8 +7630,8 @@
         </p:nvSpPr>
         <p:spPr>
           <a:xfrm>
-            <a:off x="2880360" y="2331720"/>
-            <a:ext cx="2514600" cy="822960"/>
+            <a:off x="2880360" y="2743200"/>
+            <a:ext cx="2514600" cy="731520"/>
           </a:xfrm>
           <a:prstGeom prst="rect">
             <a:avLst/>
@@ -7478,8 +7661,8 @@
         </p:nvSpPr>
         <p:spPr>
           <a:xfrm>
-            <a:off x="3017520" y="2331720"/>
-            <a:ext cx="2240280" cy="822960"/>
+            <a:off x="3017520" y="2743200"/>
+            <a:ext cx="2240280" cy="731520"/>
           </a:xfrm>
           <a:prstGeom prst="rect">
             <a:avLst/>
@@ -7520,8 +7703,8 @@
         </p:nvSpPr>
         <p:spPr>
           <a:xfrm>
-            <a:off x="5394960" y="2331720"/>
-            <a:ext cx="1965960" cy="822960"/>
+            <a:off x="5394960" y="2743200"/>
+            <a:ext cx="1965960" cy="731520"/>
           </a:xfrm>
           <a:prstGeom prst="rect">
             <a:avLst/>
@@ -7551,8 +7734,8 @@
         </p:nvSpPr>
         <p:spPr>
           <a:xfrm>
-            <a:off x="5532120" y="2331720"/>
-            <a:ext cx="1691639" cy="822960"/>
+            <a:off x="5532120" y="2743200"/>
+            <a:ext cx="1691639" cy="731520"/>
           </a:xfrm>
           <a:prstGeom prst="rect">
             <a:avLst/>
@@ -7593,8 +7776,8 @@
         </p:nvSpPr>
         <p:spPr>
           <a:xfrm>
-            <a:off x="548640" y="3154679"/>
-            <a:ext cx="2331720" cy="822960"/>
+            <a:off x="548640" y="3474720"/>
+            <a:ext cx="2331720" cy="731520"/>
           </a:xfrm>
           <a:prstGeom prst="rect">
             <a:avLst/>
@@ -7624,8 +7807,8 @@
         </p:nvSpPr>
         <p:spPr>
           <a:xfrm>
-            <a:off x="685800" y="3154679"/>
-            <a:ext cx="2057400" cy="822960"/>
+            <a:off x="685800" y="3474720"/>
+            <a:ext cx="2057400" cy="731520"/>
           </a:xfrm>
           <a:prstGeom prst="rect">
             <a:avLst/>
@@ -7666,8 +7849,8 @@
         </p:nvSpPr>
         <p:spPr>
           <a:xfrm>
-            <a:off x="2880360" y="3154679"/>
-            <a:ext cx="2514600" cy="822960"/>
+            <a:off x="2880360" y="3474720"/>
+            <a:ext cx="2514600" cy="731520"/>
           </a:xfrm>
           <a:prstGeom prst="rect">
             <a:avLst/>
@@ -7697,8 +7880,8 @@
         </p:nvSpPr>
         <p:spPr>
           <a:xfrm>
-            <a:off x="3017520" y="3154679"/>
-            <a:ext cx="2240280" cy="822960"/>
+            <a:off x="3017520" y="3474720"/>
+            <a:ext cx="2240280" cy="731520"/>
           </a:xfrm>
           <a:prstGeom prst="rect">
             <a:avLst/>
@@ -7739,8 +7922,8 @@
         </p:nvSpPr>
         <p:spPr>
           <a:xfrm>
-            <a:off x="5394960" y="3154679"/>
-            <a:ext cx="1965960" cy="822960"/>
+            <a:off x="5394960" y="3474720"/>
+            <a:ext cx="1965960" cy="731520"/>
           </a:xfrm>
           <a:prstGeom prst="rect">
             <a:avLst/>
@@ -7770,8 +7953,8 @@
         </p:nvSpPr>
         <p:spPr>
           <a:xfrm>
-            <a:off x="5532120" y="3154679"/>
-            <a:ext cx="1691639" cy="822960"/>
+            <a:off x="5532120" y="3474720"/>
+            <a:ext cx="1691639" cy="731520"/>
           </a:xfrm>
           <a:prstGeom prst="rect">
             <a:avLst/>
@@ -7812,8 +7995,8 @@
         </p:nvSpPr>
         <p:spPr>
           <a:xfrm>
-            <a:off x="548640" y="3977639"/>
-            <a:ext cx="2331720" cy="822960"/>
+            <a:off x="548640" y="4206240"/>
+            <a:ext cx="2331720" cy="731520"/>
           </a:xfrm>
           <a:prstGeom prst="rect">
             <a:avLst/>
@@ -7843,8 +8026,8 @@
         </p:nvSpPr>
         <p:spPr>
           <a:xfrm>
-            <a:off x="685800" y="3977639"/>
-            <a:ext cx="2057400" cy="822960"/>
+            <a:off x="685800" y="4206240"/>
+            <a:ext cx="2057400" cy="731520"/>
           </a:xfrm>
           <a:prstGeom prst="rect">
             <a:avLst/>
@@ -7885,8 +8068,8 @@
         </p:nvSpPr>
         <p:spPr>
           <a:xfrm>
-            <a:off x="2880360" y="3977639"/>
-            <a:ext cx="2514600" cy="822960"/>
+            <a:off x="2880360" y="4206240"/>
+            <a:ext cx="2514600" cy="731520"/>
           </a:xfrm>
           <a:prstGeom prst="rect">
             <a:avLst/>
@@ -7916,8 +8099,8 @@
         </p:nvSpPr>
         <p:spPr>
           <a:xfrm>
-            <a:off x="3017520" y="3977639"/>
-            <a:ext cx="2240280" cy="822960"/>
+            <a:off x="3017520" y="4206240"/>
+            <a:ext cx="2240280" cy="731520"/>
           </a:xfrm>
           <a:prstGeom prst="rect">
             <a:avLst/>
@@ -7958,8 +8141,8 @@
         </p:nvSpPr>
         <p:spPr>
           <a:xfrm>
-            <a:off x="5394960" y="3977639"/>
-            <a:ext cx="1965960" cy="822960"/>
+            <a:off x="5394960" y="4206240"/>
+            <a:ext cx="1965960" cy="731520"/>
           </a:xfrm>
           <a:prstGeom prst="rect">
             <a:avLst/>
@@ -7989,8 +8172,8 @@
         </p:nvSpPr>
         <p:spPr>
           <a:xfrm>
-            <a:off x="5532120" y="3977639"/>
-            <a:ext cx="1691639" cy="822960"/>
+            <a:off x="5532120" y="4206240"/>
+            <a:ext cx="1691639" cy="731520"/>
           </a:xfrm>
           <a:prstGeom prst="rect">
             <a:avLst/>
@@ -8031,8 +8214,8 @@
         </p:nvSpPr>
         <p:spPr>
           <a:xfrm>
-            <a:off x="548640" y="4800600"/>
-            <a:ext cx="2331720" cy="822960"/>
+            <a:off x="548640" y="4937759"/>
+            <a:ext cx="2331720" cy="731520"/>
           </a:xfrm>
           <a:prstGeom prst="rect">
             <a:avLst/>
@@ -8062,8 +8245,8 @@
         </p:nvSpPr>
         <p:spPr>
           <a:xfrm>
-            <a:off x="685800" y="4800600"/>
-            <a:ext cx="2057400" cy="822960"/>
+            <a:off x="685800" y="4937759"/>
+            <a:ext cx="2057400" cy="731520"/>
           </a:xfrm>
           <a:prstGeom prst="rect">
             <a:avLst/>
@@ -8104,8 +8287,8 @@
         </p:nvSpPr>
         <p:spPr>
           <a:xfrm>
-            <a:off x="2880360" y="4800600"/>
-            <a:ext cx="2514600" cy="822960"/>
+            <a:off x="2880360" y="4937759"/>
+            <a:ext cx="2514600" cy="731520"/>
           </a:xfrm>
           <a:prstGeom prst="rect">
             <a:avLst/>
@@ -8135,8 +8318,8 @@
         </p:nvSpPr>
         <p:spPr>
           <a:xfrm>
-            <a:off x="3017520" y="4800600"/>
-            <a:ext cx="2240280" cy="822960"/>
+            <a:off x="3017520" y="4937759"/>
+            <a:ext cx="2240280" cy="731520"/>
           </a:xfrm>
           <a:prstGeom prst="rect">
             <a:avLst/>
@@ -8177,8 +8360,8 @@
         </p:nvSpPr>
         <p:spPr>
           <a:xfrm>
-            <a:off x="5394960" y="4800600"/>
-            <a:ext cx="1965960" cy="822960"/>
+            <a:off x="5394960" y="4937759"/>
+            <a:ext cx="1965960" cy="731520"/>
           </a:xfrm>
           <a:prstGeom prst="rect">
             <a:avLst/>
@@ -8208,8 +8391,8 @@
         </p:nvSpPr>
         <p:spPr>
           <a:xfrm>
-            <a:off x="5532120" y="4800600"/>
-            <a:ext cx="1691639" cy="822960"/>
+            <a:off x="5532120" y="4937759"/>
+            <a:ext cx="1691639" cy="731520"/>
           </a:xfrm>
           <a:prstGeom prst="rect">
             <a:avLst/>
@@ -8250,8 +8433,8 @@
         </p:nvSpPr>
         <p:spPr>
           <a:xfrm>
-            <a:off x="548640" y="5989320"/>
-            <a:ext cx="6812279" cy="685800"/>
+            <a:off x="548640" y="5852160"/>
+            <a:ext cx="6812279" cy="731520"/>
           </a:xfrm>
           <a:prstGeom prst="rect">
             <a:avLst/>
@@ -8279,8 +8462,8 @@
         </p:nvSpPr>
         <p:spPr>
           <a:xfrm>
-            <a:off x="777240" y="5989320"/>
-            <a:ext cx="6355079" cy="685800"/>
+            <a:off x="777240" y="5852160"/>
+            <a:ext cx="6355079" cy="731520"/>
           </a:xfrm>
           <a:prstGeom prst="rect">
             <a:avLst/>
@@ -8321,8 +8504,8 @@
         </p:nvSpPr>
         <p:spPr>
           <a:xfrm>
-            <a:off x="8138160" y="1783080"/>
-            <a:ext cx="3611880" cy="1024128"/>
+            <a:off x="8138160" y="2240280"/>
+            <a:ext cx="3611880" cy="914400"/>
           </a:xfrm>
           <a:custGeom>
             <a:avLst/>
@@ -8331,7 +8514,7 @@
             <a:cxnLst/>
             <a:rect l="l" t="t" r="r" b="b"/>
             <a:pathLst>
-              <a:path w="3611880" h="1024128">
+              <a:path w="3611880" h="914400">
                 <a:moveTo>
                   <a:pt x="0" y="0"/>
                 </a:moveTo>
@@ -8339,10 +8522,10 @@
                   <a:pt x="3611880" y="0"/>
                 </a:lnTo>
                 <a:lnTo>
-                  <a:pt x="3268980" y="1024128"/>
+                  <a:pt x="3268980" y="914400"/>
                 </a:lnTo>
                 <a:lnTo>
-                  <a:pt x="342900" y="1024128"/>
+                  <a:pt x="342900" y="914400"/>
                 </a:lnTo>
                 <a:close/>
               </a:path>
@@ -8373,8 +8556,8 @@
         </p:nvSpPr>
         <p:spPr>
           <a:xfrm>
-            <a:off x="8412480" y="1783080"/>
-            <a:ext cx="3063240" cy="1024128"/>
+            <a:off x="8412480" y="2240280"/>
+            <a:ext cx="3063240" cy="914400"/>
           </a:xfrm>
           <a:prstGeom prst="rect">
             <a:avLst/>
@@ -8415,8 +8598,8 @@
         </p:nvSpPr>
         <p:spPr>
           <a:xfrm>
-            <a:off x="8481060" y="2852928"/>
-            <a:ext cx="2926080" cy="1024128"/>
+            <a:off x="8481060" y="3200400"/>
+            <a:ext cx="2926080" cy="914400"/>
           </a:xfrm>
           <a:custGeom>
             <a:avLst/>
@@ -8425,7 +8608,7 @@
             <a:cxnLst/>
             <a:rect l="l" t="t" r="r" b="b"/>
             <a:pathLst>
-              <a:path w="2926080" h="1024128">
+              <a:path w="2926080" h="914400">
                 <a:moveTo>
                   <a:pt x="0" y="0"/>
                 </a:moveTo>
@@ -8433,10 +8616,10 @@
                   <a:pt x="2926080" y="0"/>
                 </a:lnTo>
                 <a:lnTo>
-                  <a:pt x="2583180" y="1024128"/>
+                  <a:pt x="2583180" y="914400"/>
                 </a:lnTo>
                 <a:lnTo>
-                  <a:pt x="342900" y="1024128"/>
+                  <a:pt x="342900" y="914400"/>
                 </a:lnTo>
                 <a:close/>
               </a:path>
@@ -8467,8 +8650,8 @@
         </p:nvSpPr>
         <p:spPr>
           <a:xfrm>
-            <a:off x="8755380" y="2852928"/>
-            <a:ext cx="2377440" cy="1024128"/>
+            <a:off x="8755380" y="3200400"/>
+            <a:ext cx="2377440" cy="914400"/>
           </a:xfrm>
           <a:prstGeom prst="rect">
             <a:avLst/>
@@ -8509,8 +8692,8 @@
         </p:nvSpPr>
         <p:spPr>
           <a:xfrm>
-            <a:off x="8823960" y="3922776"/>
-            <a:ext cx="2240280" cy="1024128"/>
+            <a:off x="8823960" y="4160520"/>
+            <a:ext cx="2240280" cy="914400"/>
           </a:xfrm>
           <a:custGeom>
             <a:avLst/>
@@ -8519,7 +8702,7 @@
             <a:cxnLst/>
             <a:rect l="l" t="t" r="r" b="b"/>
             <a:pathLst>
-              <a:path w="2240280" h="1024128">
+              <a:path w="2240280" h="914400">
                 <a:moveTo>
                   <a:pt x="0" y="0"/>
                 </a:moveTo>
@@ -8527,10 +8710,10 @@
                   <a:pt x="2240280" y="0"/>
                 </a:lnTo>
                 <a:lnTo>
-                  <a:pt x="1897380" y="1024128"/>
+                  <a:pt x="1897380" y="914400"/>
                 </a:lnTo>
                 <a:lnTo>
-                  <a:pt x="342900" y="1024128"/>
+                  <a:pt x="342900" y="914400"/>
                 </a:lnTo>
                 <a:close/>
               </a:path>
@@ -8561,8 +8744,8 @@
         </p:nvSpPr>
         <p:spPr>
           <a:xfrm>
-            <a:off x="9098280" y="3922776"/>
-            <a:ext cx="1691640" cy="1024128"/>
+            <a:off x="9098280" y="4160520"/>
+            <a:ext cx="1691640" cy="914400"/>
           </a:xfrm>
           <a:prstGeom prst="rect">
             <a:avLst/>
@@ -8603,8 +8786,8 @@
         </p:nvSpPr>
         <p:spPr>
           <a:xfrm>
-            <a:off x="9166860" y="4992624"/>
-            <a:ext cx="1554480" cy="1024128"/>
+            <a:off x="9166860" y="5120640"/>
+            <a:ext cx="1554480" cy="914400"/>
           </a:xfrm>
           <a:custGeom>
             <a:avLst/>
@@ -8613,7 +8796,7 @@
             <a:cxnLst/>
             <a:rect l="l" t="t" r="r" b="b"/>
             <a:pathLst>
-              <a:path w="1554480" h="1024128">
+              <a:path w="1554480" h="914400">
                 <a:moveTo>
                   <a:pt x="0" y="0"/>
                 </a:moveTo>
@@ -8621,10 +8804,10 @@
                   <a:pt x="1554480" y="0"/>
                 </a:lnTo>
                 <a:lnTo>
-                  <a:pt x="1211580" y="1024128"/>
+                  <a:pt x="1211580" y="914400"/>
                 </a:lnTo>
                 <a:lnTo>
-                  <a:pt x="342900" y="1024128"/>
+                  <a:pt x="342900" y="914400"/>
                 </a:lnTo>
                 <a:close/>
               </a:path>
@@ -8655,8 +8838,8 @@
         </p:nvSpPr>
         <p:spPr>
           <a:xfrm>
-            <a:off x="9441180" y="4992624"/>
-            <a:ext cx="1005840" cy="1024128"/>
+            <a:off x="9441180" y="5120640"/>
+            <a:ext cx="1005840" cy="914400"/>
           </a:xfrm>
           <a:prstGeom prst="rect">
             <a:avLst/>
@@ -8700,14 +8883,6 @@
 <file path=ppt/slides/slide13.xml><?xml version="1.0" encoding="utf-8"?>
 <p:sld xmlns:a="http://schemas.openxmlformats.org/drawingml/2006/main" xmlns:p="http://schemas.openxmlformats.org/presentationml/2006/main" xmlns:r="http://schemas.openxmlformats.org/officeDocument/2006/relationships">
   <p:cSld>
-    <p:bg>
-      <p:bgPr>
-        <a:solidFill>
-          <a:srgbClr val="FFFFFF"/>
-        </a:solidFill>
-        <a:effectLst/>
-      </p:bgPr>
-    </p:bg>
     <p:spTree>
       <p:nvGrpSpPr>
         <p:cNvPr id="1" name=""/>
@@ -8717,14 +8892,14 @@
       <p:grpSpPr/>
       <p:sp>
         <p:nvSpPr>
-          <p:cNvPr id="2" name="Rectangle 1"/>
+          <p:cNvPr id="3" name="Rectangle 2"/>
           <p:cNvSpPr/>
           <p:nvPr/>
         </p:nvSpPr>
         <p:spPr>
           <a:xfrm>
-            <a:off x="0" y="0"/>
-            <a:ext cx="6675120" cy="6858000"/>
+            <a:off x="0" y="1097280"/>
+            <a:ext cx="6675120" cy="5760720"/>
           </a:xfrm>
           <a:prstGeom prst="rect">
             <a:avLst/>
@@ -8746,14 +8921,53 @@
       </p:sp>
       <p:sp>
         <p:nvSpPr>
-          <p:cNvPr id="3" name="TextBox 2"/>
+          <p:cNvPr id="2" name="Title 1"/>
+          <p:cNvSpPr>
+            <a:spLocks noGrp="1"/>
+          </p:cNvSpPr>
+          <p:nvPr>
+            <p:ph type="title"/>
+          </p:nvPr>
+        </p:nvSpPr>
+        <p:spPr>
+          <a:xfrm>
+            <a:off x="731520" y="1371600"/>
+            <a:ext cx="5486400" cy="274320"/>
+          </a:xfrm>
+        </p:spPr>
+        <p:txBody>
+          <a:bodyPr wrap="square" lIns="0" rIns="0" tIns="0" bIns="0" anchor="t">
+            <a:noAutofit/>
+          </a:bodyPr>
+          <a:lstStyle/>
+          <a:p>
+            <a:pPr algn="l">
+              <a:lnSpc>
+                <a:spcPct val="100000"/>
+              </a:lnSpc>
+            </a:pPr>
+            <a:r>
+              <a:rPr sz="1500" b="1">
+                <a:solidFill>
+                  <a:srgbClr val="FFFFFF"/>
+                </a:solidFill>
+                <a:latin typeface="Gilroy"/>
+              </a:rPr>
+              <a:t>ФОРМУЛА СИСТЕМЫ</a:t>
+            </a:r>
+          </a:p>
+        </p:txBody>
+      </p:sp>
+      <p:sp>
+        <p:nvSpPr>
+          <p:cNvPr id="4" name="TextBox 3"/>
           <p:cNvSpPr txBox="1"/>
           <p:nvPr/>
         </p:nvSpPr>
         <p:spPr>
           <a:xfrm>
-            <a:off x="731520" y="594360"/>
-            <a:ext cx="5486400" cy="365760"/>
+            <a:off x="731520" y="2011680"/>
+            <a:ext cx="5669280" cy="640080"/>
           </a:xfrm>
           <a:prstGeom prst="rect">
             <a:avLst/>
@@ -8775,26 +8989,26 @@
               </a:spcAft>
             </a:pPr>
             <a:r>
-              <a:rPr sz="1400" b="1" i="0">
+              <a:rPr sz="2700" b="1" i="0">
                 <a:solidFill>
                   <a:srgbClr val="FFFFFF"/>
                 </a:solidFill>
                 <a:latin typeface="Gilroy"/>
               </a:rPr>
-              <a:t>ФОРМУЛА СИСТЕМЫ</a:t>
-            </a:r>
-          </a:p>
-        </p:txBody>
-      </p:sp>
-      <p:sp>
-        <p:nvSpPr>
-          <p:cNvPr id="4" name="TextBox 3"/>
+              <a:t>UGC-КОНТЕНТ</a:t>
+            </a:r>
+          </a:p>
+        </p:txBody>
+      </p:sp>
+      <p:sp>
+        <p:nvSpPr>
+          <p:cNvPr id="5" name="TextBox 4"/>
           <p:cNvSpPr txBox="1"/>
           <p:nvPr/>
         </p:nvSpPr>
         <p:spPr>
           <a:xfrm>
-            <a:off x="731520" y="1828800"/>
+            <a:off x="731520" y="2743200"/>
             <a:ext cx="5669280" cy="640080"/>
           </a:xfrm>
           <a:prstGeom prst="rect">
@@ -8823,20 +9037,20 @@
                 </a:solidFill>
                 <a:latin typeface="Gilroy"/>
               </a:rPr>
-              <a:t>UGC-КОНТЕНТ</a:t>
-            </a:r>
-          </a:p>
-        </p:txBody>
-      </p:sp>
-      <p:sp>
-        <p:nvSpPr>
-          <p:cNvPr id="5" name="TextBox 4"/>
+              <a:t>+ АГЕНТЫ ВЛИЯНИЯ</a:t>
+            </a:r>
+          </a:p>
+        </p:txBody>
+      </p:sp>
+      <p:sp>
+        <p:nvSpPr>
+          <p:cNvPr id="6" name="TextBox 5"/>
           <p:cNvSpPr txBox="1"/>
           <p:nvPr/>
         </p:nvSpPr>
         <p:spPr>
           <a:xfrm>
-            <a:off x="731520" y="2578608"/>
+            <a:off x="731520" y="3474720"/>
             <a:ext cx="5669280" cy="640080"/>
           </a:xfrm>
           <a:prstGeom prst="rect">
@@ -8865,20 +9079,20 @@
                 </a:solidFill>
                 <a:latin typeface="Gilroy"/>
               </a:rPr>
-              <a:t>+ АГЕНТЫ ВЛИЯНИЯ</a:t>
-            </a:r>
-          </a:p>
-        </p:txBody>
-      </p:sp>
-      <p:sp>
-        <p:nvSpPr>
-          <p:cNvPr id="6" name="TextBox 5"/>
+              <a:t>+ ПАРТНЁРСКИЙ ТРАФИК</a:t>
+            </a:r>
+          </a:p>
+        </p:txBody>
+      </p:sp>
+      <p:sp>
+        <p:nvSpPr>
+          <p:cNvPr id="7" name="TextBox 6"/>
           <p:cNvSpPr txBox="1"/>
           <p:nvPr/>
         </p:nvSpPr>
         <p:spPr>
           <a:xfrm>
-            <a:off x="731520" y="3328415"/>
+            <a:off x="731520" y="4206240"/>
             <a:ext cx="5669280" cy="640080"/>
           </a:xfrm>
           <a:prstGeom prst="rect">
@@ -8907,48 +9121,6 @@
                 </a:solidFill>
                 <a:latin typeface="Gilroy"/>
               </a:rPr>
-              <a:t>+ ПАРТНЁРСКИЙ ТРАФИК</a:t>
-            </a:r>
-          </a:p>
-        </p:txBody>
-      </p:sp>
-      <p:sp>
-        <p:nvSpPr>
-          <p:cNvPr id="7" name="TextBox 6"/>
-          <p:cNvSpPr txBox="1"/>
-          <p:nvPr/>
-        </p:nvSpPr>
-        <p:spPr>
-          <a:xfrm>
-            <a:off x="731520" y="4078224"/>
-            <a:ext cx="5669280" cy="640080"/>
-          </a:xfrm>
-          <a:prstGeom prst="rect">
-            <a:avLst/>
-          </a:prstGeom>
-          <a:noFill/>
-        </p:spPr>
-        <p:txBody>
-          <a:bodyPr wrap="square" lIns="0" rIns="0" tIns="0" bIns="0" anchor="t">
-            <a:spAutoFit/>
-          </a:bodyPr>
-          <a:lstStyle/>
-          <a:p>
-            <a:pPr algn="l">
-              <a:lnSpc>
-                <a:spcPct val="105000"/>
-              </a:lnSpc>
-              <a:spcAft>
-                <a:spcPts val="0"/>
-              </a:spcAft>
-            </a:pPr>
-            <a:r>
-              <a:rPr sz="2700" b="1" i="0">
-                <a:solidFill>
-                  <a:srgbClr val="FFFFFF"/>
-                </a:solidFill>
-                <a:latin typeface="Gilroy"/>
-              </a:rPr>
               <a:t>+ CRM</a:t>
             </a:r>
           </a:p>
@@ -8962,7 +9134,7 @@
         </p:nvSpPr>
         <p:spPr>
           <a:xfrm>
-            <a:off x="731520" y="4873752"/>
+            <a:off x="731520" y="4983479"/>
             <a:ext cx="5394960" cy="36576"/>
           </a:xfrm>
           <a:prstGeom prst="rect">
@@ -8991,8 +9163,8 @@
         </p:nvSpPr>
         <p:spPr>
           <a:xfrm>
-            <a:off x="731520" y="5102352"/>
-            <a:ext cx="5669280" cy="1371600"/>
+            <a:off x="731520" y="5212079"/>
+            <a:ext cx="5669280" cy="1188720"/>
           </a:xfrm>
           <a:prstGeom prst="rect">
             <a:avLst/>
@@ -9033,7 +9205,7 @@
         </p:nvSpPr>
         <p:spPr>
           <a:xfrm>
-            <a:off x="7223760" y="594360"/>
+            <a:off x="7223760" y="1371600"/>
             <a:ext cx="4572000" cy="365760"/>
           </a:xfrm>
           <a:prstGeom prst="rect">
@@ -9075,12 +9247,12 @@
         </p:nvSpPr>
         <p:spPr>
           <a:xfrm>
-            <a:off x="7223760" y="1234440"/>
-            <a:ext cx="4526280" cy="1508760"/>
+            <a:off x="7223760" y="1874519"/>
+            <a:ext cx="4526280" cy="1371600"/>
           </a:xfrm>
           <a:prstGeom prst="roundRect">
             <a:avLst>
-              <a:gd name="adj" fmla="val 10909"/>
+              <a:gd name="adj" fmla="val 12000"/>
             </a:avLst>
           </a:prstGeom>
           <a:solidFill>
@@ -9106,7 +9278,7 @@
         </p:nvSpPr>
         <p:spPr>
           <a:xfrm>
-            <a:off x="7452360" y="1371600"/>
+            <a:off x="7452360" y="1965960"/>
             <a:ext cx="914400" cy="1188720"/>
           </a:xfrm>
           <a:prstGeom prst="rect">
@@ -9148,8 +9320,8 @@
         </p:nvSpPr>
         <p:spPr>
           <a:xfrm>
-            <a:off x="8321040" y="1371600"/>
-            <a:ext cx="3246120" cy="1234440"/>
+            <a:off x="8321040" y="1965960"/>
+            <a:ext cx="3246120" cy="1188720"/>
           </a:xfrm>
           <a:prstGeom prst="rect">
             <a:avLst/>
@@ -9190,12 +9362,12 @@
         </p:nvSpPr>
         <p:spPr>
           <a:xfrm>
-            <a:off x="7223760" y="2926080"/>
-            <a:ext cx="4526280" cy="1508760"/>
+            <a:off x="7223760" y="3429000"/>
+            <a:ext cx="4526280" cy="1371600"/>
           </a:xfrm>
           <a:prstGeom prst="roundRect">
             <a:avLst>
-              <a:gd name="adj" fmla="val 10909"/>
+              <a:gd name="adj" fmla="val 12000"/>
             </a:avLst>
           </a:prstGeom>
           <a:solidFill>
@@ -9221,7 +9393,7 @@
         </p:nvSpPr>
         <p:spPr>
           <a:xfrm>
-            <a:off x="7452360" y="3063240"/>
+            <a:off x="7452360" y="3520440"/>
             <a:ext cx="914400" cy="1188720"/>
           </a:xfrm>
           <a:prstGeom prst="rect">
@@ -9263,8 +9435,8 @@
         </p:nvSpPr>
         <p:spPr>
           <a:xfrm>
-            <a:off x="8321040" y="3063240"/>
-            <a:ext cx="3246120" cy="1234440"/>
+            <a:off x="8321040" y="3520440"/>
+            <a:ext cx="3246120" cy="1188720"/>
           </a:xfrm>
           <a:prstGeom prst="rect">
             <a:avLst/>
@@ -9305,12 +9477,12 @@
         </p:nvSpPr>
         <p:spPr>
           <a:xfrm>
-            <a:off x="7223760" y="4617720"/>
-            <a:ext cx="4526280" cy="1508760"/>
+            <a:off x="7223760" y="4983480"/>
+            <a:ext cx="4526280" cy="1371600"/>
           </a:xfrm>
           <a:prstGeom prst="roundRect">
             <a:avLst>
-              <a:gd name="adj" fmla="val 10909"/>
+              <a:gd name="adj" fmla="val 12000"/>
             </a:avLst>
           </a:prstGeom>
           <a:solidFill>
@@ -9336,7 +9508,7 @@
         </p:nvSpPr>
         <p:spPr>
           <a:xfrm>
-            <a:off x="7452360" y="4754880"/>
+            <a:off x="7452360" y="5074920"/>
             <a:ext cx="914400" cy="1188720"/>
           </a:xfrm>
           <a:prstGeom prst="rect">
@@ -9378,8 +9550,8 @@
         </p:nvSpPr>
         <p:spPr>
           <a:xfrm>
-            <a:off x="8321040" y="4754880"/>
-            <a:ext cx="3246120" cy="1234440"/>
+            <a:off x="8321040" y="5074920"/>
+            <a:ext cx="3246120" cy="1188720"/>
           </a:xfrm>
           <a:prstGeom prst="rect">
             <a:avLst/>
@@ -9423,14 +9595,6 @@
 <file path=ppt/slides/slide14.xml><?xml version="1.0" encoding="utf-8"?>
 <p:sld xmlns:a="http://schemas.openxmlformats.org/drawingml/2006/main" xmlns:p="http://schemas.openxmlformats.org/presentationml/2006/main" xmlns:r="http://schemas.openxmlformats.org/officeDocument/2006/relationships">
   <p:cSld>
-    <p:bg>
-      <p:bgPr>
-        <a:solidFill>
-          <a:srgbClr val="1A1A1A"/>
-        </a:solidFill>
-        <a:effectLst/>
-      </p:bgPr>
-    </p:bg>
     <p:spTree>
       <p:nvGrpSpPr>
         <p:cNvPr id="1" name=""/>
@@ -9440,7 +9604,7 @@
       <p:grpSpPr/>
       <p:pic>
         <p:nvPicPr>
-          <p:cNvPr id="2" name="Picture 1" descr="cover_autumn.jpg"/>
+          <p:cNvPr id="3" name="Picture 2" descr="cover_autumn.jpg"/>
           <p:cNvPicPr>
             <a:picLocks noChangeAspect="1"/>
           </p:cNvPicPr>
@@ -9448,15 +9612,15 @@
         </p:nvPicPr>
         <p:blipFill>
           <a:blip r:embed="rId2"/>
-          <a:srcRect t="25" b="25"/>
+          <a:srcRect t="8021" b="8021"/>
           <a:stretch>
             <a:fillRect/>
           </a:stretch>
         </p:blipFill>
         <p:spPr>
           <a:xfrm>
-            <a:off x="0" y="0"/>
-            <a:ext cx="12191695" cy="6858000"/>
+            <a:off x="0" y="1097280"/>
+            <a:ext cx="12191695" cy="5760720"/>
           </a:xfrm>
           <a:prstGeom prst="rect">
             <a:avLst/>
@@ -9465,14 +9629,14 @@
       </p:pic>
       <p:sp>
         <p:nvSpPr>
-          <p:cNvPr id="3" name="Rectangle 2"/>
+          <p:cNvPr id="4" name="Rectangle 3"/>
           <p:cNvSpPr/>
           <p:nvPr/>
         </p:nvSpPr>
         <p:spPr>
           <a:xfrm>
-            <a:off x="0" y="0"/>
-            <a:ext cx="12191695" cy="6858000"/>
+            <a:off x="0" y="1097280"/>
+            <a:ext cx="12191695" cy="5760720"/>
           </a:xfrm>
           <a:prstGeom prst="rect">
             <a:avLst/>
@@ -9496,7 +9660,7 @@
       </p:sp>
       <p:pic>
         <p:nvPicPr>
-          <p:cNvPr id="4" name="Picture 3" descr="logo_white.png"/>
+          <p:cNvPr id="5" name="Picture 4" descr="logo_white.png"/>
           <p:cNvPicPr>
             <a:picLocks noChangeAspect="1"/>
           </p:cNvPicPr>
@@ -9510,8 +9674,8 @@
         </p:blipFill>
         <p:spPr>
           <a:xfrm>
-            <a:off x="640080" y="502920"/>
-            <a:ext cx="2468880" cy="968188"/>
+            <a:off x="640080" y="1371600"/>
+            <a:ext cx="2103120" cy="824752"/>
           </a:xfrm>
           <a:prstGeom prst="rect">
             <a:avLst/>
@@ -9520,13 +9684,13 @@
       </p:pic>
       <p:sp>
         <p:nvSpPr>
-          <p:cNvPr id="5" name="Rectangle 4"/>
+          <p:cNvPr id="6" name="Rectangle 5"/>
           <p:cNvSpPr/>
           <p:nvPr/>
         </p:nvSpPr>
         <p:spPr>
           <a:xfrm>
-            <a:off x="640080" y="1600200"/>
+            <a:off x="3200400" y="1463040"/>
             <a:ext cx="64008" cy="548640"/>
           </a:xfrm>
           <a:prstGeom prst="rect">
@@ -9549,36 +9713,33 @@
       </p:sp>
       <p:sp>
         <p:nvSpPr>
-          <p:cNvPr id="6" name="TextBox 5"/>
-          <p:cNvSpPr txBox="1"/>
-          <p:nvPr/>
-        </p:nvSpPr>
-        <p:spPr>
-          <a:xfrm>
-            <a:off x="868680" y="1554480"/>
-            <a:ext cx="10058400" cy="640080"/>
-          </a:xfrm>
-          <a:prstGeom prst="rect">
-            <a:avLst/>
-          </a:prstGeom>
-          <a:noFill/>
-        </p:spPr>
-        <p:txBody>
-          <a:bodyPr wrap="square" lIns="0" rIns="0" tIns="0" bIns="0" anchor="ctr">
-            <a:spAutoFit/>
+          <p:cNvPr id="2" name="Title 1"/>
+          <p:cNvSpPr>
+            <a:spLocks noGrp="1"/>
+          </p:cNvSpPr>
+          <p:nvPr>
+            <p:ph type="title"/>
+          </p:nvPr>
+        </p:nvSpPr>
+        <p:spPr>
+          <a:xfrm>
+            <a:off x="3429000" y="1463040"/>
+            <a:ext cx="7772400" cy="502920"/>
+          </a:xfrm>
+        </p:spPr>
+        <p:txBody>
+          <a:bodyPr wrap="square" lIns="0" rIns="0" tIns="0" bIns="0" anchor="t">
+            <a:noAutofit/>
           </a:bodyPr>
           <a:lstStyle/>
           <a:p>
             <a:pPr algn="l">
               <a:lnSpc>
-                <a:spcPct val="105000"/>
-              </a:lnSpc>
-              <a:spcAft>
-                <a:spcPts val="0"/>
-              </a:spcAft>
-            </a:pPr>
-            <a:r>
-              <a:rPr sz="3200" b="1" i="0">
+                <a:spcPct val="100000"/>
+              </a:lnSpc>
+            </a:pPr>
+            <a:r>
+              <a:rPr sz="3000" b="1">
                 <a:solidFill>
                   <a:srgbClr val="FFFFFF"/>
                 </a:solidFill>
@@ -9597,12 +9758,12 @@
         </p:nvSpPr>
         <p:spPr>
           <a:xfrm>
-            <a:off x="1463040" y="2514600"/>
-            <a:ext cx="3657600" cy="3657600"/>
+            <a:off x="1737360" y="2606040"/>
+            <a:ext cx="3108960" cy="3108960"/>
           </a:xfrm>
           <a:prstGeom prst="roundRect">
             <a:avLst>
-              <a:gd name="adj" fmla="val 4500"/>
+              <a:gd name="adj" fmla="val 5294"/>
             </a:avLst>
           </a:prstGeom>
           <a:solidFill>
@@ -9628,12 +9789,12 @@
         </p:nvSpPr>
         <p:spPr>
           <a:xfrm>
-            <a:off x="1737360" y="2788920"/>
-            <a:ext cx="3108960" cy="3108960"/>
+            <a:off x="1965960" y="2834640"/>
+            <a:ext cx="2651760" cy="2651760"/>
           </a:xfrm>
           <a:prstGeom prst="roundRect">
             <a:avLst>
-              <a:gd name="adj" fmla="val 2352"/>
+              <a:gd name="adj" fmla="val 2758"/>
             </a:avLst>
           </a:prstGeom>
           <a:noFill/>
@@ -9660,8 +9821,8 @@
         </p:nvSpPr>
         <p:spPr>
           <a:xfrm>
-            <a:off x="1737360" y="2788920"/>
-            <a:ext cx="3108960" cy="3108960"/>
+            <a:off x="1965960" y="2834640"/>
+            <a:ext cx="2651760" cy="2651760"/>
           </a:xfrm>
           <a:prstGeom prst="rect">
             <a:avLst/>
@@ -9721,12 +9882,12 @@
         </p:nvSpPr>
         <p:spPr>
           <a:xfrm>
-            <a:off x="7086600" y="2514600"/>
-            <a:ext cx="3657600" cy="3657600"/>
+            <a:off x="7342631" y="2606040"/>
+            <a:ext cx="3108960" cy="3108960"/>
           </a:xfrm>
           <a:prstGeom prst="roundRect">
             <a:avLst>
-              <a:gd name="adj" fmla="val 4500"/>
+              <a:gd name="adj" fmla="val 5294"/>
             </a:avLst>
           </a:prstGeom>
           <a:solidFill>
@@ -9760,8 +9921,8 @@
         </p:blipFill>
         <p:spPr>
           <a:xfrm>
-            <a:off x="7360920" y="2788920"/>
-            <a:ext cx="3108960" cy="3108960"/>
+            <a:off x="7571231" y="2834640"/>
+            <a:ext cx="2651760" cy="2651760"/>
           </a:xfrm>
           <a:prstGeom prst="rect">
             <a:avLst/>
@@ -9776,8 +9937,8 @@
         </p:nvSpPr>
         <p:spPr>
           <a:xfrm>
-            <a:off x="1097280" y="6309360"/>
-            <a:ext cx="4389120" cy="502920"/>
+            <a:off x="914400" y="5897880"/>
+            <a:ext cx="4754880" cy="685800"/>
           </a:xfrm>
           <a:prstGeom prst="rect">
             <a:avLst/>
@@ -9837,8 +9998,8 @@
         </p:nvSpPr>
         <p:spPr>
           <a:xfrm>
-            <a:off x="6720840" y="6309360"/>
-            <a:ext cx="4389120" cy="502920"/>
+            <a:off x="6519672" y="5897880"/>
+            <a:ext cx="4754880" cy="685800"/>
           </a:xfrm>
           <a:prstGeom prst="rect">
             <a:avLst/>
@@ -9901,14 +10062,6 @@
 <file path=ppt/slides/slide2.xml><?xml version="1.0" encoding="utf-8"?>
 <p:sld xmlns:a="http://schemas.openxmlformats.org/drawingml/2006/main" xmlns:p="http://schemas.openxmlformats.org/presentationml/2006/main" xmlns:r="http://schemas.openxmlformats.org/officeDocument/2006/relationships">
   <p:cSld>
-    <p:bg>
-      <p:bgPr>
-        <a:solidFill>
-          <a:srgbClr val="FFFFFF"/>
-        </a:solidFill>
-        <a:effectLst/>
-      </p:bgPr>
-    </p:bg>
     <p:spTree>
       <p:nvGrpSpPr>
         <p:cNvPr id="1" name=""/>
@@ -9918,14 +10071,14 @@
       <p:grpSpPr/>
       <p:sp>
         <p:nvSpPr>
-          <p:cNvPr id="2" name="TextBox 1"/>
+          <p:cNvPr id="3" name="TextBox 2"/>
           <p:cNvSpPr txBox="1"/>
           <p:nvPr/>
         </p:nvSpPr>
         <p:spPr>
           <a:xfrm>
-            <a:off x="822960" y="164592"/>
-            <a:ext cx="5760720" cy="274320"/>
+            <a:off x="822960" y="1124712"/>
+            <a:ext cx="5760720" cy="256032"/>
           </a:xfrm>
           <a:prstGeom prst="rect">
             <a:avLst/>
@@ -9960,14 +10113,14 @@
       </p:sp>
       <p:sp>
         <p:nvSpPr>
-          <p:cNvPr id="3" name="Rectangle 2"/>
+          <p:cNvPr id="4" name="Rectangle 3"/>
           <p:cNvSpPr/>
           <p:nvPr/>
         </p:nvSpPr>
         <p:spPr>
           <a:xfrm>
-            <a:off x="566928" y="521207"/>
-            <a:ext cx="64008" cy="1014984"/>
+            <a:off x="566928" y="1389888"/>
+            <a:ext cx="64008" cy="954024"/>
           </a:xfrm>
           <a:prstGeom prst="rect">
             <a:avLst/>
@@ -9989,23 +10142,23 @@
       </p:sp>
       <p:sp>
         <p:nvSpPr>
-          <p:cNvPr id="4" name="TextBox 3"/>
-          <p:cNvSpPr txBox="1"/>
-          <p:nvPr/>
-        </p:nvSpPr>
-        <p:spPr>
-          <a:xfrm>
-            <a:off x="822960" y="548640"/>
-            <a:ext cx="5760720" cy="960120"/>
-          </a:xfrm>
-          <a:prstGeom prst="rect">
-            <a:avLst/>
-          </a:prstGeom>
-          <a:noFill/>
+          <p:cNvPr id="2" name="Title 1"/>
+          <p:cNvSpPr>
+            <a:spLocks noGrp="1"/>
+          </p:cNvSpPr>
+          <p:nvPr>
+            <p:ph type="title"/>
+          </p:nvPr>
+        </p:nvSpPr>
+        <p:spPr>
+          <a:xfrm>
+            <a:off x="822960" y="1417320"/>
+            <a:ext cx="5760720" cy="899160"/>
+          </a:xfrm>
         </p:spPr>
         <p:txBody>
           <a:bodyPr wrap="square" lIns="0" rIns="0" tIns="0" bIns="0" anchor="t">
-            <a:spAutoFit/>
+            <a:noAutofit/>
           </a:bodyPr>
           <a:lstStyle/>
           <a:p>
@@ -10013,12 +10166,9 @@
               <a:lnSpc>
                 <a:spcPct val="100000"/>
               </a:lnSpc>
-              <a:spcAft>
-                <a:spcPts val="0"/>
-              </a:spcAft>
-            </a:pPr>
-            <a:r>
-              <a:rPr sz="3000" b="1" i="0">
+            </a:pPr>
+            <a:r>
+              <a:rPr sz="2800" b="1">
                 <a:solidFill>
                   <a:srgbClr val="1A1A1A"/>
                 </a:solidFill>
@@ -10037,12 +10187,12 @@
         </p:nvSpPr>
         <p:spPr>
           <a:xfrm>
-            <a:off x="548640" y="1965960"/>
-            <a:ext cx="5989320" cy="1097280"/>
+            <a:off x="548640" y="2606040"/>
+            <a:ext cx="5989320" cy="960120"/>
           </a:xfrm>
           <a:prstGeom prst="roundRect">
             <a:avLst>
-              <a:gd name="adj" fmla="val 13333"/>
+              <a:gd name="adj" fmla="val 15238"/>
             </a:avLst>
           </a:prstGeom>
           <a:solidFill>
@@ -10068,12 +10218,12 @@
         </p:nvSpPr>
         <p:spPr>
           <a:xfrm>
-            <a:off x="548640" y="1965960"/>
-            <a:ext cx="1737360" cy="1097280"/>
+            <a:off x="548640" y="2606040"/>
+            <a:ext cx="1737360" cy="960120"/>
           </a:xfrm>
           <a:prstGeom prst="roundRect">
             <a:avLst>
-              <a:gd name="adj" fmla="val 13333"/>
+              <a:gd name="adj" fmla="val 15238"/>
             </a:avLst>
           </a:prstGeom>
           <a:solidFill>
@@ -10099,8 +10249,8 @@
         </p:nvSpPr>
         <p:spPr>
           <a:xfrm>
-            <a:off x="548640" y="1965960"/>
-            <a:ext cx="1737360" cy="1097280"/>
+            <a:off x="548640" y="2606040"/>
+            <a:ext cx="1737360" cy="960120"/>
           </a:xfrm>
           <a:prstGeom prst="rect">
             <a:avLst/>
@@ -10141,8 +10291,8 @@
         </p:nvSpPr>
         <p:spPr>
           <a:xfrm>
-            <a:off x="2514600" y="2103120"/>
-            <a:ext cx="3840480" cy="822960"/>
+            <a:off x="2514600" y="2697480"/>
+            <a:ext cx="3840480" cy="777240"/>
           </a:xfrm>
           <a:prstGeom prst="rect">
             <a:avLst/>
@@ -10202,12 +10352,12 @@
         </p:nvSpPr>
         <p:spPr>
           <a:xfrm>
-            <a:off x="548640" y="3227832"/>
-            <a:ext cx="5989320" cy="1097280"/>
+            <a:off x="548640" y="3703320"/>
+            <a:ext cx="5989320" cy="960120"/>
           </a:xfrm>
           <a:prstGeom prst="roundRect">
             <a:avLst>
-              <a:gd name="adj" fmla="val 13333"/>
+              <a:gd name="adj" fmla="val 15238"/>
             </a:avLst>
           </a:prstGeom>
           <a:solidFill>
@@ -10233,12 +10383,12 @@
         </p:nvSpPr>
         <p:spPr>
           <a:xfrm>
-            <a:off x="548640" y="3227832"/>
-            <a:ext cx="1737360" cy="1097280"/>
+            <a:off x="548640" y="3703320"/>
+            <a:ext cx="1737360" cy="960120"/>
           </a:xfrm>
           <a:prstGeom prst="roundRect">
             <a:avLst>
-              <a:gd name="adj" fmla="val 13333"/>
+              <a:gd name="adj" fmla="val 15238"/>
             </a:avLst>
           </a:prstGeom>
           <a:solidFill>
@@ -10264,8 +10414,8 @@
         </p:nvSpPr>
         <p:spPr>
           <a:xfrm>
-            <a:off x="548640" y="3227832"/>
-            <a:ext cx="1737360" cy="1097280"/>
+            <a:off x="548640" y="3703320"/>
+            <a:ext cx="1737360" cy="960120"/>
           </a:xfrm>
           <a:prstGeom prst="rect">
             <a:avLst/>
@@ -10306,8 +10456,8 @@
         </p:nvSpPr>
         <p:spPr>
           <a:xfrm>
-            <a:off x="2514600" y="3364991"/>
-            <a:ext cx="3840480" cy="822960"/>
+            <a:off x="2514600" y="3794759"/>
+            <a:ext cx="3840480" cy="777240"/>
           </a:xfrm>
           <a:prstGeom prst="rect">
             <a:avLst/>
@@ -10367,12 +10517,12 @@
         </p:nvSpPr>
         <p:spPr>
           <a:xfrm>
-            <a:off x="548640" y="4489704"/>
-            <a:ext cx="5989320" cy="1097280"/>
+            <a:off x="548640" y="4800600"/>
+            <a:ext cx="5989320" cy="960120"/>
           </a:xfrm>
           <a:prstGeom prst="roundRect">
             <a:avLst>
-              <a:gd name="adj" fmla="val 13333"/>
+              <a:gd name="adj" fmla="val 15238"/>
             </a:avLst>
           </a:prstGeom>
           <a:solidFill>
@@ -10398,12 +10548,12 @@
         </p:nvSpPr>
         <p:spPr>
           <a:xfrm>
-            <a:off x="548640" y="4489704"/>
-            <a:ext cx="1737360" cy="1097280"/>
+            <a:off x="548640" y="4800600"/>
+            <a:ext cx="1737360" cy="960120"/>
           </a:xfrm>
           <a:prstGeom prst="roundRect">
             <a:avLst>
-              <a:gd name="adj" fmla="val 13333"/>
+              <a:gd name="adj" fmla="val 15238"/>
             </a:avLst>
           </a:prstGeom>
           <a:solidFill>
@@ -10429,8 +10579,8 @@
         </p:nvSpPr>
         <p:spPr>
           <a:xfrm>
-            <a:off x="548640" y="4489704"/>
-            <a:ext cx="1737360" cy="1097280"/>
+            <a:off x="548640" y="4800600"/>
+            <a:ext cx="1737360" cy="960120"/>
           </a:xfrm>
           <a:prstGeom prst="rect">
             <a:avLst/>
@@ -10471,8 +10621,8 @@
         </p:nvSpPr>
         <p:spPr>
           <a:xfrm>
-            <a:off x="2514600" y="4626864"/>
-            <a:ext cx="3840480" cy="822960"/>
+            <a:off x="2514600" y="4892040"/>
+            <a:ext cx="3840480" cy="777240"/>
           </a:xfrm>
           <a:prstGeom prst="rect">
             <a:avLst/>
@@ -10532,12 +10682,12 @@
         </p:nvSpPr>
         <p:spPr>
           <a:xfrm>
-            <a:off x="548640" y="5806440"/>
-            <a:ext cx="5989320" cy="685800"/>
+            <a:off x="548640" y="5943600"/>
+            <a:ext cx="5989320" cy="640080"/>
           </a:xfrm>
           <a:prstGeom prst="roundRect">
             <a:avLst>
-              <a:gd name="adj" fmla="val 16000"/>
+              <a:gd name="adj" fmla="val 17142"/>
             </a:avLst>
           </a:prstGeom>
           <a:solidFill>
@@ -10563,8 +10713,8 @@
         </p:nvSpPr>
         <p:spPr>
           <a:xfrm>
-            <a:off x="777240" y="5806440"/>
-            <a:ext cx="5577840" cy="685800"/>
+            <a:off x="777240" y="5943600"/>
+            <a:ext cx="5577840" cy="640080"/>
           </a:xfrm>
           <a:prstGeom prst="rect">
             <a:avLst/>
@@ -10586,7 +10736,7 @@
               </a:spcAft>
             </a:pPr>
             <a:r>
-              <a:rPr sz="1450" b="1" i="0">
+              <a:rPr sz="1400" b="1" i="0">
                 <a:solidFill>
                   <a:srgbClr val="FFFFFF"/>
                 </a:solidFill>
@@ -10607,15 +10757,15 @@
         </p:nvPicPr>
         <p:blipFill>
           <a:blip r:embed="rId2"/>
-          <a:srcRect l="27445" r="27445"/>
+          <a:srcRect l="24960" r="24960"/>
           <a:stretch>
             <a:fillRect/>
           </a:stretch>
         </p:blipFill>
         <p:spPr>
           <a:xfrm>
-            <a:off x="6903720" y="502920"/>
-            <a:ext cx="4800600" cy="5989320"/>
+            <a:off x="6903720" y="1188720"/>
+            <a:ext cx="4800600" cy="5394960"/>
           </a:xfrm>
           <a:prstGeom prst="rect">
             <a:avLst/>
@@ -10630,8 +10780,8 @@
         </p:nvSpPr>
         <p:spPr>
           <a:xfrm>
-            <a:off x="6903720" y="502920"/>
-            <a:ext cx="4800600" cy="5989320"/>
+            <a:off x="6903720" y="1188720"/>
+            <a:ext cx="4800600" cy="5394960"/>
           </a:xfrm>
           <a:prstGeom prst="rect">
             <a:avLst/>
@@ -10662,14 +10812,6 @@
 <file path=ppt/slides/slide3.xml><?xml version="1.0" encoding="utf-8"?>
 <p:sld xmlns:a="http://schemas.openxmlformats.org/drawingml/2006/main" xmlns:p="http://schemas.openxmlformats.org/presentationml/2006/main" xmlns:r="http://schemas.openxmlformats.org/officeDocument/2006/relationships">
   <p:cSld>
-    <p:bg>
-      <p:bgPr>
-        <a:solidFill>
-          <a:srgbClr val="E72F2A"/>
-        </a:solidFill>
-        <a:effectLst/>
-      </p:bgPr>
-    </p:bg>
     <p:spTree>
       <p:nvGrpSpPr>
         <p:cNvPr id="1" name=""/>
@@ -10679,14 +10821,43 @@
       <p:grpSpPr/>
       <p:sp>
         <p:nvSpPr>
-          <p:cNvPr id="2" name="Rectangle 1"/>
+          <p:cNvPr id="3" name="Rectangle 2"/>
           <p:cNvSpPr/>
           <p:nvPr/>
         </p:nvSpPr>
         <p:spPr>
           <a:xfrm>
-            <a:off x="566928" y="521207"/>
-            <a:ext cx="64008" cy="1075944"/>
+            <a:off x="0" y="1097280"/>
+            <a:ext cx="12191695" cy="5760720"/>
+          </a:xfrm>
+          <a:prstGeom prst="rect">
+            <a:avLst/>
+          </a:prstGeom>
+          <a:solidFill>
+            <a:srgbClr val="E72F2A"/>
+          </a:solidFill>
+          <a:ln>
+            <a:noFill/>
+          </a:ln>
+        </p:spPr>
+        <p:txBody>
+          <a:bodyPr rtlCol="0" anchor="ctr"/>
+          <a:lstStyle/>
+          <a:p>
+            <a:pPr algn="ctr"/>
+          </a:p>
+        </p:txBody>
+      </p:sp>
+      <p:sp>
+        <p:nvSpPr>
+          <p:cNvPr id="4" name="Rectangle 3"/>
+          <p:cNvSpPr/>
+          <p:nvPr/>
+        </p:nvSpPr>
+        <p:spPr>
+          <a:xfrm>
+            <a:off x="566928" y="1389888"/>
+            <a:ext cx="64008" cy="557784"/>
           </a:xfrm>
           <a:prstGeom prst="rect">
             <a:avLst/>
@@ -10708,23 +10879,23 @@
       </p:sp>
       <p:sp>
         <p:nvSpPr>
-          <p:cNvPr id="3" name="TextBox 2"/>
-          <p:cNvSpPr txBox="1"/>
-          <p:nvPr/>
-        </p:nvSpPr>
-        <p:spPr>
-          <a:xfrm>
-            <a:off x="822960" y="548640"/>
-            <a:ext cx="10424160" cy="1021080"/>
-          </a:xfrm>
-          <a:prstGeom prst="rect">
-            <a:avLst/>
-          </a:prstGeom>
-          <a:noFill/>
+          <p:cNvPr id="2" name="Title 1"/>
+          <p:cNvSpPr>
+            <a:spLocks noGrp="1"/>
+          </p:cNvSpPr>
+          <p:nvPr>
+            <p:ph type="title"/>
+          </p:nvPr>
+        </p:nvSpPr>
+        <p:spPr>
+          <a:xfrm>
+            <a:off x="822960" y="1417320"/>
+            <a:ext cx="10424160" cy="502920"/>
+          </a:xfrm>
         </p:spPr>
         <p:txBody>
           <a:bodyPr wrap="square" lIns="0" rIns="0" tIns="0" bIns="0" anchor="t">
-            <a:spAutoFit/>
+            <a:noAutofit/>
           </a:bodyPr>
           <a:lstStyle/>
           <a:p>
@@ -10732,12 +10903,9 @@
               <a:lnSpc>
                 <a:spcPct val="100000"/>
               </a:lnSpc>
-              <a:spcAft>
-                <a:spcPts val="0"/>
-              </a:spcAft>
-            </a:pPr>
-            <a:r>
-              <a:rPr sz="3200" b="1" i="0">
+            </a:pPr>
+            <a:r>
+              <a:rPr sz="3000" b="1">
                 <a:solidFill>
                   <a:srgbClr val="FFFFFF"/>
                 </a:solidFill>
@@ -10750,14 +10918,14 @@
       </p:sp>
       <p:sp>
         <p:nvSpPr>
-          <p:cNvPr id="4" name="Oval 3"/>
+          <p:cNvPr id="5" name="Oval 4"/>
           <p:cNvSpPr/>
           <p:nvPr/>
         </p:nvSpPr>
         <p:spPr>
           <a:xfrm>
-            <a:off x="2148840" y="1737360"/>
-            <a:ext cx="2743200" cy="2743200"/>
+            <a:off x="2926080" y="2286000"/>
+            <a:ext cx="2286000" cy="2286000"/>
           </a:xfrm>
           <a:prstGeom prst="ellipse">
             <a:avLst/>
@@ -10783,14 +10951,14 @@
       </p:sp>
       <p:sp>
         <p:nvSpPr>
-          <p:cNvPr id="5" name="TextBox 4"/>
+          <p:cNvPr id="6" name="TextBox 5"/>
           <p:cNvSpPr txBox="1"/>
           <p:nvPr/>
         </p:nvSpPr>
         <p:spPr>
           <a:xfrm>
-            <a:off x="2148840" y="1737360"/>
-            <a:ext cx="2743200" cy="2743200"/>
+            <a:off x="2926080" y="2286000"/>
+            <a:ext cx="2286000" cy="2286000"/>
           </a:xfrm>
           <a:prstGeom prst="rect">
             <a:avLst/>
@@ -10812,7 +10980,7 @@
               </a:spcAft>
             </a:pPr>
             <a:r>
-              <a:rPr sz="1900" b="1" i="0">
+              <a:rPr sz="1800" b="1" i="0">
                 <a:solidFill>
                   <a:srgbClr val="FFFFFF"/>
                 </a:solidFill>
@@ -10831,7 +10999,7 @@
               </a:spcAft>
             </a:pPr>
             <a:r>
-              <a:rPr sz="1900" b="1" i="0">
+              <a:rPr sz="1800" b="1" i="0">
                 <a:solidFill>
                   <a:srgbClr val="FFFFFF"/>
                 </a:solidFill>
@@ -10844,14 +11012,14 @@
       </p:sp>
       <p:sp>
         <p:nvSpPr>
-          <p:cNvPr id="6" name="Oval 5"/>
+          <p:cNvPr id="7" name="Oval 6"/>
           <p:cNvSpPr/>
           <p:nvPr/>
         </p:nvSpPr>
         <p:spPr>
           <a:xfrm>
-            <a:off x="4709160" y="1737360"/>
-            <a:ext cx="2743200" cy="2743200"/>
+            <a:off x="4937760" y="2286000"/>
+            <a:ext cx="2286000" cy="2286000"/>
           </a:xfrm>
           <a:prstGeom prst="ellipse">
             <a:avLst/>
@@ -10877,14 +11045,14 @@
       </p:sp>
       <p:sp>
         <p:nvSpPr>
-          <p:cNvPr id="7" name="TextBox 6"/>
+          <p:cNvPr id="8" name="TextBox 7"/>
           <p:cNvSpPr txBox="1"/>
           <p:nvPr/>
         </p:nvSpPr>
         <p:spPr>
           <a:xfrm>
-            <a:off x="4709160" y="1737360"/>
-            <a:ext cx="2743200" cy="2743200"/>
+            <a:off x="4937760" y="2286000"/>
+            <a:ext cx="2286000" cy="2286000"/>
           </a:xfrm>
           <a:prstGeom prst="rect">
             <a:avLst/>
@@ -10906,7 +11074,7 @@
               </a:spcAft>
             </a:pPr>
             <a:r>
-              <a:rPr sz="1900" b="1" i="0">
+              <a:rPr sz="1800" b="1" i="0">
                 <a:solidFill>
                   <a:srgbClr val="FFFFFF"/>
                 </a:solidFill>
@@ -10925,7 +11093,7 @@
               </a:spcAft>
             </a:pPr>
             <a:r>
-              <a:rPr sz="1900" b="1" i="0">
+              <a:rPr sz="1800" b="1" i="0">
                 <a:solidFill>
                   <a:srgbClr val="FFFFFF"/>
                 </a:solidFill>
@@ -10938,14 +11106,14 @@
       </p:sp>
       <p:sp>
         <p:nvSpPr>
-          <p:cNvPr id="8" name="Oval 7"/>
+          <p:cNvPr id="9" name="Oval 8"/>
           <p:cNvSpPr/>
           <p:nvPr/>
         </p:nvSpPr>
         <p:spPr>
           <a:xfrm>
-            <a:off x="7269480" y="1737360"/>
-            <a:ext cx="2743200" cy="2743200"/>
+            <a:off x="6949440" y="2286000"/>
+            <a:ext cx="2286000" cy="2286000"/>
           </a:xfrm>
           <a:prstGeom prst="ellipse">
             <a:avLst/>
@@ -10971,14 +11139,14 @@
       </p:sp>
       <p:sp>
         <p:nvSpPr>
-          <p:cNvPr id="9" name="TextBox 8"/>
+          <p:cNvPr id="10" name="TextBox 9"/>
           <p:cNvSpPr txBox="1"/>
           <p:nvPr/>
         </p:nvSpPr>
         <p:spPr>
           <a:xfrm>
-            <a:off x="7269480" y="1737360"/>
-            <a:ext cx="2743200" cy="2743200"/>
+            <a:off x="6949440" y="2286000"/>
+            <a:ext cx="2286000" cy="2286000"/>
           </a:xfrm>
           <a:prstGeom prst="rect">
             <a:avLst/>
@@ -11000,7 +11168,7 @@
               </a:spcAft>
             </a:pPr>
             <a:r>
-              <a:rPr sz="1900" b="1" i="0">
+              <a:rPr sz="1800" b="1" i="0">
                 <a:solidFill>
                   <a:srgbClr val="FFFFFF"/>
                 </a:solidFill>
@@ -11019,7 +11187,7 @@
               </a:spcAft>
             </a:pPr>
             <a:r>
-              <a:rPr sz="1900" b="1" i="0">
+              <a:rPr sz="1800" b="1" i="0">
                 <a:solidFill>
                   <a:srgbClr val="FFFFFF"/>
                 </a:solidFill>
@@ -11032,14 +11200,14 @@
       </p:sp>
       <p:sp>
         <p:nvSpPr>
-          <p:cNvPr id="10" name="Freeform 9"/>
+          <p:cNvPr id="11" name="Freeform 10"/>
           <p:cNvSpPr/>
           <p:nvPr/>
         </p:nvSpPr>
         <p:spPr>
           <a:xfrm>
-            <a:off x="3657600" y="4526280"/>
-            <a:ext cx="4846320" cy="640080"/>
+            <a:off x="3794760" y="4617720"/>
+            <a:ext cx="4572000" cy="548640"/>
           </a:xfrm>
           <a:custGeom>
             <a:avLst/>
@@ -11048,18 +11216,18 @@
             <a:cxnLst/>
             <a:rect l="l" t="t" r="r" b="b"/>
             <a:pathLst>
-              <a:path w="4846320" h="640080">
+              <a:path w="4572000" h="548640">
                 <a:moveTo>
                   <a:pt x="0" y="0"/>
                 </a:moveTo>
                 <a:lnTo>
-                  <a:pt x="4846320" y="0"/>
+                  <a:pt x="4572000" y="0"/>
                 </a:lnTo>
                 <a:lnTo>
-                  <a:pt x="3429000" y="640080"/>
+                  <a:pt x="3246120" y="548640"/>
                 </a:lnTo>
                 <a:lnTo>
-                  <a:pt x="1417320" y="640080"/>
+                  <a:pt x="1325880" y="548640"/>
                 </a:lnTo>
                 <a:close/>
               </a:path>
@@ -11082,14 +11250,14 @@
       </p:sp>
       <p:sp>
         <p:nvSpPr>
-          <p:cNvPr id="11" name="TextBox 10"/>
+          <p:cNvPr id="12" name="TextBox 11"/>
           <p:cNvSpPr txBox="1"/>
           <p:nvPr/>
         </p:nvSpPr>
         <p:spPr>
           <a:xfrm>
-            <a:off x="5074920" y="4590288"/>
-            <a:ext cx="2011680" cy="548640"/>
+            <a:off x="5120640" y="4645152"/>
+            <a:ext cx="1920240" cy="502920"/>
           </a:xfrm>
           <a:prstGeom prst="rect">
             <a:avLst/>
@@ -11124,14 +11292,14 @@
       </p:sp>
       <p:sp>
         <p:nvSpPr>
-          <p:cNvPr id="12" name="TextBox 11"/>
+          <p:cNvPr id="13" name="TextBox 12"/>
           <p:cNvSpPr txBox="1"/>
           <p:nvPr/>
         </p:nvSpPr>
         <p:spPr>
           <a:xfrm>
-            <a:off x="822960" y="5440680"/>
-            <a:ext cx="10515600" cy="548640"/>
+            <a:off x="822960" y="5349240"/>
+            <a:ext cx="10515600" cy="502920"/>
           </a:xfrm>
           <a:prstGeom prst="rect">
             <a:avLst/>
@@ -11166,13 +11334,13 @@
       </p:sp>
       <p:sp>
         <p:nvSpPr>
-          <p:cNvPr id="13" name="TextBox 12"/>
+          <p:cNvPr id="14" name="TextBox 13"/>
           <p:cNvSpPr txBox="1"/>
           <p:nvPr/>
         </p:nvSpPr>
         <p:spPr>
           <a:xfrm>
-            <a:off x="822960" y="6126480"/>
+            <a:off x="822960" y="5989320"/>
             <a:ext cx="10515600" cy="365760"/>
           </a:xfrm>
           <a:prstGeom prst="rect">
@@ -11217,14 +11385,6 @@
 <file path=ppt/slides/slide4.xml><?xml version="1.0" encoding="utf-8"?>
 <p:sld xmlns:a="http://schemas.openxmlformats.org/drawingml/2006/main" xmlns:p="http://schemas.openxmlformats.org/presentationml/2006/main" xmlns:r="http://schemas.openxmlformats.org/officeDocument/2006/relationships">
   <p:cSld>
-    <p:bg>
-      <p:bgPr>
-        <a:solidFill>
-          <a:srgbClr val="FFFFFF"/>
-        </a:solidFill>
-        <a:effectLst/>
-      </p:bgPr>
-    </p:bg>
     <p:spTree>
       <p:nvGrpSpPr>
         <p:cNvPr id="1" name=""/>
@@ -11234,14 +11394,14 @@
       <p:grpSpPr/>
       <p:sp>
         <p:nvSpPr>
-          <p:cNvPr id="2" name="Rectangle 1"/>
+          <p:cNvPr id="3" name="Rectangle 2"/>
           <p:cNvSpPr/>
           <p:nvPr/>
         </p:nvSpPr>
         <p:spPr>
           <a:xfrm>
-            <a:off x="0" y="0"/>
-            <a:ext cx="3749039" cy="6858000"/>
+            <a:off x="0" y="1097280"/>
+            <a:ext cx="3749039" cy="5760720"/>
           </a:xfrm>
           <a:prstGeom prst="rect">
             <a:avLst/>
@@ -11263,14 +11423,14 @@
       </p:sp>
       <p:sp>
         <p:nvSpPr>
-          <p:cNvPr id="3" name="Rectangle 2"/>
+          <p:cNvPr id="4" name="Rectangle 3"/>
           <p:cNvSpPr/>
           <p:nvPr/>
         </p:nvSpPr>
         <p:spPr>
           <a:xfrm>
-            <a:off x="548640" y="685800"/>
-            <a:ext cx="64008" cy="1737360"/>
+            <a:off x="548640" y="1691640"/>
+            <a:ext cx="64008" cy="1280160"/>
           </a:xfrm>
           <a:prstGeom prst="rect">
             <a:avLst/>
@@ -11292,13 +11452,13 @@
       </p:sp>
       <p:sp>
         <p:nvSpPr>
-          <p:cNvPr id="4" name="TextBox 3"/>
+          <p:cNvPr id="5" name="TextBox 4"/>
           <p:cNvSpPr txBox="1"/>
           <p:nvPr/>
         </p:nvSpPr>
         <p:spPr>
           <a:xfrm>
-            <a:off x="822960" y="640080"/>
+            <a:off x="822960" y="1371600"/>
             <a:ext cx="2651760" cy="274320"/>
           </a:xfrm>
           <a:prstGeom prst="rect">
@@ -11334,23 +11494,23 @@
       </p:sp>
       <p:sp>
         <p:nvSpPr>
-          <p:cNvPr id="5" name="TextBox 4"/>
-          <p:cNvSpPr txBox="1"/>
-          <p:nvPr/>
-        </p:nvSpPr>
-        <p:spPr>
-          <a:xfrm>
-            <a:off x="822960" y="960120"/>
-            <a:ext cx="2651760" cy="2194560"/>
-          </a:xfrm>
-          <a:prstGeom prst="rect">
-            <a:avLst/>
-          </a:prstGeom>
-          <a:noFill/>
+          <p:cNvPr id="2" name="Title 1"/>
+          <p:cNvSpPr>
+            <a:spLocks noGrp="1"/>
+          </p:cNvSpPr>
+          <p:nvPr>
+            <p:ph type="title"/>
+          </p:nvPr>
+        </p:nvSpPr>
+        <p:spPr>
+          <a:xfrm>
+            <a:off x="822960" y="1691640"/>
+            <a:ext cx="2651760" cy="960120"/>
+          </a:xfrm>
         </p:spPr>
         <p:txBody>
           <a:bodyPr wrap="square" lIns="0" rIns="0" tIns="0" bIns="0" anchor="t">
-            <a:spAutoFit/>
+            <a:noAutofit/>
           </a:bodyPr>
           <a:lstStyle/>
           <a:p>
@@ -11358,12 +11518,9 @@
               <a:lnSpc>
                 <a:spcPct val="100000"/>
               </a:lnSpc>
-              <a:spcAft>
-                <a:spcPts val="0"/>
-              </a:spcAft>
-            </a:pPr>
-            <a:r>
-              <a:rPr sz="3000" b="1" i="0">
+            </a:pPr>
+            <a:r>
+              <a:rPr sz="3000" b="1">
                 <a:solidFill>
                   <a:srgbClr val="FFFFFF"/>
                 </a:solidFill>
@@ -11433,7 +11590,7 @@
         <p:spPr>
           <a:xfrm>
             <a:off x="640080" y="5852160"/>
-            <a:ext cx="1828800" cy="717176"/>
+            <a:ext cx="1737360" cy="681317"/>
           </a:xfrm>
           <a:prstGeom prst="rect">
             <a:avLst/>
@@ -11448,8 +11605,8 @@
         </p:nvSpPr>
         <p:spPr>
           <a:xfrm>
-            <a:off x="4206240" y="685800"/>
-            <a:ext cx="2514600" cy="4846320"/>
+            <a:off x="4206240" y="1371600"/>
+            <a:ext cx="2514600" cy="4526280"/>
           </a:xfrm>
           <a:prstGeom prst="roundRect">
             <a:avLst>
@@ -11479,7 +11636,7 @@
         </p:nvSpPr>
         <p:spPr>
           <a:xfrm>
-            <a:off x="4389120" y="914400"/>
+            <a:off x="4389120" y="1572768"/>
             <a:ext cx="2148840" cy="685800"/>
           </a:xfrm>
           <a:prstGeom prst="roundRect">
@@ -11510,7 +11667,7 @@
         </p:nvSpPr>
         <p:spPr>
           <a:xfrm>
-            <a:off x="4389120" y="914400"/>
+            <a:off x="4389120" y="1572768"/>
             <a:ext cx="2148840" cy="685800"/>
           </a:xfrm>
           <a:prstGeom prst="rect">
@@ -11552,7 +11709,7 @@
         </p:nvSpPr>
         <p:spPr>
           <a:xfrm>
-            <a:off x="4434840" y="2029967"/>
+            <a:off x="4434840" y="2670048"/>
             <a:ext cx="82296" cy="82296"/>
           </a:xfrm>
           <a:prstGeom prst="diamond">
@@ -11581,7 +11738,7 @@
         </p:nvSpPr>
         <p:spPr>
           <a:xfrm>
-            <a:off x="4690872" y="1965960"/>
+            <a:off x="4690872" y="2606040"/>
             <a:ext cx="1847087" cy="476250"/>
           </a:xfrm>
           <a:prstGeom prst="rect">
@@ -11623,7 +11780,7 @@
         </p:nvSpPr>
         <p:spPr>
           <a:xfrm>
-            <a:off x="4434840" y="2785617"/>
+            <a:off x="4434840" y="3425698"/>
             <a:ext cx="82296" cy="82296"/>
           </a:xfrm>
           <a:prstGeom prst="diamond">
@@ -11652,7 +11809,7 @@
         </p:nvSpPr>
         <p:spPr>
           <a:xfrm>
-            <a:off x="4690872" y="2721610"/>
+            <a:off x="4690872" y="3361690"/>
             <a:ext cx="1847087" cy="476250"/>
           </a:xfrm>
           <a:prstGeom prst="rect">
@@ -11694,7 +11851,7 @@
         </p:nvSpPr>
         <p:spPr>
           <a:xfrm>
-            <a:off x="4434840" y="3541267"/>
+            <a:off x="4434840" y="4181348"/>
             <a:ext cx="82296" cy="82296"/>
           </a:xfrm>
           <a:prstGeom prst="diamond">
@@ -11723,7 +11880,7 @@
         </p:nvSpPr>
         <p:spPr>
           <a:xfrm>
-            <a:off x="4690872" y="3477260"/>
+            <a:off x="4690872" y="4117340"/>
             <a:ext cx="1847087" cy="476250"/>
           </a:xfrm>
           <a:prstGeom prst="rect">
@@ -11765,8 +11922,8 @@
         </p:nvSpPr>
         <p:spPr>
           <a:xfrm>
-            <a:off x="6903720" y="685800"/>
-            <a:ext cx="2514600" cy="4846320"/>
+            <a:off x="6903720" y="1371600"/>
+            <a:ext cx="2514600" cy="4526280"/>
           </a:xfrm>
           <a:prstGeom prst="roundRect">
             <a:avLst>
@@ -11796,7 +11953,7 @@
         </p:nvSpPr>
         <p:spPr>
           <a:xfrm>
-            <a:off x="7086600" y="914400"/>
+            <a:off x="7086600" y="1572768"/>
             <a:ext cx="2148840" cy="685800"/>
           </a:xfrm>
           <a:prstGeom prst="roundRect">
@@ -11827,7 +11984,7 @@
         </p:nvSpPr>
         <p:spPr>
           <a:xfrm>
-            <a:off x="7086600" y="914400"/>
+            <a:off x="7086600" y="1572768"/>
             <a:ext cx="2148840" cy="685800"/>
           </a:xfrm>
           <a:prstGeom prst="rect">
@@ -11869,7 +12026,7 @@
         </p:nvSpPr>
         <p:spPr>
           <a:xfrm>
-            <a:off x="7132320" y="2029967"/>
+            <a:off x="7132320" y="2670048"/>
             <a:ext cx="82296" cy="82296"/>
           </a:xfrm>
           <a:prstGeom prst="diamond">
@@ -11898,7 +12055,7 @@
         </p:nvSpPr>
         <p:spPr>
           <a:xfrm>
-            <a:off x="7388352" y="1965960"/>
+            <a:off x="7388352" y="2606040"/>
             <a:ext cx="1847087" cy="714375"/>
           </a:xfrm>
           <a:prstGeom prst="rect">
@@ -11940,7 +12097,7 @@
         </p:nvSpPr>
         <p:spPr>
           <a:xfrm>
-            <a:off x="7132320" y="3023743"/>
+            <a:off x="7132320" y="3663823"/>
             <a:ext cx="82296" cy="82296"/>
           </a:xfrm>
           <a:prstGeom prst="diamond">
@@ -11969,7 +12126,7 @@
         </p:nvSpPr>
         <p:spPr>
           <a:xfrm>
-            <a:off x="7388352" y="2959735"/>
+            <a:off x="7388352" y="3599815"/>
             <a:ext cx="1847087" cy="714375"/>
           </a:xfrm>
           <a:prstGeom prst="rect">
@@ -12011,7 +12168,7 @@
         </p:nvSpPr>
         <p:spPr>
           <a:xfrm>
-            <a:off x="7132320" y="4017518"/>
+            <a:off x="7132320" y="4657598"/>
             <a:ext cx="82296" cy="82296"/>
           </a:xfrm>
           <a:prstGeom prst="diamond">
@@ -12040,7 +12197,7 @@
         </p:nvSpPr>
         <p:spPr>
           <a:xfrm>
-            <a:off x="7388352" y="3953510"/>
+            <a:off x="7388352" y="4593590"/>
             <a:ext cx="1847087" cy="476250"/>
           </a:xfrm>
           <a:prstGeom prst="rect">
@@ -12082,8 +12239,8 @@
         </p:nvSpPr>
         <p:spPr>
           <a:xfrm>
-            <a:off x="9601200" y="685800"/>
-            <a:ext cx="2514600" cy="4846320"/>
+            <a:off x="9601200" y="1371600"/>
+            <a:ext cx="2514600" cy="4526280"/>
           </a:xfrm>
           <a:prstGeom prst="roundRect">
             <a:avLst>
@@ -12113,7 +12270,7 @@
         </p:nvSpPr>
         <p:spPr>
           <a:xfrm>
-            <a:off x="9784080" y="914400"/>
+            <a:off x="9784080" y="1572768"/>
             <a:ext cx="2148840" cy="685800"/>
           </a:xfrm>
           <a:prstGeom prst="roundRect">
@@ -12144,7 +12301,7 @@
         </p:nvSpPr>
         <p:spPr>
           <a:xfrm>
-            <a:off x="9784080" y="914400"/>
+            <a:off x="9784080" y="1572768"/>
             <a:ext cx="2148840" cy="685800"/>
           </a:xfrm>
           <a:prstGeom prst="rect">
@@ -12186,7 +12343,7 @@
         </p:nvSpPr>
         <p:spPr>
           <a:xfrm>
-            <a:off x="9829800" y="2029967"/>
+            <a:off x="9829800" y="2670048"/>
             <a:ext cx="82296" cy="82296"/>
           </a:xfrm>
           <a:prstGeom prst="diamond">
@@ -12215,7 +12372,7 @@
         </p:nvSpPr>
         <p:spPr>
           <a:xfrm>
-            <a:off x="10085832" y="1965960"/>
+            <a:off x="10085832" y="2606040"/>
             <a:ext cx="1847087" cy="476250"/>
           </a:xfrm>
           <a:prstGeom prst="rect">
@@ -12257,7 +12414,7 @@
         </p:nvSpPr>
         <p:spPr>
           <a:xfrm>
-            <a:off x="9829800" y="2785617"/>
+            <a:off x="9829800" y="3425698"/>
             <a:ext cx="82296" cy="82296"/>
           </a:xfrm>
           <a:prstGeom prst="diamond">
@@ -12286,7 +12443,7 @@
         </p:nvSpPr>
         <p:spPr>
           <a:xfrm>
-            <a:off x="10085832" y="2721610"/>
+            <a:off x="10085832" y="3361690"/>
             <a:ext cx="1847087" cy="476250"/>
           </a:xfrm>
           <a:prstGeom prst="rect">
@@ -12328,7 +12485,7 @@
         </p:nvSpPr>
         <p:spPr>
           <a:xfrm>
-            <a:off x="9829800" y="3541267"/>
+            <a:off x="9829800" y="4181348"/>
             <a:ext cx="82296" cy="82296"/>
           </a:xfrm>
           <a:prstGeom prst="diamond">
@@ -12357,7 +12514,7 @@
         </p:nvSpPr>
         <p:spPr>
           <a:xfrm>
-            <a:off x="10085832" y="3477260"/>
+            <a:off x="10085832" y="4117340"/>
             <a:ext cx="1847087" cy="476250"/>
           </a:xfrm>
           <a:prstGeom prst="rect">
@@ -12399,8 +12556,8 @@
         </p:nvSpPr>
         <p:spPr>
           <a:xfrm>
-            <a:off x="4206240" y="6035040"/>
-            <a:ext cx="7772400" cy="457200"/>
+            <a:off x="4206240" y="6126480"/>
+            <a:ext cx="7772400" cy="411480"/>
           </a:xfrm>
           <a:prstGeom prst="rect">
             <a:avLst/>
@@ -12444,14 +12601,6 @@
 <file path=ppt/slides/slide5.xml><?xml version="1.0" encoding="utf-8"?>
 <p:sld xmlns:a="http://schemas.openxmlformats.org/drawingml/2006/main" xmlns:p="http://schemas.openxmlformats.org/presentationml/2006/main" xmlns:r="http://schemas.openxmlformats.org/officeDocument/2006/relationships">
   <p:cSld>
-    <p:bg>
-      <p:bgPr>
-        <a:solidFill>
-          <a:srgbClr val="FFFFFF"/>
-        </a:solidFill>
-        <a:effectLst/>
-      </p:bgPr>
-    </p:bg>
     <p:spTree>
       <p:nvGrpSpPr>
         <p:cNvPr id="1" name=""/>
@@ -12461,14 +12610,14 @@
       <p:grpSpPr/>
       <p:sp>
         <p:nvSpPr>
-          <p:cNvPr id="2" name="TextBox 1"/>
+          <p:cNvPr id="3" name="TextBox 2"/>
           <p:cNvSpPr txBox="1"/>
           <p:nvPr/>
         </p:nvSpPr>
         <p:spPr>
           <a:xfrm>
-            <a:off x="822960" y="164592"/>
-            <a:ext cx="10607040" cy="274320"/>
+            <a:off x="822960" y="1124712"/>
+            <a:ext cx="10607040" cy="256032"/>
           </a:xfrm>
           <a:prstGeom prst="rect">
             <a:avLst/>
@@ -12503,14 +12652,14 @@
       </p:sp>
       <p:sp>
         <p:nvSpPr>
-          <p:cNvPr id="3" name="Rectangle 2"/>
+          <p:cNvPr id="4" name="Rectangle 3"/>
           <p:cNvSpPr/>
           <p:nvPr/>
         </p:nvSpPr>
         <p:spPr>
           <a:xfrm>
-            <a:off x="566928" y="521207"/>
-            <a:ext cx="64008" cy="954024"/>
+            <a:off x="566928" y="1389888"/>
+            <a:ext cx="64008" cy="527304"/>
           </a:xfrm>
           <a:prstGeom prst="rect">
             <a:avLst/>
@@ -12532,23 +12681,23 @@
       </p:sp>
       <p:sp>
         <p:nvSpPr>
-          <p:cNvPr id="4" name="TextBox 3"/>
-          <p:cNvSpPr txBox="1"/>
-          <p:nvPr/>
-        </p:nvSpPr>
-        <p:spPr>
-          <a:xfrm>
-            <a:off x="822960" y="548640"/>
-            <a:ext cx="10607040" cy="899160"/>
-          </a:xfrm>
-          <a:prstGeom prst="rect">
-            <a:avLst/>
-          </a:prstGeom>
-          <a:noFill/>
+          <p:cNvPr id="2" name="Title 1"/>
+          <p:cNvSpPr>
+            <a:spLocks noGrp="1"/>
+          </p:cNvSpPr>
+          <p:nvPr>
+            <p:ph type="title"/>
+          </p:nvPr>
+        </p:nvSpPr>
+        <p:spPr>
+          <a:xfrm>
+            <a:off x="822960" y="1417320"/>
+            <a:ext cx="10607040" cy="472440"/>
+          </a:xfrm>
         </p:spPr>
         <p:txBody>
           <a:bodyPr wrap="square" lIns="0" rIns="0" tIns="0" bIns="0" anchor="t">
-            <a:spAutoFit/>
+            <a:noAutofit/>
           </a:bodyPr>
           <a:lstStyle/>
           <a:p>
@@ -12556,12 +12705,9 @@
               <a:lnSpc>
                 <a:spcPct val="100000"/>
               </a:lnSpc>
-              <a:spcAft>
-                <a:spcPts val="0"/>
-              </a:spcAft>
-            </a:pPr>
-            <a:r>
-              <a:rPr sz="2800" b="1" i="0">
+            </a:pPr>
+            <a:r>
+              <a:rPr sz="2800" b="1">
                 <a:solidFill>
                   <a:srgbClr val="1A1A1A"/>
                 </a:solidFill>
@@ -12580,12 +12726,12 @@
         </p:nvSpPr>
         <p:spPr>
           <a:xfrm>
-            <a:off x="548640" y="1600200"/>
-            <a:ext cx="5349240" cy="1920240"/>
+            <a:off x="548640" y="2148840"/>
+            <a:ext cx="5349240" cy="1783080"/>
           </a:xfrm>
           <a:prstGeom prst="roundRect">
             <a:avLst>
-              <a:gd name="adj" fmla="val 7619"/>
+              <a:gd name="adj" fmla="val 8205"/>
             </a:avLst>
           </a:prstGeom>
           <a:solidFill>
@@ -12611,7 +12757,7 @@
         </p:nvSpPr>
         <p:spPr>
           <a:xfrm>
-            <a:off x="822960" y="1737360"/>
+            <a:off x="822960" y="2286000"/>
             <a:ext cx="4846320" cy="320040"/>
           </a:xfrm>
           <a:prstGeom prst="rect">
@@ -12653,7 +12799,7 @@
         </p:nvSpPr>
         <p:spPr>
           <a:xfrm>
-            <a:off x="822960" y="2258568"/>
+            <a:off x="822960" y="2761488"/>
             <a:ext cx="82296" cy="82296"/>
           </a:xfrm>
           <a:prstGeom prst="diamond">
@@ -12682,7 +12828,7 @@
         </p:nvSpPr>
         <p:spPr>
           <a:xfrm>
-            <a:off x="1078992" y="2194560"/>
+            <a:off x="1078992" y="2697480"/>
             <a:ext cx="4590288" cy="214312"/>
           </a:xfrm>
           <a:prstGeom prst="rect">
@@ -12724,7 +12870,7 @@
         </p:nvSpPr>
         <p:spPr>
           <a:xfrm>
-            <a:off x="822960" y="2574480"/>
+            <a:off x="822960" y="3077400"/>
             <a:ext cx="82296" cy="82296"/>
           </a:xfrm>
           <a:prstGeom prst="diamond">
@@ -12753,7 +12899,7 @@
         </p:nvSpPr>
         <p:spPr>
           <a:xfrm>
-            <a:off x="1078992" y="2510472"/>
+            <a:off x="1078992" y="3013392"/>
             <a:ext cx="4590288" cy="214312"/>
           </a:xfrm>
           <a:prstGeom prst="rect">
@@ -12795,7 +12941,7 @@
         </p:nvSpPr>
         <p:spPr>
           <a:xfrm>
-            <a:off x="822960" y="2890393"/>
+            <a:off x="822960" y="3393313"/>
             <a:ext cx="82296" cy="82296"/>
           </a:xfrm>
           <a:prstGeom prst="diamond">
@@ -12824,7 +12970,7 @@
         </p:nvSpPr>
         <p:spPr>
           <a:xfrm>
-            <a:off x="1078992" y="2826385"/>
+            <a:off x="1078992" y="3329305"/>
             <a:ext cx="4590288" cy="214312"/>
           </a:xfrm>
           <a:prstGeom prst="rect">
@@ -12866,12 +13012,12 @@
         </p:nvSpPr>
         <p:spPr>
           <a:xfrm>
-            <a:off x="548640" y="3703320"/>
-            <a:ext cx="5349240" cy="2788920"/>
+            <a:off x="548640" y="4069080"/>
+            <a:ext cx="5349240" cy="2514600"/>
           </a:xfrm>
           <a:prstGeom prst="roundRect">
             <a:avLst>
-              <a:gd name="adj" fmla="val 5245"/>
+              <a:gd name="adj" fmla="val 5818"/>
             </a:avLst>
           </a:prstGeom>
           <a:solidFill>
@@ -12897,7 +13043,7 @@
         </p:nvSpPr>
         <p:spPr>
           <a:xfrm>
-            <a:off x="822960" y="3886200"/>
+            <a:off x="822960" y="4187952"/>
             <a:ext cx="4846320" cy="320040"/>
           </a:xfrm>
           <a:prstGeom prst="rect">
@@ -12939,7 +13085,7 @@
         </p:nvSpPr>
         <p:spPr>
           <a:xfrm>
-            <a:off x="822960" y="4251960"/>
+            <a:off x="822960" y="4526280"/>
             <a:ext cx="4846320" cy="274320"/>
           </a:xfrm>
           <a:prstGeom prst="rect">
@@ -12981,7 +13127,7 @@
         </p:nvSpPr>
         <p:spPr>
           <a:xfrm>
-            <a:off x="822960" y="4727448"/>
+            <a:off x="822960" y="4910328"/>
             <a:ext cx="82296" cy="82296"/>
           </a:xfrm>
           <a:prstGeom prst="diamond">
@@ -13010,8 +13156,8 @@
         </p:nvSpPr>
         <p:spPr>
           <a:xfrm>
-            <a:off x="1078992" y="4663440"/>
-            <a:ext cx="4590288" cy="206375"/>
+            <a:off x="1078992" y="4846320"/>
+            <a:ext cx="4590288" cy="198437"/>
           </a:xfrm>
           <a:prstGeom prst="rect">
             <a:avLst/>
@@ -13033,7 +13179,7 @@
               </a:spcAft>
             </a:pPr>
             <a:r>
-              <a:rPr sz="1300" b="0" i="0">
+              <a:rPr sz="1250" b="0" i="0">
                 <a:solidFill>
                   <a:srgbClr val="1A1A1A"/>
                 </a:solidFill>
@@ -13052,7 +13198,7 @@
         </p:nvSpPr>
         <p:spPr>
           <a:xfrm>
-            <a:off x="822960" y="4997323"/>
+            <a:off x="822960" y="5146865"/>
             <a:ext cx="82296" cy="82296"/>
           </a:xfrm>
           <a:prstGeom prst="diamond">
@@ -13081,8 +13227,8 @@
         </p:nvSpPr>
         <p:spPr>
           <a:xfrm>
-            <a:off x="1078992" y="4933315"/>
-            <a:ext cx="4590288" cy="206375"/>
+            <a:off x="1078992" y="5082857"/>
+            <a:ext cx="4590288" cy="198437"/>
           </a:xfrm>
           <a:prstGeom prst="rect">
             <a:avLst/>
@@ -13104,7 +13250,7 @@
               </a:spcAft>
             </a:pPr>
             <a:r>
-              <a:rPr sz="1300" b="0" i="0">
+              <a:rPr sz="1250" b="0" i="0">
                 <a:solidFill>
                   <a:srgbClr val="1A1A1A"/>
                 </a:solidFill>
@@ -13123,7 +13269,7 @@
         </p:nvSpPr>
         <p:spPr>
           <a:xfrm>
-            <a:off x="822960" y="5267198"/>
+            <a:off x="822960" y="5383403"/>
             <a:ext cx="82296" cy="82296"/>
           </a:xfrm>
           <a:prstGeom prst="diamond">
@@ -13152,8 +13298,8 @@
         </p:nvSpPr>
         <p:spPr>
           <a:xfrm>
-            <a:off x="1078992" y="5203190"/>
-            <a:ext cx="4590288" cy="206375"/>
+            <a:off x="1078992" y="5319394"/>
+            <a:ext cx="4590288" cy="198437"/>
           </a:xfrm>
           <a:prstGeom prst="rect">
             <a:avLst/>
@@ -13175,7 +13321,7 @@
               </a:spcAft>
             </a:pPr>
             <a:r>
-              <a:rPr sz="1300" b="0" i="0">
+              <a:rPr sz="1250" b="0" i="0">
                 <a:solidFill>
                   <a:srgbClr val="1A1A1A"/>
                 </a:solidFill>
@@ -13194,7 +13340,7 @@
         </p:nvSpPr>
         <p:spPr>
           <a:xfrm>
-            <a:off x="822960" y="5537073"/>
+            <a:off x="822960" y="5619940"/>
             <a:ext cx="82296" cy="82296"/>
           </a:xfrm>
           <a:prstGeom prst="diamond">
@@ -13223,8 +13369,8 @@
         </p:nvSpPr>
         <p:spPr>
           <a:xfrm>
-            <a:off x="1078992" y="5473065"/>
-            <a:ext cx="4590288" cy="206375"/>
+            <a:off x="1078992" y="5555932"/>
+            <a:ext cx="4590288" cy="198437"/>
           </a:xfrm>
           <a:prstGeom prst="rect">
             <a:avLst/>
@@ -13246,7 +13392,7 @@
               </a:spcAft>
             </a:pPr>
             <a:r>
-              <a:rPr sz="1300" b="0" i="0">
+              <a:rPr sz="1250" b="0" i="0">
                 <a:solidFill>
                   <a:srgbClr val="1A1A1A"/>
                 </a:solidFill>
@@ -13265,7 +13411,7 @@
         </p:nvSpPr>
         <p:spPr>
           <a:xfrm>
-            <a:off x="822960" y="5806948"/>
+            <a:off x="822960" y="5856477"/>
             <a:ext cx="82296" cy="82296"/>
           </a:xfrm>
           <a:prstGeom prst="diamond">
@@ -13294,8 +13440,8 @@
         </p:nvSpPr>
         <p:spPr>
           <a:xfrm>
-            <a:off x="1078992" y="5742940"/>
-            <a:ext cx="4590288" cy="206375"/>
+            <a:off x="1078992" y="5792469"/>
+            <a:ext cx="4590288" cy="198437"/>
           </a:xfrm>
           <a:prstGeom prst="rect">
             <a:avLst/>
@@ -13317,7 +13463,7 @@
               </a:spcAft>
             </a:pPr>
             <a:r>
-              <a:rPr sz="1300" b="0" i="0">
+              <a:rPr sz="1250" b="0" i="0">
                 <a:solidFill>
                   <a:srgbClr val="1A1A1A"/>
                 </a:solidFill>
@@ -13345,7 +13491,7 @@
         </p:blipFill>
         <p:spPr>
           <a:xfrm>
-            <a:off x="6172200" y="1600200"/>
+            <a:off x="6172200" y="2148840"/>
             <a:ext cx="5486400" cy="3086100"/>
           </a:xfrm>
           <a:prstGeom prst="rect">
@@ -13361,8 +13507,8 @@
         </p:nvSpPr>
         <p:spPr>
           <a:xfrm>
-            <a:off x="6172200" y="4846320"/>
-            <a:ext cx="5486400" cy="1645920"/>
+            <a:off x="6172200" y="5349240"/>
+            <a:ext cx="5486400" cy="1234440"/>
           </a:xfrm>
           <a:prstGeom prst="rect">
             <a:avLst/>
@@ -13390,8 +13536,8 @@
         </p:nvSpPr>
         <p:spPr>
           <a:xfrm>
-            <a:off x="6446520" y="4846320"/>
-            <a:ext cx="4937760" cy="1645920"/>
+            <a:off x="6446520" y="5349240"/>
+            <a:ext cx="4937760" cy="1234440"/>
           </a:xfrm>
           <a:prstGeom prst="rect">
             <a:avLst/>
@@ -13409,11 +13555,11 @@
                 <a:spcPct val="105000"/>
               </a:lnSpc>
               <a:spcAft>
-                <a:spcPts val="400"/>
+                <a:spcPts val="300"/>
               </a:spcAft>
             </a:pPr>
             <a:r>
-              <a:rPr sz="2100" b="1" i="0">
+              <a:rPr sz="2000" b="1" i="0">
                 <a:solidFill>
                   <a:srgbClr val="FFFFFF"/>
                 </a:solidFill>
@@ -13432,7 +13578,7 @@
               </a:spcAft>
             </a:pPr>
             <a:r>
-              <a:rPr sz="1550" b="0" i="0">
+              <a:rPr sz="1500" b="0" i="0">
                 <a:solidFill>
                   <a:srgbClr val="FFFFFF"/>
                 </a:solidFill>
@@ -13451,7 +13597,7 @@
               </a:spcAft>
             </a:pPr>
             <a:r>
-              <a:rPr sz="1150" b="0" i="0">
+              <a:rPr sz="1100" b="0" i="0">
                 <a:solidFill>
                   <a:srgbClr val="FAD5D4"/>
                 </a:solidFill>
@@ -13473,14 +13619,6 @@
 <file path=ppt/slides/slide6.xml><?xml version="1.0" encoding="utf-8"?>
 <p:sld xmlns:a="http://schemas.openxmlformats.org/drawingml/2006/main" xmlns:p="http://schemas.openxmlformats.org/presentationml/2006/main" xmlns:r="http://schemas.openxmlformats.org/officeDocument/2006/relationships">
   <p:cSld>
-    <p:bg>
-      <p:bgPr>
-        <a:solidFill>
-          <a:srgbClr val="FFFFFF"/>
-        </a:solidFill>
-        <a:effectLst/>
-      </p:bgPr>
-    </p:bg>
     <p:spTree>
       <p:nvGrpSpPr>
         <p:cNvPr id="1" name=""/>
@@ -13490,7 +13628,7 @@
       <p:grpSpPr/>
       <p:pic>
         <p:nvPicPr>
-          <p:cNvPr id="2" name="Picture 1" descr="guard_post.jpg"/>
+          <p:cNvPr id="3" name="Picture 2" descr="guard_post.jpg"/>
           <p:cNvPicPr>
             <a:picLocks noChangeAspect="1"/>
           </p:cNvPicPr>
@@ -13498,15 +13636,15 @@
         </p:nvPicPr>
         <p:blipFill>
           <a:blip r:embed="rId2"/>
-          <a:srcRect l="45631" r="1631"/>
+          <a:srcRect l="37217"/>
           <a:stretch>
             <a:fillRect/>
           </a:stretch>
         </p:blipFill>
         <p:spPr>
           <a:xfrm>
-            <a:off x="6766560" y="0"/>
-            <a:ext cx="5425135" cy="6858000"/>
+            <a:off x="6766560" y="1097280"/>
+            <a:ext cx="5425135" cy="5760720"/>
           </a:xfrm>
           <a:prstGeom prst="rect">
             <a:avLst/>
@@ -13515,14 +13653,14 @@
       </p:pic>
       <p:sp>
         <p:nvSpPr>
-          <p:cNvPr id="3" name="TextBox 2"/>
+          <p:cNvPr id="4" name="TextBox 3"/>
           <p:cNvSpPr txBox="1"/>
           <p:nvPr/>
         </p:nvSpPr>
         <p:spPr>
           <a:xfrm>
-            <a:off x="822960" y="347472"/>
-            <a:ext cx="5394960" cy="274320"/>
+            <a:off x="822960" y="1170432"/>
+            <a:ext cx="5394960" cy="256032"/>
           </a:xfrm>
           <a:prstGeom prst="rect">
             <a:avLst/>
@@ -13557,13 +13695,13 @@
       </p:sp>
       <p:sp>
         <p:nvSpPr>
-          <p:cNvPr id="4" name="Rectangle 3"/>
+          <p:cNvPr id="5" name="Rectangle 4"/>
           <p:cNvSpPr/>
           <p:nvPr/>
         </p:nvSpPr>
         <p:spPr>
           <a:xfrm>
-            <a:off x="566928" y="704088"/>
+            <a:off x="566928" y="1435608"/>
             <a:ext cx="64008" cy="893064"/>
           </a:xfrm>
           <a:prstGeom prst="rect">
@@ -13586,23 +13724,23 @@
       </p:sp>
       <p:sp>
         <p:nvSpPr>
-          <p:cNvPr id="5" name="TextBox 4"/>
-          <p:cNvSpPr txBox="1"/>
-          <p:nvPr/>
-        </p:nvSpPr>
-        <p:spPr>
-          <a:xfrm>
-            <a:off x="822960" y="731520"/>
+          <p:cNvPr id="2" name="Title 1"/>
+          <p:cNvSpPr>
+            <a:spLocks noGrp="1"/>
+          </p:cNvSpPr>
+          <p:nvPr>
+            <p:ph type="title"/>
+          </p:nvPr>
+        </p:nvSpPr>
+        <p:spPr>
+          <a:xfrm>
+            <a:off x="822960" y="1463040"/>
             <a:ext cx="5394960" cy="838200"/>
           </a:xfrm>
-          <a:prstGeom prst="rect">
-            <a:avLst/>
-          </a:prstGeom>
-          <a:noFill/>
         </p:spPr>
         <p:txBody>
           <a:bodyPr wrap="square" lIns="0" rIns="0" tIns="0" bIns="0" anchor="t">
-            <a:spAutoFit/>
+            <a:noAutofit/>
           </a:bodyPr>
           <a:lstStyle/>
           <a:p>
@@ -13610,12 +13748,9 @@
               <a:lnSpc>
                 <a:spcPct val="100000"/>
               </a:lnSpc>
-              <a:spcAft>
-                <a:spcPts val="0"/>
-              </a:spcAft>
-            </a:pPr>
-            <a:r>
-              <a:rPr sz="2600" b="1" i="0">
+            </a:pPr>
+            <a:r>
+              <a:rPr sz="2600" b="1">
                 <a:solidFill>
                   <a:srgbClr val="1A1A1A"/>
                 </a:solidFill>
@@ -13634,12 +13769,12 @@
         </p:nvSpPr>
         <p:spPr>
           <a:xfrm>
-            <a:off x="548640" y="2331720"/>
-            <a:ext cx="5852160" cy="868680"/>
+            <a:off x="548640" y="2651760"/>
+            <a:ext cx="5852160" cy="822960"/>
           </a:xfrm>
           <a:prstGeom prst="roundRect">
             <a:avLst>
-              <a:gd name="adj" fmla="val 14736"/>
+              <a:gd name="adj" fmla="val 15555"/>
             </a:avLst>
           </a:prstGeom>
           <a:solidFill>
@@ -13665,7 +13800,7 @@
         </p:nvSpPr>
         <p:spPr>
           <a:xfrm>
-            <a:off x="685800" y="2532888"/>
+            <a:off x="685800" y="2834640"/>
             <a:ext cx="1508760" cy="457200"/>
           </a:xfrm>
           <a:prstGeom prst="roundRect">
@@ -13696,7 +13831,7 @@
         </p:nvSpPr>
         <p:spPr>
           <a:xfrm>
-            <a:off x="685800" y="2532888"/>
+            <a:off x="685800" y="2834640"/>
             <a:ext cx="1508760" cy="457200"/>
           </a:xfrm>
           <a:prstGeom prst="rect">
@@ -13738,8 +13873,8 @@
         </p:nvSpPr>
         <p:spPr>
           <a:xfrm>
-            <a:off x="2377440" y="2331720"/>
-            <a:ext cx="3886200" cy="868680"/>
+            <a:off x="2377440" y="2651760"/>
+            <a:ext cx="3886200" cy="822960"/>
           </a:xfrm>
           <a:prstGeom prst="rect">
             <a:avLst/>
@@ -13780,12 +13915,12 @@
         </p:nvSpPr>
         <p:spPr>
           <a:xfrm>
-            <a:off x="548640" y="3337560"/>
-            <a:ext cx="5852160" cy="868680"/>
+            <a:off x="548640" y="3611880"/>
+            <a:ext cx="5852160" cy="822960"/>
           </a:xfrm>
           <a:prstGeom prst="roundRect">
             <a:avLst>
-              <a:gd name="adj" fmla="val 14736"/>
+              <a:gd name="adj" fmla="val 15555"/>
             </a:avLst>
           </a:prstGeom>
           <a:solidFill>
@@ -13811,7 +13946,7 @@
         </p:nvSpPr>
         <p:spPr>
           <a:xfrm>
-            <a:off x="685800" y="3538728"/>
+            <a:off x="685800" y="3794760"/>
             <a:ext cx="1508760" cy="457200"/>
           </a:xfrm>
           <a:prstGeom prst="roundRect">
@@ -13842,7 +13977,7 @@
         </p:nvSpPr>
         <p:spPr>
           <a:xfrm>
-            <a:off x="685800" y="3538728"/>
+            <a:off x="685800" y="3794760"/>
             <a:ext cx="1508760" cy="457200"/>
           </a:xfrm>
           <a:prstGeom prst="rect">
@@ -13884,8 +14019,8 @@
         </p:nvSpPr>
         <p:spPr>
           <a:xfrm>
-            <a:off x="2377440" y="3337560"/>
-            <a:ext cx="3886200" cy="868680"/>
+            <a:off x="2377440" y="3611880"/>
+            <a:ext cx="3886200" cy="822960"/>
           </a:xfrm>
           <a:prstGeom prst="rect">
             <a:avLst/>
@@ -13926,12 +14061,12 @@
         </p:nvSpPr>
         <p:spPr>
           <a:xfrm>
-            <a:off x="548640" y="4343400"/>
-            <a:ext cx="5852160" cy="868680"/>
+            <a:off x="548640" y="4572000"/>
+            <a:ext cx="5852160" cy="822960"/>
           </a:xfrm>
           <a:prstGeom prst="roundRect">
             <a:avLst>
-              <a:gd name="adj" fmla="val 14736"/>
+              <a:gd name="adj" fmla="val 15555"/>
             </a:avLst>
           </a:prstGeom>
           <a:solidFill>
@@ -13957,7 +14092,7 @@
         </p:nvSpPr>
         <p:spPr>
           <a:xfrm>
-            <a:off x="685800" y="4544568"/>
+            <a:off x="685800" y="4754880"/>
             <a:ext cx="1508760" cy="457200"/>
           </a:xfrm>
           <a:prstGeom prst="roundRect">
@@ -13988,7 +14123,7 @@
         </p:nvSpPr>
         <p:spPr>
           <a:xfrm>
-            <a:off x="685800" y="4544568"/>
+            <a:off x="685800" y="4754880"/>
             <a:ext cx="1508760" cy="457200"/>
           </a:xfrm>
           <a:prstGeom prst="rect">
@@ -14030,8 +14165,8 @@
         </p:nvSpPr>
         <p:spPr>
           <a:xfrm>
-            <a:off x="2377440" y="4343400"/>
-            <a:ext cx="3886200" cy="868680"/>
+            <a:off x="2377440" y="4572000"/>
+            <a:ext cx="3886200" cy="822960"/>
           </a:xfrm>
           <a:prstGeom prst="rect">
             <a:avLst/>
@@ -14072,12 +14207,12 @@
         </p:nvSpPr>
         <p:spPr>
           <a:xfrm>
-            <a:off x="548640" y="5349240"/>
-            <a:ext cx="5852160" cy="868680"/>
+            <a:off x="548640" y="5532120"/>
+            <a:ext cx="5852160" cy="822960"/>
           </a:xfrm>
           <a:prstGeom prst="roundRect">
             <a:avLst>
-              <a:gd name="adj" fmla="val 14736"/>
+              <a:gd name="adj" fmla="val 15555"/>
             </a:avLst>
           </a:prstGeom>
           <a:solidFill>
@@ -14103,7 +14238,7 @@
         </p:nvSpPr>
         <p:spPr>
           <a:xfrm>
-            <a:off x="685800" y="5550407"/>
+            <a:off x="685800" y="5715000"/>
             <a:ext cx="1508760" cy="457200"/>
           </a:xfrm>
           <a:prstGeom prst="roundRect">
@@ -14134,7 +14269,7 @@
         </p:nvSpPr>
         <p:spPr>
           <a:xfrm>
-            <a:off x="685800" y="5550407"/>
+            <a:off x="685800" y="5715000"/>
             <a:ext cx="1508760" cy="457200"/>
           </a:xfrm>
           <a:prstGeom prst="rect">
@@ -14176,8 +14311,8 @@
         </p:nvSpPr>
         <p:spPr>
           <a:xfrm>
-            <a:off x="2377440" y="5349240"/>
-            <a:ext cx="3886200" cy="868680"/>
+            <a:off x="2377440" y="5532120"/>
+            <a:ext cx="3886200" cy="822960"/>
           </a:xfrm>
           <a:prstGeom prst="rect">
             <a:avLst/>
@@ -14218,12 +14353,12 @@
         </p:nvSpPr>
         <p:spPr>
           <a:xfrm>
-            <a:off x="7086600" y="5074920"/>
-            <a:ext cx="2834640" cy="1463040"/>
+            <a:off x="7086600" y="5212080"/>
+            <a:ext cx="2834640" cy="1371600"/>
           </a:xfrm>
           <a:prstGeom prst="roundRect">
             <a:avLst>
-              <a:gd name="adj" fmla="val 6250"/>
+              <a:gd name="adj" fmla="val 6666"/>
             </a:avLst>
           </a:prstGeom>
           <a:solidFill>
@@ -14249,8 +14384,8 @@
         </p:nvSpPr>
         <p:spPr>
           <a:xfrm>
-            <a:off x="7086600" y="5074920"/>
-            <a:ext cx="109728" cy="1463040"/>
+            <a:off x="7086600" y="5212080"/>
+            <a:ext cx="109728" cy="1371600"/>
           </a:xfrm>
           <a:prstGeom prst="rect">
             <a:avLst/>
@@ -14286,7 +14421,7 @@
         </p:blipFill>
         <p:spPr>
           <a:xfrm>
-            <a:off x="7406640" y="5230368"/>
+            <a:off x="7406640" y="5349240"/>
             <a:ext cx="1554480" cy="607305"/>
           </a:xfrm>
           <a:prstGeom prst="rect">
@@ -14302,8 +14437,8 @@
         </p:nvSpPr>
         <p:spPr>
           <a:xfrm>
-            <a:off x="7406640" y="5760720"/>
-            <a:ext cx="2377440" cy="640080"/>
+            <a:off x="7406640" y="5897880"/>
+            <a:ext cx="2377440" cy="548640"/>
           </a:xfrm>
           <a:prstGeom prst="rect">
             <a:avLst/>
@@ -14366,14 +14501,6 @@
 <file path=ppt/slides/slide7.xml><?xml version="1.0" encoding="utf-8"?>
 <p:sld xmlns:a="http://schemas.openxmlformats.org/drawingml/2006/main" xmlns:p="http://schemas.openxmlformats.org/presentationml/2006/main" xmlns:r="http://schemas.openxmlformats.org/officeDocument/2006/relationships">
   <p:cSld>
-    <p:bg>
-      <p:bgPr>
-        <a:solidFill>
-          <a:srgbClr val="FFFFFF"/>
-        </a:solidFill>
-        <a:effectLst/>
-      </p:bgPr>
-    </p:bg>
     <p:spTree>
       <p:nvGrpSpPr>
         <p:cNvPr id="1" name=""/>
@@ -14383,7 +14510,7 @@
       <p:grpSpPr/>
       <p:pic>
         <p:nvPicPr>
-          <p:cNvPr id="2" name="Picture 1" descr="forest.jpg"/>
+          <p:cNvPr id="3" name="Picture 2" descr="forest.jpg"/>
           <p:cNvPicPr>
             <a:picLocks noChangeAspect="1"/>
           </p:cNvPicPr>
@@ -14391,15 +14518,15 @@
         </p:nvPicPr>
         <p:blipFill>
           <a:blip r:embed="rId2"/>
-          <a:srcRect l="37473" r="37473"/>
+          <a:srcRect l="35087" r="35087"/>
           <a:stretch>
             <a:fillRect/>
           </a:stretch>
         </p:blipFill>
         <p:spPr>
           <a:xfrm>
-            <a:off x="0" y="0"/>
-            <a:ext cx="2286000" cy="6858000"/>
+            <a:off x="0" y="1097280"/>
+            <a:ext cx="2286000" cy="5760720"/>
           </a:xfrm>
           <a:prstGeom prst="rect">
             <a:avLst/>
@@ -14408,14 +14535,14 @@
       </p:pic>
       <p:sp>
         <p:nvSpPr>
-          <p:cNvPr id="3" name="TextBox 2"/>
+          <p:cNvPr id="4" name="TextBox 3"/>
           <p:cNvSpPr txBox="1"/>
           <p:nvPr/>
         </p:nvSpPr>
         <p:spPr>
           <a:xfrm>
-            <a:off x="2926080" y="164592"/>
-            <a:ext cx="8686800" cy="274320"/>
+            <a:off x="2926080" y="1170432"/>
+            <a:ext cx="8686800" cy="256032"/>
           </a:xfrm>
           <a:prstGeom prst="rect">
             <a:avLst/>
@@ -14450,13 +14577,13 @@
       </p:sp>
       <p:sp>
         <p:nvSpPr>
-          <p:cNvPr id="4" name="Rectangle 3"/>
+          <p:cNvPr id="5" name="Rectangle 4"/>
           <p:cNvSpPr/>
           <p:nvPr/>
         </p:nvSpPr>
         <p:spPr>
           <a:xfrm>
-            <a:off x="2670048" y="521207"/>
+            <a:off x="2670048" y="1435608"/>
             <a:ext cx="64008" cy="588264"/>
           </a:xfrm>
           <a:prstGeom prst="rect">
@@ -14479,23 +14606,23 @@
       </p:sp>
       <p:sp>
         <p:nvSpPr>
-          <p:cNvPr id="5" name="TextBox 4"/>
-          <p:cNvSpPr txBox="1"/>
-          <p:nvPr/>
-        </p:nvSpPr>
-        <p:spPr>
-          <a:xfrm>
-            <a:off x="2926080" y="548640"/>
+          <p:cNvPr id="2" name="Title 1"/>
+          <p:cNvSpPr>
+            <a:spLocks noGrp="1"/>
+          </p:cNvSpPr>
+          <p:nvPr>
+            <p:ph type="title"/>
+          </p:nvPr>
+        </p:nvSpPr>
+        <p:spPr>
+          <a:xfrm>
+            <a:off x="2926080" y="1463040"/>
             <a:ext cx="8686800" cy="533400"/>
           </a:xfrm>
-          <a:prstGeom prst="rect">
-            <a:avLst/>
-          </a:prstGeom>
-          <a:noFill/>
         </p:spPr>
         <p:txBody>
           <a:bodyPr wrap="square" lIns="0" rIns="0" tIns="0" bIns="0" anchor="t">
-            <a:spAutoFit/>
+            <a:noAutofit/>
           </a:bodyPr>
           <a:lstStyle/>
           <a:p>
@@ -14503,12 +14630,9 @@
               <a:lnSpc>
                 <a:spcPct val="100000"/>
               </a:lnSpc>
-              <a:spcAft>
-                <a:spcPts val="0"/>
-              </a:spcAft>
-            </a:pPr>
-            <a:r>
-              <a:rPr sz="3200" b="1" i="0">
+            </a:pPr>
+            <a:r>
+              <a:rPr sz="3200" b="1">
                 <a:solidFill>
                   <a:srgbClr val="1A1A1A"/>
                 </a:solidFill>
@@ -14527,12 +14651,12 @@
         </p:nvSpPr>
         <p:spPr>
           <a:xfrm>
-            <a:off x="2651760" y="1737360"/>
-            <a:ext cx="4526280" cy="3154680"/>
+            <a:off x="2651760" y="2240280"/>
+            <a:ext cx="4526280" cy="2788920"/>
           </a:xfrm>
           <a:prstGeom prst="roundRect">
             <a:avLst>
-              <a:gd name="adj" fmla="val 5217"/>
+              <a:gd name="adj" fmla="val 5901"/>
             </a:avLst>
           </a:prstGeom>
           <a:solidFill>
@@ -14560,7 +14684,7 @@
         </p:nvSpPr>
         <p:spPr>
           <a:xfrm>
-            <a:off x="2880360" y="1920240"/>
+            <a:off x="2880360" y="2423160"/>
             <a:ext cx="2377440" cy="457200"/>
           </a:xfrm>
           <a:prstGeom prst="roundRect">
@@ -14591,7 +14715,7 @@
         </p:nvSpPr>
         <p:spPr>
           <a:xfrm>
-            <a:off x="2880360" y="1920240"/>
+            <a:off x="2880360" y="2423160"/>
             <a:ext cx="2377440" cy="457200"/>
           </a:xfrm>
           <a:prstGeom prst="rect">
@@ -14633,7 +14757,7 @@
         </p:nvSpPr>
         <p:spPr>
           <a:xfrm>
-            <a:off x="2926080" y="2715768"/>
+            <a:off x="2926080" y="3172968"/>
             <a:ext cx="82296" cy="82296"/>
           </a:xfrm>
           <a:prstGeom prst="diamond">
@@ -14662,7 +14786,7 @@
         </p:nvSpPr>
         <p:spPr>
           <a:xfrm>
-            <a:off x="3182112" y="2651760"/>
+            <a:off x="3182112" y="3108960"/>
             <a:ext cx="3767328" cy="222250"/>
           </a:xfrm>
           <a:prstGeom prst="rect">
@@ -14704,7 +14828,7 @@
         </p:nvSpPr>
         <p:spPr>
           <a:xfrm>
-            <a:off x="2926080" y="3065017"/>
+            <a:off x="2926080" y="3522217"/>
             <a:ext cx="82296" cy="82296"/>
           </a:xfrm>
           <a:prstGeom prst="diamond">
@@ -14733,7 +14857,7 @@
         </p:nvSpPr>
         <p:spPr>
           <a:xfrm>
-            <a:off x="3182112" y="3001009"/>
+            <a:off x="3182112" y="3458209"/>
             <a:ext cx="3767328" cy="444500"/>
           </a:xfrm>
           <a:prstGeom prst="rect">
@@ -14775,7 +14899,7 @@
         </p:nvSpPr>
         <p:spPr>
           <a:xfrm>
-            <a:off x="2926080" y="3636517"/>
+            <a:off x="2926080" y="4093718"/>
             <a:ext cx="82296" cy="82296"/>
           </a:xfrm>
           <a:prstGeom prst="diamond">
@@ -14804,7 +14928,7 @@
         </p:nvSpPr>
         <p:spPr>
           <a:xfrm>
-            <a:off x="3182112" y="3572509"/>
+            <a:off x="3182112" y="4029709"/>
             <a:ext cx="3767328" cy="444500"/>
           </a:xfrm>
           <a:prstGeom prst="rect">
@@ -14846,12 +14970,12 @@
         </p:nvSpPr>
         <p:spPr>
           <a:xfrm>
-            <a:off x="7406640" y="1737360"/>
-            <a:ext cx="4343400" cy="3154680"/>
+            <a:off x="7406640" y="2240280"/>
+            <a:ext cx="4343400" cy="2788920"/>
           </a:xfrm>
           <a:prstGeom prst="roundRect">
             <a:avLst>
-              <a:gd name="adj" fmla="val 5217"/>
+              <a:gd name="adj" fmla="val 5901"/>
             </a:avLst>
           </a:prstGeom>
           <a:solidFill>
@@ -14877,7 +15001,7 @@
         </p:nvSpPr>
         <p:spPr>
           <a:xfrm>
-            <a:off x="7635240" y="1920240"/>
+            <a:off x="7635240" y="2423160"/>
             <a:ext cx="2743200" cy="457200"/>
           </a:xfrm>
           <a:prstGeom prst="roundRect">
@@ -14908,7 +15032,7 @@
         </p:nvSpPr>
         <p:spPr>
           <a:xfrm>
-            <a:off x="7635240" y="1920240"/>
+            <a:off x="7635240" y="2423160"/>
             <a:ext cx="2743200" cy="457200"/>
           </a:xfrm>
           <a:prstGeom prst="rect">
@@ -14950,7 +15074,7 @@
         </p:nvSpPr>
         <p:spPr>
           <a:xfrm>
-            <a:off x="7635240" y="2606040"/>
+            <a:off x="7635240" y="3063240"/>
             <a:ext cx="3886200" cy="548640"/>
           </a:xfrm>
           <a:prstGeom prst="rect">
@@ -14992,8 +15116,8 @@
         </p:nvSpPr>
         <p:spPr>
           <a:xfrm>
-            <a:off x="7635240" y="3291840"/>
-            <a:ext cx="3886200" cy="914400"/>
+            <a:off x="7635240" y="3703320"/>
+            <a:ext cx="3886200" cy="868680"/>
           </a:xfrm>
           <a:prstGeom prst="rect">
             <a:avLst/>
@@ -15034,8 +15158,8 @@
         </p:nvSpPr>
         <p:spPr>
           <a:xfrm>
-            <a:off x="7635240" y="4297680"/>
-            <a:ext cx="3886200" cy="502920"/>
+            <a:off x="7635240" y="4617720"/>
+            <a:ext cx="3886200" cy="320040"/>
           </a:xfrm>
           <a:prstGeom prst="rect">
             <a:avLst/>
@@ -15076,8 +15200,8 @@
         </p:nvSpPr>
         <p:spPr>
           <a:xfrm>
-            <a:off x="2651760" y="5166360"/>
-            <a:ext cx="9539935" cy="1691640"/>
+            <a:off x="2651760" y="5303520"/>
+            <a:ext cx="9539935" cy="1554480"/>
           </a:xfrm>
           <a:prstGeom prst="rect">
             <a:avLst/>
@@ -15105,8 +15229,8 @@
         </p:nvSpPr>
         <p:spPr>
           <a:xfrm>
-            <a:off x="3017520" y="5166360"/>
-            <a:ext cx="8412480" cy="1691640"/>
+            <a:off x="3017520" y="5303520"/>
+            <a:ext cx="8412480" cy="1554480"/>
           </a:xfrm>
           <a:prstGeom prst="rect">
             <a:avLst/>
@@ -15150,14 +15274,6 @@
 <file path=ppt/slides/slide8.xml><?xml version="1.0" encoding="utf-8"?>
 <p:sld xmlns:a="http://schemas.openxmlformats.org/drawingml/2006/main" xmlns:p="http://schemas.openxmlformats.org/presentationml/2006/main" xmlns:r="http://schemas.openxmlformats.org/officeDocument/2006/relationships">
   <p:cSld>
-    <p:bg>
-      <p:bgPr>
-        <a:solidFill>
-          <a:srgbClr val="FFFFFF"/>
-        </a:solidFill>
-        <a:effectLst/>
-      </p:bgPr>
-    </p:bg>
     <p:spTree>
       <p:nvGrpSpPr>
         <p:cNvPr id="1" name=""/>
@@ -15167,14 +15283,14 @@
       <p:grpSpPr/>
       <p:sp>
         <p:nvSpPr>
-          <p:cNvPr id="2" name="Rectangle 1"/>
+          <p:cNvPr id="3" name="Rectangle 2"/>
           <p:cNvSpPr/>
           <p:nvPr/>
         </p:nvSpPr>
         <p:spPr>
           <a:xfrm>
-            <a:off x="0" y="0"/>
-            <a:ext cx="4023360" cy="6858000"/>
+            <a:off x="0" y="1097280"/>
+            <a:ext cx="4023360" cy="5760720"/>
           </a:xfrm>
           <a:prstGeom prst="rect">
             <a:avLst/>
@@ -15196,14 +15312,14 @@
       </p:sp>
       <p:sp>
         <p:nvSpPr>
-          <p:cNvPr id="3" name="TextBox 2"/>
+          <p:cNvPr id="4" name="TextBox 3"/>
           <p:cNvSpPr txBox="1"/>
           <p:nvPr/>
         </p:nvSpPr>
         <p:spPr>
           <a:xfrm>
-            <a:off x="457200" y="822960"/>
-            <a:ext cx="3291840" cy="2011680"/>
+            <a:off x="457200" y="1325880"/>
+            <a:ext cx="3291840" cy="1554480"/>
           </a:xfrm>
           <a:prstGeom prst="rect">
             <a:avLst/>
@@ -15225,7 +15341,7 @@
               </a:spcAft>
             </a:pPr>
             <a:r>
-              <a:rPr sz="10000" b="1" i="0">
+              <a:rPr sz="9600" b="1" i="0">
                 <a:solidFill>
                   <a:srgbClr val="FFFFFF"/>
                 </a:solidFill>
@@ -15238,36 +15354,33 @@
       </p:sp>
       <p:sp>
         <p:nvSpPr>
-          <p:cNvPr id="4" name="TextBox 3"/>
-          <p:cNvSpPr txBox="1"/>
-          <p:nvPr/>
-        </p:nvSpPr>
-        <p:spPr>
-          <a:xfrm>
-            <a:off x="457200" y="3017520"/>
-            <a:ext cx="3200400" cy="1463040"/>
-          </a:xfrm>
-          <a:prstGeom prst="rect">
-            <a:avLst/>
-          </a:prstGeom>
-          <a:noFill/>
+          <p:cNvPr id="2" name="Title 1"/>
+          <p:cNvSpPr>
+            <a:spLocks noGrp="1"/>
+          </p:cNvSpPr>
+          <p:nvPr>
+            <p:ph type="title"/>
+          </p:nvPr>
+        </p:nvSpPr>
+        <p:spPr>
+          <a:xfrm>
+            <a:off x="457200" y="3063240"/>
+            <a:ext cx="3291840" cy="1005839"/>
+          </a:xfrm>
         </p:spPr>
         <p:txBody>
           <a:bodyPr wrap="square" lIns="0" rIns="0" tIns="0" bIns="0" anchor="t">
-            <a:spAutoFit/>
+            <a:noAutofit/>
           </a:bodyPr>
           <a:lstStyle/>
           <a:p>
             <a:pPr algn="l">
               <a:lnSpc>
-                <a:spcPct val="105000"/>
-              </a:lnSpc>
-              <a:spcAft>
-                <a:spcPts val="0"/>
-              </a:spcAft>
-            </a:pPr>
-            <a:r>
-              <a:rPr sz="2100" b="1" i="0">
+                <a:spcPct val="100000"/>
+              </a:lnSpc>
+            </a:pPr>
+            <a:r>
+              <a:rPr sz="2100" b="1">
                 <a:solidFill>
                   <a:srgbClr val="FFFFFF"/>
                 </a:solidFill>
@@ -15286,8 +15399,8 @@
         </p:nvSpPr>
         <p:spPr>
           <a:xfrm>
-            <a:off x="457200" y="4846320"/>
-            <a:ext cx="3200400" cy="457200"/>
+            <a:off x="457200" y="4709160"/>
+            <a:ext cx="3200400" cy="365760"/>
           </a:xfrm>
           <a:prstGeom prst="rect">
             <a:avLst/>
@@ -15336,8 +15449,8 @@
         </p:blipFill>
         <p:spPr>
           <a:xfrm>
-            <a:off x="457200" y="5852160"/>
-            <a:ext cx="1828800" cy="717176"/>
+            <a:off x="457200" y="5943600"/>
+            <a:ext cx="1645920" cy="645458"/>
           </a:xfrm>
           <a:prstGeom prst="rect">
             <a:avLst/>
@@ -15352,12 +15465,12 @@
         </p:nvSpPr>
         <p:spPr>
           <a:xfrm>
-            <a:off x="4480560" y="594360"/>
-            <a:ext cx="7269480" cy="1874519"/>
+            <a:off x="4480560" y="1325880"/>
+            <a:ext cx="7269480" cy="1645920"/>
           </a:xfrm>
           <a:prstGeom prst="roundRect">
             <a:avLst>
-              <a:gd name="adj" fmla="val 8780"/>
+              <a:gd name="adj" fmla="val 10000"/>
             </a:avLst>
           </a:prstGeom>
           <a:solidFill>
@@ -15383,8 +15496,8 @@
         </p:nvSpPr>
         <p:spPr>
           <a:xfrm>
-            <a:off x="4709160" y="822960"/>
-            <a:ext cx="685800" cy="685800"/>
+            <a:off x="4709160" y="1527048"/>
+            <a:ext cx="640080" cy="640080"/>
           </a:xfrm>
           <a:prstGeom prst="roundRect">
             <a:avLst>
@@ -15414,8 +15527,8 @@
         </p:nvSpPr>
         <p:spPr>
           <a:xfrm>
-            <a:off x="4709160" y="822960"/>
-            <a:ext cx="685800" cy="685800"/>
+            <a:off x="4709160" y="1527048"/>
+            <a:ext cx="640080" cy="640080"/>
           </a:xfrm>
           <a:prstGeom prst="rect">
             <a:avLst/>
@@ -15456,8 +15569,8 @@
         </p:nvSpPr>
         <p:spPr>
           <a:xfrm>
-            <a:off x="5623560" y="777240"/>
-            <a:ext cx="5852160" cy="1554480"/>
+            <a:off x="5623560" y="1508760"/>
+            <a:ext cx="5852160" cy="1325880"/>
           </a:xfrm>
           <a:prstGeom prst="rect">
             <a:avLst/>
@@ -15517,12 +15630,12 @@
         </p:nvSpPr>
         <p:spPr>
           <a:xfrm>
-            <a:off x="4480560" y="2651760"/>
-            <a:ext cx="7269480" cy="1874519"/>
+            <a:off x="4480560" y="3108960"/>
+            <a:ext cx="7269480" cy="1645920"/>
           </a:xfrm>
           <a:prstGeom prst="roundRect">
             <a:avLst>
-              <a:gd name="adj" fmla="val 8780"/>
+              <a:gd name="adj" fmla="val 10000"/>
             </a:avLst>
           </a:prstGeom>
           <a:solidFill>
@@ -15548,8 +15661,8 @@
         </p:nvSpPr>
         <p:spPr>
           <a:xfrm>
-            <a:off x="4709160" y="2880360"/>
-            <a:ext cx="685800" cy="685800"/>
+            <a:off x="4709160" y="3310128"/>
+            <a:ext cx="640080" cy="640080"/>
           </a:xfrm>
           <a:prstGeom prst="roundRect">
             <a:avLst>
@@ -15579,8 +15692,8 @@
         </p:nvSpPr>
         <p:spPr>
           <a:xfrm>
-            <a:off x="4709160" y="2880360"/>
-            <a:ext cx="685800" cy="685800"/>
+            <a:off x="4709160" y="3310128"/>
+            <a:ext cx="640080" cy="640080"/>
           </a:xfrm>
           <a:prstGeom prst="rect">
             <a:avLst/>
@@ -15621,8 +15734,8 @@
         </p:nvSpPr>
         <p:spPr>
           <a:xfrm>
-            <a:off x="5623560" y="2834640"/>
-            <a:ext cx="3794760" cy="1554480"/>
+            <a:off x="5623560" y="3291840"/>
+            <a:ext cx="3794760" cy="1325880"/>
           </a:xfrm>
           <a:prstGeom prst="rect">
             <a:avLst/>
@@ -15682,12 +15795,12 @@
         </p:nvSpPr>
         <p:spPr>
           <a:xfrm>
-            <a:off x="9738360" y="2926079"/>
-            <a:ext cx="1737360" cy="1325880"/>
+            <a:off x="9738360" y="3337560"/>
+            <a:ext cx="1737360" cy="1188720"/>
           </a:xfrm>
           <a:prstGeom prst="roundRect">
             <a:avLst>
-              <a:gd name="adj" fmla="val 6896"/>
+              <a:gd name="adj" fmla="val 7692"/>
             </a:avLst>
           </a:prstGeom>
           <a:solidFill>
@@ -15713,8 +15826,8 @@
         </p:nvSpPr>
         <p:spPr>
           <a:xfrm>
-            <a:off x="9875520" y="3063240"/>
-            <a:ext cx="1463040" cy="640080"/>
+            <a:off x="9875520" y="3456432"/>
+            <a:ext cx="1463040" cy="566928"/>
           </a:xfrm>
           <a:prstGeom prst="rect">
             <a:avLst/>
@@ -15742,8 +15855,8 @@
         </p:nvSpPr>
         <p:spPr>
           <a:xfrm>
-            <a:off x="9875520" y="3063240"/>
-            <a:ext cx="1463040" cy="640080"/>
+            <a:off x="9875520" y="3456432"/>
+            <a:ext cx="1463040" cy="566928"/>
           </a:xfrm>
           <a:prstGeom prst="rect">
             <a:avLst/>
@@ -15784,8 +15897,8 @@
         </p:nvSpPr>
         <p:spPr>
           <a:xfrm>
-            <a:off x="9875520" y="3794760"/>
-            <a:ext cx="1463040" cy="365760"/>
+            <a:off x="9875520" y="4114800"/>
+            <a:ext cx="1463040" cy="320040"/>
           </a:xfrm>
           <a:prstGeom prst="rect">
             <a:avLst/>
@@ -15826,12 +15939,12 @@
         </p:nvSpPr>
         <p:spPr>
           <a:xfrm>
-            <a:off x="4480560" y="4709160"/>
-            <a:ext cx="7269480" cy="1874519"/>
+            <a:off x="4480560" y="4892040"/>
+            <a:ext cx="7269480" cy="1645920"/>
           </a:xfrm>
           <a:prstGeom prst="roundRect">
             <a:avLst>
-              <a:gd name="adj" fmla="val 8780"/>
+              <a:gd name="adj" fmla="val 10000"/>
             </a:avLst>
           </a:prstGeom>
           <a:solidFill>
@@ -15857,8 +15970,8 @@
         </p:nvSpPr>
         <p:spPr>
           <a:xfrm>
-            <a:off x="4709160" y="4937760"/>
-            <a:ext cx="685800" cy="685800"/>
+            <a:off x="4709160" y="5093207"/>
+            <a:ext cx="640080" cy="640080"/>
           </a:xfrm>
           <a:prstGeom prst="roundRect">
             <a:avLst>
@@ -15888,8 +16001,8 @@
         </p:nvSpPr>
         <p:spPr>
           <a:xfrm>
-            <a:off x="4709160" y="4937760"/>
-            <a:ext cx="685800" cy="685800"/>
+            <a:off x="4709160" y="5093207"/>
+            <a:ext cx="640080" cy="640080"/>
           </a:xfrm>
           <a:prstGeom prst="rect">
             <a:avLst/>
@@ -15930,8 +16043,8 @@
         </p:nvSpPr>
         <p:spPr>
           <a:xfrm>
-            <a:off x="5623560" y="4892040"/>
-            <a:ext cx="3794760" cy="1554480"/>
+            <a:off x="5623560" y="5074920"/>
+            <a:ext cx="3794760" cy="1325880"/>
           </a:xfrm>
           <a:prstGeom prst="rect">
             <a:avLst/>
@@ -15991,12 +16104,12 @@
         </p:nvSpPr>
         <p:spPr>
           <a:xfrm>
-            <a:off x="9738360" y="4983480"/>
-            <a:ext cx="1737360" cy="1325880"/>
+            <a:off x="9738360" y="5120640"/>
+            <a:ext cx="1737360" cy="1188720"/>
           </a:xfrm>
           <a:prstGeom prst="roundRect">
             <a:avLst>
-              <a:gd name="adj" fmla="val 6896"/>
+              <a:gd name="adj" fmla="val 7692"/>
             </a:avLst>
           </a:prstGeom>
           <a:solidFill>
@@ -16022,8 +16135,8 @@
         </p:nvSpPr>
         <p:spPr>
           <a:xfrm>
-            <a:off x="9875520" y="5120640"/>
-            <a:ext cx="1463040" cy="146304"/>
+            <a:off x="9875520" y="5239512"/>
+            <a:ext cx="1463040" cy="137160"/>
           </a:xfrm>
           <a:prstGeom prst="rect">
             <a:avLst/>
@@ -16051,8 +16164,8 @@
         </p:nvSpPr>
         <p:spPr>
           <a:xfrm>
-            <a:off x="9875520" y="5367528"/>
-            <a:ext cx="1463040" cy="146304"/>
+            <a:off x="9875520" y="5468112"/>
+            <a:ext cx="1463040" cy="137160"/>
           </a:xfrm>
           <a:prstGeom prst="rect">
             <a:avLst/>
@@ -16080,8 +16193,8 @@
         </p:nvSpPr>
         <p:spPr>
           <a:xfrm>
-            <a:off x="9875520" y="5614416"/>
-            <a:ext cx="1463040" cy="146304"/>
+            <a:off x="9875520" y="5696712"/>
+            <a:ext cx="1463040" cy="137160"/>
           </a:xfrm>
           <a:prstGeom prst="rect">
             <a:avLst/>
@@ -16109,12 +16222,12 @@
         </p:nvSpPr>
         <p:spPr>
           <a:xfrm>
-            <a:off x="9875520" y="5897880"/>
-            <a:ext cx="1463040" cy="274320"/>
+            <a:off x="9875520" y="5925312"/>
+            <a:ext cx="1463040" cy="256032"/>
           </a:xfrm>
           <a:prstGeom prst="roundRect">
             <a:avLst>
-              <a:gd name="adj" fmla="val 20000"/>
+              <a:gd name="adj" fmla="val 21428"/>
             </a:avLst>
           </a:prstGeom>
           <a:solidFill>
@@ -16140,8 +16253,8 @@
         </p:nvSpPr>
         <p:spPr>
           <a:xfrm>
-            <a:off x="9875520" y="5897880"/>
-            <a:ext cx="1463040" cy="274320"/>
+            <a:off x="9875520" y="5925312"/>
+            <a:ext cx="1463040" cy="256032"/>
           </a:xfrm>
           <a:prstGeom prst="rect">
             <a:avLst/>
@@ -16185,14 +16298,6 @@
 <file path=ppt/slides/slide9.xml><?xml version="1.0" encoding="utf-8"?>
 <p:sld xmlns:a="http://schemas.openxmlformats.org/drawingml/2006/main" xmlns:p="http://schemas.openxmlformats.org/presentationml/2006/main" xmlns:r="http://schemas.openxmlformats.org/officeDocument/2006/relationships">
   <p:cSld>
-    <p:bg>
-      <p:bgPr>
-        <a:solidFill>
-          <a:srgbClr val="FFFFFF"/>
-        </a:solidFill>
-        <a:effectLst/>
-      </p:bgPr>
-    </p:bg>
     <p:spTree>
       <p:nvGrpSpPr>
         <p:cNvPr id="1" name=""/>
@@ -16202,14 +16307,14 @@
       <p:grpSpPr/>
       <p:sp>
         <p:nvSpPr>
-          <p:cNvPr id="2" name="TextBox 1"/>
+          <p:cNvPr id="3" name="TextBox 2"/>
           <p:cNvSpPr txBox="1"/>
           <p:nvPr/>
         </p:nvSpPr>
         <p:spPr>
           <a:xfrm>
-            <a:off x="822960" y="347472"/>
-            <a:ext cx="7498079" cy="274320"/>
+            <a:off x="822960" y="1170432"/>
+            <a:ext cx="7498079" cy="256032"/>
           </a:xfrm>
           <a:prstGeom prst="rect">
             <a:avLst/>
@@ -16244,14 +16349,14 @@
       </p:sp>
       <p:sp>
         <p:nvSpPr>
-          <p:cNvPr id="3" name="Rectangle 2"/>
+          <p:cNvPr id="4" name="Rectangle 3"/>
           <p:cNvSpPr/>
           <p:nvPr/>
         </p:nvSpPr>
         <p:spPr>
           <a:xfrm>
-            <a:off x="566928" y="704088"/>
-            <a:ext cx="64008" cy="923544"/>
+            <a:off x="566928" y="1435608"/>
+            <a:ext cx="64008" cy="893064"/>
           </a:xfrm>
           <a:prstGeom prst="rect">
             <a:avLst/>
@@ -16273,23 +16378,23 @@
       </p:sp>
       <p:sp>
         <p:nvSpPr>
-          <p:cNvPr id="4" name="TextBox 3"/>
-          <p:cNvSpPr txBox="1"/>
-          <p:nvPr/>
-        </p:nvSpPr>
-        <p:spPr>
-          <a:xfrm>
-            <a:off x="822960" y="731520"/>
-            <a:ext cx="7498079" cy="868680"/>
-          </a:xfrm>
-          <a:prstGeom prst="rect">
-            <a:avLst/>
-          </a:prstGeom>
-          <a:noFill/>
+          <p:cNvPr id="2" name="Title 1"/>
+          <p:cNvSpPr>
+            <a:spLocks noGrp="1"/>
+          </p:cNvSpPr>
+          <p:nvPr>
+            <p:ph type="title"/>
+          </p:nvPr>
+        </p:nvSpPr>
+        <p:spPr>
+          <a:xfrm>
+            <a:off x="822960" y="1463040"/>
+            <a:ext cx="7498079" cy="838200"/>
+          </a:xfrm>
         </p:spPr>
         <p:txBody>
           <a:bodyPr wrap="square" lIns="0" rIns="0" tIns="0" bIns="0" anchor="t">
-            <a:spAutoFit/>
+            <a:noAutofit/>
           </a:bodyPr>
           <a:lstStyle/>
           <a:p>
@@ -16297,12 +16402,9 @@
               <a:lnSpc>
                 <a:spcPct val="100000"/>
               </a:lnSpc>
-              <a:spcAft>
-                <a:spcPts val="0"/>
-              </a:spcAft>
-            </a:pPr>
-            <a:r>
-              <a:rPr sz="2700" b="1" i="0">
+            </a:pPr>
+            <a:r>
+              <a:rPr sz="2600" b="1">
                 <a:solidFill>
                   <a:srgbClr val="1A1A1A"/>
                 </a:solidFill>
@@ -16321,12 +16423,12 @@
         </p:nvSpPr>
         <p:spPr>
           <a:xfrm>
-            <a:off x="548640" y="2286000"/>
-            <a:ext cx="7680960" cy="1051560"/>
+            <a:off x="548640" y="2606040"/>
+            <a:ext cx="7680960" cy="960120"/>
           </a:xfrm>
           <a:prstGeom prst="roundRect">
             <a:avLst>
-              <a:gd name="adj" fmla="val 13043"/>
+              <a:gd name="adj" fmla="val 14285"/>
             </a:avLst>
           </a:prstGeom>
           <a:solidFill>
@@ -16352,7 +16454,7 @@
         </p:nvSpPr>
         <p:spPr>
           <a:xfrm>
-            <a:off x="731520" y="2560320"/>
+            <a:off x="731520" y="2834640"/>
             <a:ext cx="1920240" cy="502920"/>
           </a:xfrm>
           <a:prstGeom prst="roundRect">
@@ -16383,7 +16485,7 @@
         </p:nvSpPr>
         <p:spPr>
           <a:xfrm>
-            <a:off x="731520" y="2560320"/>
+            <a:off x="731520" y="2834640"/>
             <a:ext cx="1920240" cy="502920"/>
           </a:xfrm>
           <a:prstGeom prst="rect">
@@ -16425,8 +16527,8 @@
         </p:nvSpPr>
         <p:spPr>
           <a:xfrm>
-            <a:off x="2880360" y="2286000"/>
-            <a:ext cx="5212080" cy="1051560"/>
+            <a:off x="2880360" y="2606040"/>
+            <a:ext cx="5212080" cy="960120"/>
           </a:xfrm>
           <a:prstGeom prst="rect">
             <a:avLst/>
@@ -16467,12 +16569,12 @@
         </p:nvSpPr>
         <p:spPr>
           <a:xfrm>
-            <a:off x="548640" y="3474720"/>
-            <a:ext cx="7680960" cy="1051560"/>
+            <a:off x="548640" y="3703320"/>
+            <a:ext cx="7680960" cy="960120"/>
           </a:xfrm>
           <a:prstGeom prst="roundRect">
             <a:avLst>
-              <a:gd name="adj" fmla="val 13043"/>
+              <a:gd name="adj" fmla="val 14285"/>
             </a:avLst>
           </a:prstGeom>
           <a:solidFill>
@@ -16498,7 +16600,7 @@
         </p:nvSpPr>
         <p:spPr>
           <a:xfrm>
-            <a:off x="731520" y="3749039"/>
+            <a:off x="731520" y="3931920"/>
             <a:ext cx="1920240" cy="502920"/>
           </a:xfrm>
           <a:prstGeom prst="roundRect">
@@ -16529,7 +16631,7 @@
         </p:nvSpPr>
         <p:spPr>
           <a:xfrm>
-            <a:off x="731520" y="3749039"/>
+            <a:off x="731520" y="3931920"/>
             <a:ext cx="1920240" cy="502920"/>
           </a:xfrm>
           <a:prstGeom prst="rect">
@@ -16571,8 +16673,8 @@
         </p:nvSpPr>
         <p:spPr>
           <a:xfrm>
-            <a:off x="2880360" y="3474720"/>
-            <a:ext cx="5212080" cy="1051560"/>
+            <a:off x="2880360" y="3703320"/>
+            <a:ext cx="5212080" cy="960120"/>
           </a:xfrm>
           <a:prstGeom prst="rect">
             <a:avLst/>
@@ -16613,12 +16715,12 @@
         </p:nvSpPr>
         <p:spPr>
           <a:xfrm>
-            <a:off x="548640" y="4663440"/>
-            <a:ext cx="7680960" cy="1051560"/>
+            <a:off x="548640" y="4800600"/>
+            <a:ext cx="7680960" cy="960120"/>
           </a:xfrm>
           <a:prstGeom prst="roundRect">
             <a:avLst>
-              <a:gd name="adj" fmla="val 13043"/>
+              <a:gd name="adj" fmla="val 14285"/>
             </a:avLst>
           </a:prstGeom>
           <a:solidFill>
@@ -16644,7 +16746,7 @@
         </p:nvSpPr>
         <p:spPr>
           <a:xfrm>
-            <a:off x="731520" y="4937759"/>
+            <a:off x="731520" y="5029200"/>
             <a:ext cx="1920240" cy="502920"/>
           </a:xfrm>
           <a:prstGeom prst="roundRect">
@@ -16675,7 +16777,7 @@
         </p:nvSpPr>
         <p:spPr>
           <a:xfrm>
-            <a:off x="731520" y="4937759"/>
+            <a:off x="731520" y="5029200"/>
             <a:ext cx="1920240" cy="502920"/>
           </a:xfrm>
           <a:prstGeom prst="rect">
@@ -16717,8 +16819,8 @@
         </p:nvSpPr>
         <p:spPr>
           <a:xfrm>
-            <a:off x="2880360" y="4663440"/>
-            <a:ext cx="5212080" cy="1051560"/>
+            <a:off x="2880360" y="4800600"/>
+            <a:ext cx="5212080" cy="960120"/>
           </a:xfrm>
           <a:prstGeom prst="rect">
             <a:avLst/>
@@ -16760,7 +16862,7 @@
         <p:spPr>
           <a:xfrm>
             <a:off x="548640" y="5897880"/>
-            <a:ext cx="7680960" cy="777240"/>
+            <a:ext cx="7680960" cy="685800"/>
           </a:xfrm>
           <a:prstGeom prst="rect">
             <a:avLst/>
@@ -16789,7 +16891,7 @@
         <p:spPr>
           <a:xfrm>
             <a:off x="777240" y="5897880"/>
-            <a:ext cx="7315200" cy="777240"/>
+            <a:ext cx="7315200" cy="685800"/>
           </a:xfrm>
           <a:prstGeom prst="rect">
             <a:avLst/>
@@ -16811,7 +16913,7 @@
               </a:spcAft>
             </a:pPr>
             <a:r>
-              <a:rPr sz="1550" b="1" i="0">
+              <a:rPr sz="1500" b="1" i="0">
                 <a:solidFill>
                   <a:srgbClr val="FFFFFF"/>
                 </a:solidFill>
@@ -16830,8 +16932,8 @@
         </p:nvSpPr>
         <p:spPr>
           <a:xfrm>
-            <a:off x="8732520" y="640080"/>
-            <a:ext cx="2971800" cy="6035040"/>
+            <a:off x="8732520" y="1234440"/>
+            <a:ext cx="2971800" cy="5349240"/>
           </a:xfrm>
           <a:prstGeom prst="roundRect">
             <a:avLst>
@@ -16863,8 +16965,8 @@
         </p:nvSpPr>
         <p:spPr>
           <a:xfrm>
-            <a:off x="8869680" y="777240"/>
-            <a:ext cx="2697480" cy="1234440"/>
+            <a:off x="8869680" y="1371600"/>
+            <a:ext cx="2697480" cy="1097280"/>
           </a:xfrm>
           <a:prstGeom prst="rect">
             <a:avLst/>
@@ -16892,8 +16994,8 @@
         </p:nvSpPr>
         <p:spPr>
           <a:xfrm>
-            <a:off x="8869680" y="777240"/>
-            <a:ext cx="2697480" cy="1234440"/>
+            <a:off x="8869680" y="1371600"/>
+            <a:ext cx="2697480" cy="1097280"/>
           </a:xfrm>
           <a:prstGeom prst="rect">
             <a:avLst/>
@@ -16934,8 +17036,8 @@
         </p:nvSpPr>
         <p:spPr>
           <a:xfrm>
-            <a:off x="9006840" y="2286000"/>
-            <a:ext cx="2423160" cy="1188720"/>
+            <a:off x="9006840" y="2697480"/>
+            <a:ext cx="2423160" cy="914400"/>
           </a:xfrm>
           <a:prstGeom prst="rect">
             <a:avLst/>
@@ -16957,7 +17059,7 @@
               </a:spcAft>
             </a:pPr>
             <a:r>
-              <a:rPr sz="5400" b="1" i="0">
+              <a:rPr sz="5200" b="1" i="0">
                 <a:solidFill>
                   <a:srgbClr val="E72F2A"/>
                 </a:solidFill>
@@ -16976,8 +17078,8 @@
         </p:nvSpPr>
         <p:spPr>
           <a:xfrm>
-            <a:off x="9006840" y="3611880"/>
-            <a:ext cx="2423160" cy="1188720"/>
+            <a:off x="9006840" y="3794760"/>
+            <a:ext cx="2423160" cy="914400"/>
           </a:xfrm>
           <a:prstGeom prst="rect">
             <a:avLst/>
@@ -17047,8 +17149,8 @@
         </p:nvSpPr>
         <p:spPr>
           <a:xfrm>
-            <a:off x="9006840" y="4937760"/>
-            <a:ext cx="2423160" cy="548640"/>
+            <a:off x="9006840" y="4892040"/>
+            <a:ext cx="2423160" cy="365760"/>
           </a:xfrm>
           <a:prstGeom prst="rect">
             <a:avLst/>
@@ -17097,8 +17199,8 @@
         </p:blipFill>
         <p:spPr>
           <a:xfrm>
-            <a:off x="9464040" y="5760720"/>
-            <a:ext cx="1508760" cy="589443"/>
+            <a:off x="9509760" y="5532120"/>
+            <a:ext cx="1417320" cy="553720"/>
           </a:xfrm>
           <a:prstGeom prst="rect">
             <a:avLst/>
@@ -17114,6 +17216,301 @@
 </file>
 
 <file path=ppt/theme/theme1.xml><?xml version="1.0" encoding="utf-8"?>
+<a:theme xmlns:a="http://schemas.openxmlformats.org/drawingml/2006/main" name="Тема Office">
+  <a:themeElements>
+    <a:clrScheme name="Стандартная">
+      <a:dk1>
+        <a:sysClr val="windowText" lastClr="000000"/>
+      </a:dk1>
+      <a:lt1>
+        <a:sysClr val="window" lastClr="FFFFFF"/>
+      </a:lt1>
+      <a:dk2>
+        <a:srgbClr val="1A1A1A"/>
+      </a:dk2>
+      <a:lt2>
+        <a:srgbClr val="FCE9E8"/>
+      </a:lt2>
+      <a:accent1>
+        <a:srgbClr val="E72F2A"/>
+      </a:accent1>
+      <a:accent2>
+        <a:srgbClr val="1B3A8C"/>
+      </a:accent2>
+      <a:accent3>
+        <a:srgbClr val="E6C88F"/>
+      </a:accent3>
+      <a:accent4>
+        <a:srgbClr val="FAD5D4"/>
+      </a:accent4>
+      <a:accent5>
+        <a:srgbClr val="C4221E"/>
+      </a:accent5>
+      <a:accent6>
+        <a:srgbClr val="6B6B6B"/>
+      </a:accent6>
+      <a:hlink>
+        <a:srgbClr val="0563C1"/>
+      </a:hlink>
+      <a:folHlink>
+        <a:srgbClr val="954F72"/>
+      </a:folHlink>
+    </a:clrScheme>
+    <a:fontScheme name="Стандартная">
+      <a:majorFont>
+        <a:latin typeface="Gilroy" panose="020F0302020204030204"/>
+        <a:ea typeface=""/>
+        <a:cs typeface=""/>
+        <a:font script="Jpan" typeface="游ゴシック Light"/>
+        <a:font script="Hang" typeface="맑은 고딕"/>
+        <a:font script="Hans" typeface="等线 Light"/>
+        <a:font script="Hant" typeface="新細明體"/>
+        <a:font script="Arab" typeface="Times New Roman"/>
+        <a:font script="Hebr" typeface="Times New Roman"/>
+        <a:font script="Thai" typeface="Angsana New"/>
+        <a:font script="Ethi" typeface="Nyala"/>
+        <a:font script="Beng" typeface="Vrinda"/>
+        <a:font script="Gujr" typeface="Shruti"/>
+        <a:font script="Khmr" typeface="MoolBoran"/>
+        <a:font script="Knda" typeface="Tunga"/>
+        <a:font script="Guru" typeface="Raavi"/>
+        <a:font script="Cans" typeface="Euphemia"/>
+        <a:font script="Cher" typeface="Plantagenet Cherokee"/>
+        <a:font script="Yiii" typeface="Microsoft Yi Baiti"/>
+        <a:font script="Tibt" typeface="Microsoft Himalaya"/>
+        <a:font script="Thaa" typeface="MV Boli"/>
+        <a:font script="Deva" typeface="Mangal"/>
+        <a:font script="Telu" typeface="Gautami"/>
+        <a:font script="Taml" typeface="Latha"/>
+        <a:font script="Syrc" typeface="Estrangelo Edessa"/>
+        <a:font script="Orya" typeface="Kalinga"/>
+        <a:font script="Mlym" typeface="Kartika"/>
+        <a:font script="Laoo" typeface="DokChampa"/>
+        <a:font script="Sinh" typeface="Iskoola Pota"/>
+        <a:font script="Mong" typeface="Mongolian Baiti"/>
+        <a:font script="Viet" typeface="Times New Roman"/>
+        <a:font script="Uigh" typeface="Microsoft Uighur"/>
+        <a:font script="Geor" typeface="Sylfaen"/>
+        <a:font script="Armn" typeface="Arial"/>
+        <a:font script="Bugi" typeface="Leelawadee UI"/>
+        <a:font script="Bopo" typeface="Microsoft JhengHei"/>
+        <a:font script="Java" typeface="Javanese Text"/>
+        <a:font script="Lisu" typeface="Segoe UI"/>
+        <a:font script="Mymr" typeface="Myanmar Text"/>
+        <a:font script="Nkoo" typeface="Ebrima"/>
+        <a:font script="Olck" typeface="Nirmala UI"/>
+        <a:font script="Osma" typeface="Ebrima"/>
+        <a:font script="Phag" typeface="Phagspa"/>
+        <a:font script="Syrn" typeface="Estrangelo Edessa"/>
+        <a:font script="Syrj" typeface="Estrangelo Edessa"/>
+        <a:font script="Syre" typeface="Estrangelo Edessa"/>
+        <a:font script="Sora" typeface="Nirmala UI"/>
+        <a:font script="Tale" typeface="Microsoft Tai Le"/>
+        <a:font script="Talu" typeface="Microsoft New Tai Lue"/>
+        <a:font script="Tfng" typeface="Ebrima"/>
+      </a:majorFont>
+      <a:minorFont>
+        <a:latin typeface="Gilroy" panose="020F0502020204030204"/>
+        <a:ea typeface=""/>
+        <a:cs typeface=""/>
+        <a:font script="Jpan" typeface="游ゴシック"/>
+        <a:font script="Hang" typeface="맑은 고딕"/>
+        <a:font script="Hans" typeface="等线"/>
+        <a:font script="Hant" typeface="新細明體"/>
+        <a:font script="Arab" typeface="Arial"/>
+        <a:font script="Hebr" typeface="Arial"/>
+        <a:font script="Thai" typeface="Cordia New"/>
+        <a:font script="Ethi" typeface="Nyala"/>
+        <a:font script="Beng" typeface="Vrinda"/>
+        <a:font script="Gujr" typeface="Shruti"/>
+        <a:font script="Khmr" typeface="DaunPenh"/>
+        <a:font script="Knda" typeface="Tunga"/>
+        <a:font script="Guru" typeface="Raavi"/>
+        <a:font script="Cans" typeface="Euphemia"/>
+        <a:font script="Cher" typeface="Plantagenet Cherokee"/>
+        <a:font script="Yiii" typeface="Microsoft Yi Baiti"/>
+        <a:font script="Tibt" typeface="Microsoft Himalaya"/>
+        <a:font script="Thaa" typeface="MV Boli"/>
+        <a:font script="Deva" typeface="Mangal"/>
+        <a:font script="Telu" typeface="Gautami"/>
+        <a:font script="Taml" typeface="Latha"/>
+        <a:font script="Syrc" typeface="Estrangelo Edessa"/>
+        <a:font script="Orya" typeface="Kalinga"/>
+        <a:font script="Mlym" typeface="Kartika"/>
+        <a:font script="Laoo" typeface="DokChampa"/>
+        <a:font script="Sinh" typeface="Iskoola Pota"/>
+        <a:font script="Mong" typeface="Mongolian Baiti"/>
+        <a:font script="Viet" typeface="Arial"/>
+        <a:font script="Uigh" typeface="Microsoft Uighur"/>
+        <a:font script="Geor" typeface="Sylfaen"/>
+        <a:font script="Armn" typeface="Arial"/>
+        <a:font script="Bugi" typeface="Leelawadee UI"/>
+        <a:font script="Bopo" typeface="Microsoft JhengHei"/>
+        <a:font script="Java" typeface="Javanese Text"/>
+        <a:font script="Lisu" typeface="Segoe UI"/>
+        <a:font script="Mymr" typeface="Myanmar Text"/>
+        <a:font script="Nkoo" typeface="Ebrima"/>
+        <a:font script="Olck" typeface="Nirmala UI"/>
+        <a:font script="Osma" typeface="Ebrima"/>
+        <a:font script="Phag" typeface="Phagspa"/>
+        <a:font script="Syrn" typeface="Estrangelo Edessa"/>
+        <a:font script="Syrj" typeface="Estrangelo Edessa"/>
+        <a:font script="Syre" typeface="Estrangelo Edessa"/>
+        <a:font script="Sora" typeface="Nirmala UI"/>
+        <a:font script="Tale" typeface="Microsoft Tai Le"/>
+        <a:font script="Talu" typeface="Microsoft New Tai Lue"/>
+        <a:font script="Tfng" typeface="Ebrima"/>
+      </a:minorFont>
+    </a:fontScheme>
+    <a:fmtScheme name="Стандартная">
+      <a:fillStyleLst>
+        <a:solidFill>
+          <a:schemeClr val="phClr"/>
+        </a:solidFill>
+        <a:gradFill rotWithShape="1">
+          <a:gsLst>
+            <a:gs pos="0">
+              <a:schemeClr val="phClr">
+                <a:lumMod val="110000"/>
+                <a:satMod val="105000"/>
+                <a:tint val="67000"/>
+              </a:schemeClr>
+            </a:gs>
+            <a:gs pos="50000">
+              <a:schemeClr val="phClr">
+                <a:lumMod val="105000"/>
+                <a:satMod val="103000"/>
+                <a:tint val="73000"/>
+              </a:schemeClr>
+            </a:gs>
+            <a:gs pos="100000">
+              <a:schemeClr val="phClr">
+                <a:lumMod val="105000"/>
+                <a:satMod val="109000"/>
+                <a:tint val="81000"/>
+              </a:schemeClr>
+            </a:gs>
+          </a:gsLst>
+          <a:lin ang="5400000" scaled="0"/>
+        </a:gradFill>
+        <a:gradFill rotWithShape="1">
+          <a:gsLst>
+            <a:gs pos="0">
+              <a:schemeClr val="phClr">
+                <a:satMod val="103000"/>
+                <a:lumMod val="102000"/>
+                <a:tint val="94000"/>
+              </a:schemeClr>
+            </a:gs>
+            <a:gs pos="50000">
+              <a:schemeClr val="phClr">
+                <a:satMod val="110000"/>
+                <a:lumMod val="100000"/>
+                <a:shade val="100000"/>
+              </a:schemeClr>
+            </a:gs>
+            <a:gs pos="100000">
+              <a:schemeClr val="phClr">
+                <a:lumMod val="99000"/>
+                <a:satMod val="120000"/>
+                <a:shade val="78000"/>
+              </a:schemeClr>
+            </a:gs>
+          </a:gsLst>
+          <a:lin ang="5400000" scaled="0"/>
+        </a:gradFill>
+      </a:fillStyleLst>
+      <a:lnStyleLst>
+        <a:ln w="6350" cap="flat" cmpd="sng" algn="ctr">
+          <a:solidFill>
+            <a:schemeClr val="phClr"/>
+          </a:solidFill>
+          <a:prstDash val="solid"/>
+          <a:miter lim="800000"/>
+        </a:ln>
+        <a:ln w="12700" cap="flat" cmpd="sng" algn="ctr">
+          <a:solidFill>
+            <a:schemeClr val="phClr"/>
+          </a:solidFill>
+          <a:prstDash val="solid"/>
+          <a:miter lim="800000"/>
+        </a:ln>
+        <a:ln w="19050" cap="flat" cmpd="sng" algn="ctr">
+          <a:solidFill>
+            <a:schemeClr val="phClr"/>
+          </a:solidFill>
+          <a:prstDash val="solid"/>
+          <a:miter lim="800000"/>
+        </a:ln>
+      </a:lnStyleLst>
+      <a:effectStyleLst>
+        <a:effectStyle>
+          <a:effectLst/>
+        </a:effectStyle>
+        <a:effectStyle>
+          <a:effectLst/>
+        </a:effectStyle>
+        <a:effectStyle>
+          <a:effectLst>
+            <a:outerShdw blurRad="57150" dist="19050" dir="5400000" algn="ctr" rotWithShape="0">
+              <a:srgbClr val="000000">
+                <a:alpha val="63000"/>
+              </a:srgbClr>
+            </a:outerShdw>
+          </a:effectLst>
+        </a:effectStyle>
+      </a:effectStyleLst>
+      <a:bgFillStyleLst>
+        <a:solidFill>
+          <a:schemeClr val="phClr"/>
+        </a:solidFill>
+        <a:solidFill>
+          <a:schemeClr val="phClr">
+            <a:tint val="95000"/>
+            <a:satMod val="170000"/>
+          </a:schemeClr>
+        </a:solidFill>
+        <a:gradFill rotWithShape="1">
+          <a:gsLst>
+            <a:gs pos="0">
+              <a:schemeClr val="phClr">
+                <a:tint val="93000"/>
+                <a:satMod val="150000"/>
+                <a:shade val="98000"/>
+                <a:lumMod val="102000"/>
+              </a:schemeClr>
+            </a:gs>
+            <a:gs pos="50000">
+              <a:schemeClr val="phClr">
+                <a:tint val="98000"/>
+                <a:satMod val="130000"/>
+                <a:shade val="90000"/>
+                <a:lumMod val="103000"/>
+              </a:schemeClr>
+            </a:gs>
+            <a:gs pos="100000">
+              <a:schemeClr val="phClr">
+                <a:shade val="63000"/>
+                <a:satMod val="120000"/>
+              </a:schemeClr>
+            </a:gs>
+          </a:gsLst>
+          <a:lin ang="5400000" scaled="0"/>
+        </a:gradFill>
+      </a:bgFillStyleLst>
+    </a:fmtScheme>
+  </a:themeElements>
+  <a:objectDefaults/>
+  <a:extraClrSchemeLst/>
+  <a:extLst>
+    <a:ext uri="{05A4C25C-085E-4340-85A3-A5531E510DB2}">
+      <thm15:themeFamily xmlns:thm15="http://schemas.microsoft.com/office/thememl/2012/main" name="Презентация1" id="{FD1A400E-B3A4-9943-91A7-935306E9B933}" vid="{41D8448F-F911-9F47-AA3D-C192C3EDB150}"/>
+    </a:ext>
+  </a:extLst>
+</a:theme>
+</file>
+
+<file path=ppt/theme/theme2.xml><?xml version="1.0" encoding="utf-8"?>
 <a:theme xmlns:a="http://schemas.openxmlformats.org/drawingml/2006/main" name="Office Theme">
   <a:themeElements>
     <a:clrScheme name="Office">
@@ -17124,28 +17521,28 @@
         <a:sysClr val="window" lastClr="FFFFFF"/>
       </a:lt1>
       <a:dk2>
-        <a:srgbClr val="1F497D"/>
+        <a:srgbClr val="1A1A1A"/>
       </a:dk2>
       <a:lt2>
-        <a:srgbClr val="EEECE1"/>
+        <a:srgbClr val="FCE9E8"/>
       </a:lt2>
       <a:accent1>
-        <a:srgbClr val="4F81BD"/>
+        <a:srgbClr val="E72F2A"/>
       </a:accent1>
       <a:accent2>
-        <a:srgbClr val="C0504D"/>
+        <a:srgbClr val="1B3A8C"/>
       </a:accent2>
       <a:accent3>
-        <a:srgbClr val="9BBB59"/>
+        <a:srgbClr val="E6C88F"/>
       </a:accent3>
       <a:accent4>
-        <a:srgbClr val="8064A2"/>
+        <a:srgbClr val="FAD5D4"/>
       </a:accent4>
       <a:accent5>
-        <a:srgbClr val="4BACC6"/>
+        <a:srgbClr val="C4221E"/>
       </a:accent5>
       <a:accent6>
-        <a:srgbClr val="F79646"/>
+        <a:srgbClr val="6B6B6B"/>
       </a:accent6>
       <a:hlink>
         <a:srgbClr val="0000FF"/>
@@ -17156,7 +17553,7 @@
     </a:clrScheme>
     <a:fontScheme name="Office">
       <a:majorFont>
-        <a:latin typeface="Calibri"/>
+        <a:latin typeface="Gilroy"/>
         <a:ea typeface=""/>
         <a:cs typeface=""/>
         <a:font script="Jpan" typeface="ＭＳ Ｐゴシック"/>
@@ -17191,327 +17588,7 @@
         <a:font script="Geor" typeface="Sylfaen"/>
       </a:majorFont>
       <a:minorFont>
-        <a:latin typeface="Calibri"/>
-        <a:ea typeface=""/>
-        <a:cs typeface=""/>
-        <a:font script="Jpan" typeface="ＭＳ Ｐゴシック"/>
-        <a:font script="Hang" typeface="맑은 고딕"/>
-        <a:font script="Hans" typeface="宋体"/>
-        <a:font script="Hant" typeface="新細明體"/>
-        <a:font script="Arab" typeface="Arial"/>
-        <a:font script="Hebr" typeface="Arial"/>
-        <a:font script="Thai" typeface="Cordia New"/>
-        <a:font script="Ethi" typeface="Nyala"/>
-        <a:font script="Beng" typeface="Vrinda"/>
-        <a:font script="Gujr" typeface="Shruti"/>
-        <a:font script="Khmr" typeface="DaunPenh"/>
-        <a:font script="Knda" typeface="Tunga"/>
-        <a:font script="Guru" typeface="Raavi"/>
-        <a:font script="Cans" typeface="Euphemia"/>
-        <a:font script="Cher" typeface="Plantagenet Cherokee"/>
-        <a:font script="Yiii" typeface="Microsoft Yi Baiti"/>
-        <a:font script="Tibt" typeface="Microsoft Himalaya"/>
-        <a:font script="Thaa" typeface="MV Boli"/>
-        <a:font script="Deva" typeface="Mangal"/>
-        <a:font script="Telu" typeface="Gautami"/>
-        <a:font script="Taml" typeface="Latha"/>
-        <a:font script="Syrc" typeface="Estrangelo Edessa"/>
-        <a:font script="Orya" typeface="Kalinga"/>
-        <a:font script="Mlym" typeface="Kartika"/>
-        <a:font script="Laoo" typeface="DokChampa"/>
-        <a:font script="Sinh" typeface="Iskoola Pota"/>
-        <a:font script="Mong" typeface="Mongolian Baiti"/>
-        <a:font script="Viet" typeface="Arial"/>
-        <a:font script="Uigh" typeface="Microsoft Uighur"/>
-        <a:font script="Geor" typeface="Sylfaen"/>
-      </a:minorFont>
-    </a:fontScheme>
-    <a:fmtScheme name="Office">
-      <a:fillStyleLst>
-        <a:solidFill>
-          <a:schemeClr val="phClr"/>
-        </a:solidFill>
-        <a:gradFill rotWithShape="1">
-          <a:gsLst>
-            <a:gs pos="0">
-              <a:schemeClr val="phClr">
-                <a:tint val="50000"/>
-                <a:satMod val="300000"/>
-              </a:schemeClr>
-            </a:gs>
-            <a:gs pos="35000">
-              <a:schemeClr val="phClr">
-                <a:tint val="37000"/>
-                <a:satMod val="300000"/>
-              </a:schemeClr>
-            </a:gs>
-            <a:gs pos="100000">
-              <a:schemeClr val="phClr">
-                <a:tint val="15000"/>
-                <a:satMod val="350000"/>
-              </a:schemeClr>
-            </a:gs>
-          </a:gsLst>
-          <a:lin ang="16200000" scaled="1"/>
-        </a:gradFill>
-        <a:gradFill rotWithShape="1">
-          <a:gsLst>
-            <a:gs pos="0">
-              <a:schemeClr val="phClr">
-                <a:tint val="100000"/>
-                <a:shade val="100000"/>
-                <a:satMod val="130000"/>
-              </a:schemeClr>
-            </a:gs>
-            <a:gs pos="100000">
-              <a:schemeClr val="phClr">
-                <a:tint val="50000"/>
-                <a:shade val="100000"/>
-                <a:satMod val="350000"/>
-              </a:schemeClr>
-            </a:gs>
-          </a:gsLst>
-          <a:lin ang="16200000" scaled="0"/>
-        </a:gradFill>
-      </a:fillStyleLst>
-      <a:lnStyleLst>
-        <a:ln w="9525" cap="flat" cmpd="sng" algn="ctr">
-          <a:solidFill>
-            <a:schemeClr val="phClr">
-              <a:shade val="95000"/>
-              <a:satMod val="105000"/>
-            </a:schemeClr>
-          </a:solidFill>
-          <a:prstDash val="solid"/>
-        </a:ln>
-        <a:ln w="25400" cap="flat" cmpd="sng" algn="ctr">
-          <a:solidFill>
-            <a:schemeClr val="phClr"/>
-          </a:solidFill>
-          <a:prstDash val="solid"/>
-        </a:ln>
-        <a:ln w="38100" cap="flat" cmpd="sng" algn="ctr">
-          <a:solidFill>
-            <a:schemeClr val="phClr"/>
-          </a:solidFill>
-          <a:prstDash val="solid"/>
-        </a:ln>
-      </a:lnStyleLst>
-      <a:effectStyleLst>
-        <a:effectStyle>
-          <a:effectLst>
-            <a:outerShdw blurRad="40000" dist="20000" dir="5400000" rotWithShape="0">
-              <a:srgbClr val="000000">
-                <a:alpha val="38000"/>
-              </a:srgbClr>
-            </a:outerShdw>
-          </a:effectLst>
-        </a:effectStyle>
-        <a:effectStyle>
-          <a:effectLst>
-            <a:outerShdw blurRad="40000" dist="23000" dir="5400000" rotWithShape="0">
-              <a:srgbClr val="000000">
-                <a:alpha val="35000"/>
-              </a:srgbClr>
-            </a:outerShdw>
-          </a:effectLst>
-        </a:effectStyle>
-        <a:effectStyle>
-          <a:effectLst>
-            <a:outerShdw blurRad="40000" dist="23000" dir="5400000" rotWithShape="0">
-              <a:srgbClr val="000000">
-                <a:alpha val="35000"/>
-              </a:srgbClr>
-            </a:outerShdw>
-          </a:effectLst>
-          <a:scene3d>
-            <a:camera prst="orthographicFront">
-              <a:rot lat="0" lon="0" rev="0"/>
-            </a:camera>
-            <a:lightRig rig="threePt" dir="t">
-              <a:rot lat="0" lon="0" rev="1200000"/>
-            </a:lightRig>
-          </a:scene3d>
-          <a:sp3d>
-            <a:bevelT w="63500" h="25400"/>
-          </a:sp3d>
-        </a:effectStyle>
-      </a:effectStyleLst>
-      <a:bgFillStyleLst>
-        <a:solidFill>
-          <a:schemeClr val="phClr"/>
-        </a:solidFill>
-        <a:gradFill rotWithShape="1">
-          <a:gsLst>
-            <a:gs pos="0">
-              <a:schemeClr val="phClr">
-                <a:tint val="40000"/>
-                <a:satMod val="350000"/>
-              </a:schemeClr>
-            </a:gs>
-            <a:gs pos="40000">
-              <a:schemeClr val="phClr">
-                <a:tint val="45000"/>
-                <a:shade val="99000"/>
-                <a:satMod val="350000"/>
-              </a:schemeClr>
-            </a:gs>
-            <a:gs pos="100000">
-              <a:schemeClr val="phClr">
-                <a:shade val="20000"/>
-                <a:satMod val="255000"/>
-              </a:schemeClr>
-            </a:gs>
-          </a:gsLst>
-          <a:path path="circle">
-            <a:fillToRect l="50000" t="-80000" r="50000" b="180000"/>
-          </a:path>
-        </a:gradFill>
-        <a:gradFill rotWithShape="1">
-          <a:gsLst>
-            <a:gs pos="0">
-              <a:schemeClr val="phClr">
-                <a:tint val="80000"/>
-                <a:satMod val="300000"/>
-              </a:schemeClr>
-            </a:gs>
-            <a:gs pos="100000">
-              <a:schemeClr val="phClr">
-                <a:shade val="30000"/>
-                <a:satMod val="200000"/>
-              </a:schemeClr>
-            </a:gs>
-          </a:gsLst>
-          <a:path path="circle">
-            <a:fillToRect l="50000" t="50000" r="50000" b="50000"/>
-          </a:path>
-        </a:gradFill>
-      </a:bgFillStyleLst>
-    </a:fmtScheme>
-  </a:themeElements>
-  <a:objectDefaults>
-    <a:spDef>
-      <a:spPr/>
-      <a:bodyPr/>
-      <a:lstStyle/>
-      <a:style>
-        <a:lnRef idx="1">
-          <a:schemeClr val="accent1"/>
-        </a:lnRef>
-        <a:fillRef idx="3">
-          <a:schemeClr val="accent1"/>
-        </a:fillRef>
-        <a:effectRef idx="2">
-          <a:schemeClr val="accent1"/>
-        </a:effectRef>
-        <a:fontRef idx="minor">
-          <a:schemeClr val="lt1"/>
-        </a:fontRef>
-      </a:style>
-    </a:spDef>
-    <a:lnDef>
-      <a:spPr/>
-      <a:bodyPr/>
-      <a:lstStyle/>
-      <a:style>
-        <a:lnRef idx="2">
-          <a:schemeClr val="accent1"/>
-        </a:lnRef>
-        <a:fillRef idx="0">
-          <a:schemeClr val="accent1"/>
-        </a:fillRef>
-        <a:effectRef idx="1">
-          <a:schemeClr val="accent1"/>
-        </a:effectRef>
-        <a:fontRef idx="minor">
-          <a:schemeClr val="tx1"/>
-        </a:fontRef>
-      </a:style>
-    </a:lnDef>
-  </a:objectDefaults>
-  <a:extraClrSchemeLst/>
-</a:theme>
-</file>
-
-<file path=ppt/theme/theme2.xml><?xml version="1.0" encoding="utf-8"?>
-<a:theme xmlns:a="http://schemas.openxmlformats.org/drawingml/2006/main" name="Office Theme">
-  <a:themeElements>
-    <a:clrScheme name="Office">
-      <a:dk1>
-        <a:sysClr val="windowText" lastClr="000000"/>
-      </a:dk1>
-      <a:lt1>
-        <a:sysClr val="window" lastClr="FFFFFF"/>
-      </a:lt1>
-      <a:dk2>
-        <a:srgbClr val="1F497D"/>
-      </a:dk2>
-      <a:lt2>
-        <a:srgbClr val="EEECE1"/>
-      </a:lt2>
-      <a:accent1>
-        <a:srgbClr val="4F81BD"/>
-      </a:accent1>
-      <a:accent2>
-        <a:srgbClr val="C0504D"/>
-      </a:accent2>
-      <a:accent3>
-        <a:srgbClr val="9BBB59"/>
-      </a:accent3>
-      <a:accent4>
-        <a:srgbClr val="8064A2"/>
-      </a:accent4>
-      <a:accent5>
-        <a:srgbClr val="4BACC6"/>
-      </a:accent5>
-      <a:accent6>
-        <a:srgbClr val="F79646"/>
-      </a:accent6>
-      <a:hlink>
-        <a:srgbClr val="0000FF"/>
-      </a:hlink>
-      <a:folHlink>
-        <a:srgbClr val="800080"/>
-      </a:folHlink>
-    </a:clrScheme>
-    <a:fontScheme name="Office">
-      <a:majorFont>
-        <a:latin typeface="Calibri"/>
-        <a:ea typeface=""/>
-        <a:cs typeface=""/>
-        <a:font script="Jpan" typeface="ＭＳ Ｐゴシック"/>
-        <a:font script="Hang" typeface="맑은 고딕"/>
-        <a:font script="Hans" typeface="宋体"/>
-        <a:font script="Hant" typeface="新細明體"/>
-        <a:font script="Arab" typeface="Times New Roman"/>
-        <a:font script="Hebr" typeface="Times New Roman"/>
-        <a:font script="Thai" typeface="Angsana New"/>
-        <a:font script="Ethi" typeface="Nyala"/>
-        <a:font script="Beng" typeface="Vrinda"/>
-        <a:font script="Gujr" typeface="Shruti"/>
-        <a:font script="Khmr" typeface="MoolBoran"/>
-        <a:font script="Knda" typeface="Tunga"/>
-        <a:font script="Guru" typeface="Raavi"/>
-        <a:font script="Cans" typeface="Euphemia"/>
-        <a:font script="Cher" typeface="Plantagenet Cherokee"/>
-        <a:font script="Yiii" typeface="Microsoft Yi Baiti"/>
-        <a:font script="Tibt" typeface="Microsoft Himalaya"/>
-        <a:font script="Thaa" typeface="MV Boli"/>
-        <a:font script="Deva" typeface="Mangal"/>
-        <a:font script="Telu" typeface="Gautami"/>
-        <a:font script="Taml" typeface="Latha"/>
-        <a:font script="Syrc" typeface="Estrangelo Edessa"/>
-        <a:font script="Orya" typeface="Kalinga"/>
-        <a:font script="Mlym" typeface="Kartika"/>
-        <a:font script="Laoo" typeface="DokChampa"/>
-        <a:font script="Sinh" typeface="Iskoola Pota"/>
-        <a:font script="Mong" typeface="Mongolian Baiti"/>
-        <a:font script="Viet" typeface="Times New Roman"/>
-        <a:font script="Uigh" typeface="Microsoft Uighur"/>
-        <a:font script="Geor" typeface="Sylfaen"/>
-      </a:majorFont>
-      <a:minorFont>
-        <a:latin typeface="Calibri"/>
+        <a:latin typeface="Gilroy"/>
         <a:ea typeface=""/>
         <a:cs typeface=""/>
         <a:font script="Jpan" typeface="ＭＳ Ｐゴシック"/>
